--- a/ADA_SoSe2025_Waldbranderkennung.pptx
+++ b/ADA_SoSe2025_Waldbranderkennung.pptx
@@ -5,10 +5,10 @@
     <p:sldMasterId id="2147483908" r:id="rId1"/>
   </p:sldMasterIdLst>
   <p:notesMasterIdLst>
-    <p:notesMasterId r:id="rId18"/>
+    <p:notesMasterId r:id="rId24"/>
   </p:notesMasterIdLst>
   <p:handoutMasterIdLst>
-    <p:handoutMasterId r:id="rId19"/>
+    <p:handoutMasterId r:id="rId25"/>
   </p:handoutMasterIdLst>
   <p:sldIdLst>
     <p:sldId id="2134804702" r:id="rId2"/>
@@ -18,15 +18,21 @@
     <p:sldId id="2134804705" r:id="rId6"/>
     <p:sldId id="2134804706" r:id="rId7"/>
     <p:sldId id="2134804707" r:id="rId8"/>
-    <p:sldId id="2134804708" r:id="rId9"/>
-    <p:sldId id="2134804710" r:id="rId10"/>
-    <p:sldId id="2134804712" r:id="rId11"/>
-    <p:sldId id="2134804715" r:id="rId12"/>
-    <p:sldId id="2134804714" r:id="rId13"/>
-    <p:sldId id="2134804713" r:id="rId14"/>
-    <p:sldId id="2134804709" r:id="rId15"/>
-    <p:sldId id="2134804680" r:id="rId16"/>
-    <p:sldId id="2134804711" r:id="rId17"/>
+    <p:sldId id="2134804716" r:id="rId9"/>
+    <p:sldId id="2134804718" r:id="rId10"/>
+    <p:sldId id="2134804717" r:id="rId11"/>
+    <p:sldId id="2134804719" r:id="rId12"/>
+    <p:sldId id="2134804720" r:id="rId13"/>
+    <p:sldId id="2134804721" r:id="rId14"/>
+    <p:sldId id="2134804708" r:id="rId15"/>
+    <p:sldId id="2134804710" r:id="rId16"/>
+    <p:sldId id="2134804712" r:id="rId17"/>
+    <p:sldId id="2134804715" r:id="rId18"/>
+    <p:sldId id="2134804714" r:id="rId19"/>
+    <p:sldId id="2134804713" r:id="rId20"/>
+    <p:sldId id="2134804709" r:id="rId21"/>
+    <p:sldId id="2134804680" r:id="rId22"/>
+    <p:sldId id="2134804711" r:id="rId23"/>
   </p:sldIdLst>
   <p:sldSz cx="12192000" cy="6858000"/>
   <p:notesSz cx="6797675" cy="9926638"/>
@@ -167,6 +173,12 @@
             <p14:sldId id="2134804705"/>
             <p14:sldId id="2134804706"/>
             <p14:sldId id="2134804707"/>
+            <p14:sldId id="2134804716"/>
+            <p14:sldId id="2134804718"/>
+            <p14:sldId id="2134804717"/>
+            <p14:sldId id="2134804719"/>
+            <p14:sldId id="2134804720"/>
+            <p14:sldId id="2134804721"/>
             <p14:sldId id="2134804708"/>
             <p14:sldId id="2134804710"/>
             <p14:sldId id="2134804712"/>
@@ -385,7 +397,7 @@
               <a:pPr>
                 <a:defRPr/>
               </a:pPr>
-              <a:t>11.06.25</a:t>
+              <a:t>11.06.2025</a:t>
             </a:fld>
             <a:endParaRPr lang="de-DE"/>
           </a:p>
@@ -488,7 +500,7 @@
               <a:pPr>
                 <a:defRPr/>
               </a:pPr>
-              <a:t>‹#›</a:t>
+              <a:t>‹Nr.›</a:t>
             </a:fld>
             <a:endParaRPr lang="de-DE"/>
           </a:p>
@@ -627,7 +639,7 @@
               <a:pPr>
                 <a:defRPr/>
               </a:pPr>
-              <a:t>11.06.25</a:t>
+              <a:t>11.06.2025</a:t>
             </a:fld>
             <a:endParaRPr lang="de-DE"/>
           </a:p>
@@ -835,7 +847,7 @@
               <a:pPr>
                 <a:defRPr/>
               </a:pPr>
-              <a:t>‹#›</a:t>
+              <a:t>‹Nr.›</a:t>
             </a:fld>
             <a:endParaRPr lang="de-DE"/>
           </a:p>
@@ -1264,7 +1276,7 @@
               <a:pPr>
                 <a:defRPr/>
               </a:pPr>
-              <a:t>9</a:t>
+              <a:t>15</a:t>
             </a:fld>
             <a:endParaRPr lang="de-DE"/>
           </a:p>
@@ -1354,7 +1366,7 @@
               <a:pPr>
                 <a:defRPr/>
               </a:pPr>
-              <a:t>12</a:t>
+              <a:t>18</a:t>
             </a:fld>
             <a:endParaRPr lang="de-DE"/>
           </a:p>
@@ -1695,7 +1707,7 @@
             </a:pPr>
             <a:fld id="{97C69557-540C-447C-8BEF-1BBC1255F022}" type="datetime1">
               <a:rPr lang="de-DE" smtClean="0"/>
-              <a:t>11.06.25</a:t>
+              <a:t>11.06.2025</a:t>
             </a:fld>
             <a:endParaRPr lang="de-DE" dirty="0"/>
           </a:p>
@@ -1798,7 +1810,7 @@
             <a:fld id="{029DE7E0-E051-4C03-AF53-7018E0F7EF0C}" type="slidenum">
               <a:rPr lang="de-DE" altLang="de-DE"/>
               <a:pPr/>
-              <a:t>‹#›</a:t>
+              <a:t>‹Nr.›</a:t>
             </a:fld>
             <a:endParaRPr lang="de-DE" altLang="de-DE"/>
           </a:p>
@@ -2194,7 +2206,7 @@
             </a:pPr>
             <a:fld id="{AC577783-DE3D-4066-A708-26327062C6C4}" type="datetime1">
               <a:rPr lang="de-DE" smtClean="0"/>
-              <a:t>11.06.25</a:t>
+              <a:t>11.06.2025</a:t>
             </a:fld>
             <a:endParaRPr lang="de-DE" dirty="0"/>
           </a:p>
@@ -2297,7 +2309,7 @@
             <a:fld id="{029DE7E0-E051-4C03-AF53-7018E0F7EF0C}" type="slidenum">
               <a:rPr lang="de-DE" altLang="de-DE"/>
               <a:pPr/>
-              <a:t>‹#›</a:t>
+              <a:t>‹Nr.›</a:t>
             </a:fld>
             <a:endParaRPr lang="de-DE" altLang="de-DE"/>
           </a:p>
@@ -2536,7 +2548,7 @@
             </a:pPr>
             <a:fld id="{09D76D4D-BB23-473E-876C-4E3EC0B5B16A}" type="datetime1">
               <a:rPr lang="de-DE" smtClean="0"/>
-              <a:t>11.06.25</a:t>
+              <a:t>11.06.2025</a:t>
             </a:fld>
             <a:endParaRPr lang="de-DE" dirty="0"/>
           </a:p>
@@ -2639,7 +2651,7 @@
             <a:fld id="{029DE7E0-E051-4C03-AF53-7018E0F7EF0C}" type="slidenum">
               <a:rPr lang="de-DE" altLang="de-DE"/>
               <a:pPr/>
-              <a:t>‹#›</a:t>
+              <a:t>‹Nr.›</a:t>
             </a:fld>
             <a:endParaRPr lang="de-DE" altLang="de-DE" dirty="0"/>
           </a:p>
@@ -3236,7 +3248,7 @@
           <p:cNvPr id="2" name="Titel 1">
             <a:extLst>
               <a:ext uri="{FF2B5EF4-FFF2-40B4-BE49-F238E27FC236}">
-                <a16:creationId xmlns:a16="http://schemas.microsoft.com/office/drawing/2014/main" id="{587155F3-AA3E-4C56-08A4-78D1BD1A5112}"/>
+                <a16:creationId xmlns:a16="http://schemas.microsoft.com/office/drawing/2014/main" id="{A7588C0D-2D88-EEC5-05C1-37E2631CB373}"/>
               </a:ext>
             </a:extLst>
           </p:cNvPr>
@@ -3254,245 +3266,36 @@
           <a:p>
             <a:r>
               <a:rPr lang="de-DE" dirty="0"/>
-              <a:t>Welche Kriterien nutzt das Model hauptsächlich zur Klassifizierung? - Hypothese</a:t>
-            </a:r>
-            <a:endParaRPr lang="en-DE" dirty="0"/>
-          </a:p>
-        </p:txBody>
-      </p:sp>
-      <p:sp>
-        <p:nvSpPr>
-          <p:cNvPr id="3" name="Inhaltsplatzhalter 2">
-            <a:extLst>
-              <a:ext uri="{FF2B5EF4-FFF2-40B4-BE49-F238E27FC236}">
-                <a16:creationId xmlns:a16="http://schemas.microsoft.com/office/drawing/2014/main" id="{066D8F7E-9892-560F-55B3-42CFAA2B9FB3}"/>
-              </a:ext>
-            </a:extLst>
-          </p:cNvPr>
-          <p:cNvSpPr>
-            <a:spLocks noGrp="1"/>
-          </p:cNvSpPr>
-          <p:nvPr>
-            <p:ph idx="1"/>
-          </p:nvPr>
-        </p:nvSpPr>
-        <p:spPr>
-          <a:xfrm>
-            <a:off x="695400" y="1556792"/>
-            <a:ext cx="10440600" cy="4779206"/>
-          </a:xfrm>
-        </p:spPr>
+              <a:t>Wie wirkt sich Data Augmentation auf die Erkennungsgenauigkeit des Modells aus?</a:t>
+            </a:r>
+            <a:br>
+              <a:rPr lang="de-DE" dirty="0"/>
+            </a:br>
+            <a:endParaRPr lang="de-DE" dirty="0"/>
+          </a:p>
+        </p:txBody>
+      </p:sp>
+      <p:sp>
+        <p:nvSpPr>
+          <p:cNvPr id="4" name="Fußzeilenplatzhalter 3">
+            <a:extLst>
+              <a:ext uri="{FF2B5EF4-FFF2-40B4-BE49-F238E27FC236}">
+                <a16:creationId xmlns:a16="http://schemas.microsoft.com/office/drawing/2014/main" id="{F6F2ED1A-D22E-9298-8CAA-DE39F0A160F0}"/>
+              </a:ext>
+            </a:extLst>
+          </p:cNvPr>
+          <p:cNvSpPr>
+            <a:spLocks noGrp="1"/>
+          </p:cNvSpPr>
+          <p:nvPr>
+            <p:ph type="ftr" sz="quarter" idx="3"/>
+          </p:nvPr>
+        </p:nvSpPr>
+        <p:spPr/>
         <p:txBody>
           <a:bodyPr/>
           <a:lstStyle/>
           <a:p>
-            <a:r>
-              <a:rPr lang="en-US" b="1" dirty="0" err="1"/>
-              <a:t>Hypothese</a:t>
-            </a:r>
-            <a:r>
-              <a:rPr lang="en-US" b="1" dirty="0"/>
-              <a:t>:</a:t>
-            </a:r>
-            <a:r>
-              <a:rPr lang="en-US" dirty="0"/>
-              <a:t> “</a:t>
-            </a:r>
-            <a:r>
-              <a:rPr lang="de-DE" dirty="0"/>
-              <a:t>Das Modell erkennt </a:t>
-            </a:r>
-            <a:r>
-              <a:rPr lang="de-DE" dirty="0" err="1"/>
-              <a:t>Wildfire</a:t>
-            </a:r>
-            <a:r>
-              <a:rPr lang="de-DE" dirty="0"/>
-              <a:t>-Risiko </a:t>
-            </a:r>
-          </a:p>
-          <a:p>
-            <a:r>
-              <a:rPr lang="de-DE" dirty="0"/>
-              <a:t>über Trockenheits-Indikatoren in RGB-Daten</a:t>
-            </a:r>
-            <a:r>
-              <a:rPr lang="en-US" dirty="0"/>
-              <a:t>”</a:t>
-            </a:r>
-          </a:p>
-          <a:p>
-            <a:endParaRPr lang="en-US" dirty="0"/>
-          </a:p>
-          <a:p>
-            <a:r>
-              <a:rPr lang="en-US" b="1" dirty="0"/>
-              <a:t>Wildfire </a:t>
-            </a:r>
-            <a:r>
-              <a:rPr lang="en-US" b="1" dirty="0" err="1"/>
-              <a:t>Risiko</a:t>
-            </a:r>
-            <a:r>
-              <a:rPr lang="en-US" b="1" dirty="0"/>
-              <a:t>:</a:t>
-            </a:r>
-          </a:p>
-          <a:p>
-            <a:pPr marL="285750" indent="-285750">
-              <a:buFont typeface="Arial" panose="020B0604020202020204" pitchFamily="34" charset="0"/>
-              <a:buChar char="•"/>
-            </a:pPr>
-            <a:r>
-              <a:rPr lang="en-US" dirty="0" err="1"/>
-              <a:t>Dunklere</a:t>
-            </a:r>
-            <a:r>
-              <a:rPr lang="en-US" dirty="0"/>
-              <a:t> RGB-</a:t>
-            </a:r>
-            <a:r>
-              <a:rPr lang="en-US" dirty="0" err="1"/>
-              <a:t>Werte</a:t>
-            </a:r>
-            <a:endParaRPr lang="en-US" dirty="0"/>
-          </a:p>
-          <a:p>
-            <a:pPr marL="285750" indent="-285750">
-              <a:buFont typeface="Arial" panose="020B0604020202020204" pitchFamily="34" charset="0"/>
-              <a:buChar char="•"/>
-            </a:pPr>
-            <a:r>
-              <a:rPr lang="en-US" dirty="0" err="1"/>
-              <a:t>Gedämpftere</a:t>
-            </a:r>
-            <a:r>
-              <a:rPr lang="en-US" dirty="0"/>
-              <a:t> </a:t>
-            </a:r>
-            <a:r>
-              <a:rPr lang="en-US" dirty="0" err="1"/>
-              <a:t>Farbintensität</a:t>
-            </a:r>
-            <a:endParaRPr lang="en-US" dirty="0"/>
-          </a:p>
-          <a:p>
-            <a:r>
-              <a:rPr lang="en-DE" dirty="0"/>
-              <a:t>⇒</a:t>
-            </a:r>
-            <a:r>
-              <a:rPr lang="en-US" dirty="0"/>
-              <a:t> </a:t>
-            </a:r>
-            <a:r>
-              <a:rPr lang="en-US" dirty="0" err="1"/>
-              <a:t>ausgetrocknete</a:t>
-            </a:r>
-            <a:r>
-              <a:rPr lang="en-US" dirty="0"/>
-              <a:t> Vegetation</a:t>
-            </a:r>
-          </a:p>
-          <a:p>
-            <a:endParaRPr lang="en-US" dirty="0"/>
-          </a:p>
-          <a:p>
-            <a:r>
-              <a:rPr lang="en-US" b="1" dirty="0"/>
-              <a:t>No-Wildfire </a:t>
-            </a:r>
-            <a:r>
-              <a:rPr lang="en-US" b="1" dirty="0" err="1"/>
-              <a:t>Gebiete</a:t>
-            </a:r>
-            <a:r>
-              <a:rPr lang="en-US" b="1" dirty="0"/>
-              <a:t>:</a:t>
-            </a:r>
-          </a:p>
-          <a:p>
-            <a:pPr marL="285750" indent="-285750">
-              <a:buFont typeface="Arial" panose="020B0604020202020204" pitchFamily="34" charset="0"/>
-              <a:buChar char="•"/>
-            </a:pPr>
-            <a:r>
-              <a:rPr lang="en-US" dirty="0" err="1"/>
-              <a:t>Hellere</a:t>
-            </a:r>
-            <a:r>
-              <a:rPr lang="en-US" dirty="0"/>
-              <a:t> RGB-</a:t>
-            </a:r>
-            <a:r>
-              <a:rPr lang="en-US" dirty="0" err="1"/>
-              <a:t>Werte</a:t>
-            </a:r>
-            <a:endParaRPr lang="en-US" dirty="0"/>
-          </a:p>
-          <a:p>
-            <a:pPr marL="285750" indent="-285750">
-              <a:buFont typeface="Arial" panose="020B0604020202020204" pitchFamily="34" charset="0"/>
-              <a:buChar char="•"/>
-            </a:pPr>
-            <a:r>
-              <a:rPr lang="en-US" dirty="0" err="1"/>
-              <a:t>Intensivere</a:t>
-            </a:r>
-            <a:r>
-              <a:rPr lang="en-US" dirty="0"/>
-              <a:t> Farben</a:t>
-            </a:r>
-          </a:p>
-          <a:p>
-            <a:r>
-              <a:rPr lang="en-DE" dirty="0"/>
-              <a:t>⇒</a:t>
-            </a:r>
-            <a:r>
-              <a:rPr lang="en-US" dirty="0"/>
-              <a:t> </a:t>
-            </a:r>
-            <a:r>
-              <a:rPr lang="en-US" dirty="0" err="1"/>
-              <a:t>gesunde</a:t>
-            </a:r>
-            <a:r>
-              <a:rPr lang="en-US" dirty="0"/>
-              <a:t>, </a:t>
-            </a:r>
-            <a:r>
-              <a:rPr lang="en-US" dirty="0" err="1"/>
-              <a:t>wasserreiche</a:t>
-            </a:r>
-            <a:r>
-              <a:rPr lang="en-US" dirty="0"/>
-              <a:t> Vegetation</a:t>
-            </a:r>
-          </a:p>
-        </p:txBody>
-      </p:sp>
-      <p:sp>
-        <p:nvSpPr>
-          <p:cNvPr id="4" name="Fußzeilenplatzhalter 3">
-            <a:extLst>
-              <a:ext uri="{FF2B5EF4-FFF2-40B4-BE49-F238E27FC236}">
-                <a16:creationId xmlns:a16="http://schemas.microsoft.com/office/drawing/2014/main" id="{E16FEBEC-2DEE-B103-30EE-EFBD29CA096D}"/>
-              </a:ext>
-            </a:extLst>
-          </p:cNvPr>
-          <p:cNvSpPr>
-            <a:spLocks noGrp="1"/>
-          </p:cNvSpPr>
-          <p:nvPr>
-            <p:ph type="ftr" sz="quarter" idx="3"/>
-          </p:nvPr>
-        </p:nvSpPr>
-        <p:spPr/>
-        <p:txBody>
-          <a:bodyPr/>
-          <a:lstStyle/>
-          <a:p>
             <a:pPr>
               <a:defRPr/>
             </a:pPr>
@@ -3509,7 +3312,7 @@
           <p:cNvPr id="5" name="Foliennummernplatzhalter 4">
             <a:extLst>
               <a:ext uri="{FF2B5EF4-FFF2-40B4-BE49-F238E27FC236}">
-                <a16:creationId xmlns:a16="http://schemas.microsoft.com/office/drawing/2014/main" id="{2D7CB488-D52D-4719-984D-1D643EA27EEF}"/>
+                <a16:creationId xmlns:a16="http://schemas.microsoft.com/office/drawing/2014/main" id="{FC65BC98-5C22-0EA8-9DDF-3C04116B708D}"/>
               </a:ext>
             </a:extLst>
           </p:cNvPr>
@@ -3536,158 +3339,72 @@
       </p:sp>
       <p:sp>
         <p:nvSpPr>
-          <p:cNvPr id="6" name="Textfeld 5">
-            <a:extLst>
-              <a:ext uri="{FF2B5EF4-FFF2-40B4-BE49-F238E27FC236}">
-                <a16:creationId xmlns:a16="http://schemas.microsoft.com/office/drawing/2014/main" id="{78E44BE2-1523-3DC9-F8C7-9A8F11390424}"/>
-              </a:ext>
-            </a:extLst>
-          </p:cNvPr>
-          <p:cNvSpPr txBox="1"/>
-          <p:nvPr/>
+          <p:cNvPr id="6" name="Inhaltsplatzhalter 2">
+            <a:extLst>
+              <a:ext uri="{FF2B5EF4-FFF2-40B4-BE49-F238E27FC236}">
+                <a16:creationId xmlns:a16="http://schemas.microsoft.com/office/drawing/2014/main" id="{6C2FB277-A746-378B-DF71-AD391E381401}"/>
+              </a:ext>
+            </a:extLst>
+          </p:cNvPr>
+          <p:cNvSpPr>
+            <a:spLocks noGrp="1"/>
+          </p:cNvSpPr>
+          <p:nvPr>
+            <p:ph idx="1"/>
+          </p:nvPr>
         </p:nvSpPr>
         <p:spPr>
           <a:xfrm>
-            <a:off x="7317689" y="2529770"/>
-            <a:ext cx="3600400" cy="646331"/>
+            <a:off x="384175" y="1295400"/>
+            <a:ext cx="10752138" cy="5040313"/>
           </a:xfrm>
-          <a:prstGeom prst="rect">
-            <a:avLst/>
-          </a:prstGeom>
-          <a:noFill/>
         </p:spPr>
         <p:txBody>
-          <a:bodyPr wrap="square" rtlCol="0">
-            <a:spAutoFit/>
-          </a:bodyPr>
+          <a:bodyPr/>
           <a:lstStyle/>
           <a:p>
-            <a:r>
-              <a:rPr lang="de-DE" b="1" dirty="0"/>
-              <a:t>Erster Experimenteller Test: </a:t>
-            </a:r>
-          </a:p>
-          <a:p>
-            <a:r>
-              <a:rPr lang="de-DE" dirty="0"/>
-              <a:t>CNN vs. Einfaches Farbmodell</a:t>
-            </a:r>
-            <a:endParaRPr lang="en-DE" dirty="0"/>
-          </a:p>
-        </p:txBody>
-      </p:sp>
-      <p:pic>
-        <p:nvPicPr>
-          <p:cNvPr id="8" name="Grafik 7">
-            <a:extLst>
-              <a:ext uri="{FF2B5EF4-FFF2-40B4-BE49-F238E27FC236}">
-                <a16:creationId xmlns:a16="http://schemas.microsoft.com/office/drawing/2014/main" id="{054651A8-4720-135C-2FDD-C0CD6CEE730A}"/>
-              </a:ext>
-            </a:extLst>
-          </p:cNvPr>
-          <p:cNvPicPr>
-            <a:picLocks noChangeAspect="1"/>
-          </p:cNvPicPr>
-          <p:nvPr/>
-        </p:nvPicPr>
-        <p:blipFill>
-          <a:blip r:embed="rId2">
-            <a:extLst>
-              <a:ext uri="{28A0092B-C50C-407E-A947-70E740481C1C}">
-                <a14:useLocalDpi xmlns:a14="http://schemas.microsoft.com/office/drawing/2010/main" val="0"/>
-              </a:ext>
-            </a:extLst>
-          </a:blip>
-          <a:stretch>
-            <a:fillRect/>
-          </a:stretch>
-        </p:blipFill>
-        <p:spPr>
-          <a:xfrm>
-            <a:off x="7176120" y="3140968"/>
-            <a:ext cx="4173457" cy="1582435"/>
-          </a:xfrm>
-          <a:prstGeom prst="rect">
-            <a:avLst/>
-          </a:prstGeom>
-        </p:spPr>
-      </p:pic>
-      <p:sp>
-        <p:nvSpPr>
-          <p:cNvPr id="9" name="Textfeld 8">
-            <a:extLst>
-              <a:ext uri="{FF2B5EF4-FFF2-40B4-BE49-F238E27FC236}">
-                <a16:creationId xmlns:a16="http://schemas.microsoft.com/office/drawing/2014/main" id="{E23DAE58-DB2E-16E7-A192-25C4DF45FECB}"/>
-              </a:ext>
-            </a:extLst>
-          </p:cNvPr>
-          <p:cNvSpPr txBox="1"/>
-          <p:nvPr/>
-        </p:nvSpPr>
-        <p:spPr>
-          <a:xfrm>
-            <a:off x="7320136" y="4797152"/>
-            <a:ext cx="3744416" cy="646331"/>
-          </a:xfrm>
-          <a:prstGeom prst="rect">
-            <a:avLst/>
-          </a:prstGeom>
-          <a:noFill/>
-        </p:spPr>
-        <p:txBody>
-          <a:bodyPr wrap="square" rtlCol="0">
-            <a:spAutoFit/>
-          </a:bodyPr>
-          <a:lstStyle/>
-          <a:p>
-            <a:r>
-              <a:rPr lang="en-DE" dirty="0"/>
-              <a:t>⇒</a:t>
-            </a:r>
-            <a:r>
-              <a:rPr lang="en-US" dirty="0"/>
-              <a:t> Farben </a:t>
-            </a:r>
-            <a:r>
-              <a:rPr lang="en-US" dirty="0" err="1"/>
-              <a:t>scheinen</a:t>
-            </a:r>
-            <a:r>
-              <a:rPr lang="en-US" dirty="0"/>
-              <a:t> </a:t>
-            </a:r>
-            <a:r>
-              <a:rPr lang="en-US" dirty="0" err="1"/>
-              <a:t>wichtige</a:t>
-            </a:r>
-            <a:r>
-              <a:rPr lang="en-US" dirty="0"/>
-              <a:t> </a:t>
-            </a:r>
-            <a:r>
-              <a:rPr lang="en-US" dirty="0" err="1"/>
-              <a:t>Entscheidungskriterien</a:t>
-            </a:r>
-            <a:r>
-              <a:rPr lang="en-US" dirty="0"/>
-              <a:t> </a:t>
-            </a:r>
-            <a:r>
-              <a:rPr lang="en-US" dirty="0" err="1"/>
-              <a:t>zu</a:t>
-            </a:r>
-            <a:r>
-              <a:rPr lang="en-US" dirty="0"/>
-              <a:t> sein</a:t>
-            </a:r>
-            <a:endParaRPr lang="en-DE" dirty="0"/>
+            <a:pPr marL="342900" indent="-342900">
+              <a:buAutoNum type="arabicPeriod"/>
+            </a:pPr>
+            <a:r>
+              <a:rPr lang="de-DE" strike="sngStrike" dirty="0"/>
+              <a:t>Ansatz:</a:t>
+            </a:r>
+          </a:p>
+          <a:p>
+            <a:pPr marL="685800" lvl="1">
+              <a:buAutoNum type="alphaLcPeriod"/>
+            </a:pPr>
+            <a:r>
+              <a:rPr lang="de-DE" strike="sngStrike" dirty="0"/>
+              <a:t>Trainiere Modelle mit unterschiedlichen </a:t>
+            </a:r>
+            <a:r>
+              <a:rPr lang="de-DE" strike="sngStrike" dirty="0" err="1"/>
+              <a:t>Augmentierungen</a:t>
+            </a:r>
+            <a:endParaRPr lang="de-DE" strike="sngStrike" dirty="0"/>
+          </a:p>
+          <a:p>
+            <a:pPr marL="685800" lvl="1">
+              <a:buAutoNum type="alphaLcPeriod"/>
+            </a:pPr>
+            <a:r>
+              <a:rPr lang="de-DE" strike="sngStrike" dirty="0"/>
+              <a:t>Vergleiche </a:t>
+            </a:r>
+            <a:r>
+              <a:rPr lang="de-DE" strike="sngStrike" dirty="0" err="1"/>
+              <a:t>Evaluationsmetriken</a:t>
+            </a:r>
+            <a:endParaRPr lang="de-DE" strike="sngStrike" dirty="0"/>
           </a:p>
         </p:txBody>
       </p:sp>
     </p:spTree>
     <p:extLst>
       <p:ext uri="{BB962C8B-B14F-4D97-AF65-F5344CB8AC3E}">
-        <p14:creationId xmlns:p14="http://schemas.microsoft.com/office/powerpoint/2010/main" val="3654420089"/>
+        <p14:creationId xmlns:p14="http://schemas.microsoft.com/office/powerpoint/2010/main" val="1227901320"/>
       </p:ext>
     </p:extLst>
   </p:cSld>
@@ -3719,7 +3436,7 @@
           <p:cNvPr id="2" name="Titel 1">
             <a:extLst>
               <a:ext uri="{FF2B5EF4-FFF2-40B4-BE49-F238E27FC236}">
-                <a16:creationId xmlns:a16="http://schemas.microsoft.com/office/drawing/2014/main" id="{DA0AED7F-2FF9-66C3-762E-C901F62D9470}"/>
+                <a16:creationId xmlns:a16="http://schemas.microsoft.com/office/drawing/2014/main" id="{0D44A108-6F52-B876-DA6D-5548EE32B4FD}"/>
               </a:ext>
             </a:extLst>
           </p:cNvPr>
@@ -3737,61 +3454,29 @@
           <a:p>
             <a:r>
               <a:rPr lang="de-DE" dirty="0"/>
-              <a:t>Welche Kriterien nutzt das Model hauptsächlich zur Klassifizierung? – Feature Analyse</a:t>
-            </a:r>
-            <a:endParaRPr lang="en-DE" dirty="0"/>
-          </a:p>
-        </p:txBody>
-      </p:sp>
-      <p:pic>
-        <p:nvPicPr>
-          <p:cNvPr id="7" name="Inhaltsplatzhalter 6">
-            <a:extLst>
-              <a:ext uri="{FF2B5EF4-FFF2-40B4-BE49-F238E27FC236}">
-                <a16:creationId xmlns:a16="http://schemas.microsoft.com/office/drawing/2014/main" id="{CE72601E-7B95-305B-6F37-BA07CD692F4D}"/>
-              </a:ext>
-            </a:extLst>
-          </p:cNvPr>
-          <p:cNvPicPr>
-            <a:picLocks noGrp="1" noChangeAspect="1"/>
-          </p:cNvPicPr>
+              <a:t>Wie wirkt sich Data Augmentation auf die Erkennungsgenauigkeit des Modells aus?</a:t>
+            </a:r>
+            <a:br>
+              <a:rPr lang="de-DE" dirty="0"/>
+            </a:br>
+            <a:endParaRPr lang="de-DE" dirty="0"/>
+          </a:p>
+        </p:txBody>
+      </p:sp>
+      <p:sp>
+        <p:nvSpPr>
+          <p:cNvPr id="3" name="Inhaltsplatzhalter 2">
+            <a:extLst>
+              <a:ext uri="{FF2B5EF4-FFF2-40B4-BE49-F238E27FC236}">
+                <a16:creationId xmlns:a16="http://schemas.microsoft.com/office/drawing/2014/main" id="{4EF6E246-8A02-D5AF-53FE-6D032624DBC8}"/>
+              </a:ext>
+            </a:extLst>
+          </p:cNvPr>
+          <p:cNvSpPr>
+            <a:spLocks noGrp="1"/>
+          </p:cNvSpPr>
           <p:nvPr>
             <p:ph idx="1"/>
-          </p:nvPr>
-        </p:nvPicPr>
-        <p:blipFill>
-          <a:blip r:embed="rId2">
-            <a:extLst>
-              <a:ext uri="{28A0092B-C50C-407E-A947-70E740481C1C}">
-                <a14:useLocalDpi xmlns:a14="http://schemas.microsoft.com/office/drawing/2010/main" val="0"/>
-              </a:ext>
-            </a:extLst>
-          </a:blip>
-          <a:stretch>
-            <a:fillRect/>
-          </a:stretch>
-        </p:blipFill>
-        <p:spPr>
-          <a:xfrm>
-            <a:off x="433634" y="1558782"/>
-            <a:ext cx="5726601" cy="3888432"/>
-          </a:xfrm>
-        </p:spPr>
-      </p:pic>
-      <p:sp>
-        <p:nvSpPr>
-          <p:cNvPr id="4" name="Fußzeilenplatzhalter 3">
-            <a:extLst>
-              <a:ext uri="{FF2B5EF4-FFF2-40B4-BE49-F238E27FC236}">
-                <a16:creationId xmlns:a16="http://schemas.microsoft.com/office/drawing/2014/main" id="{5FCD0DF9-4E62-35E1-54BA-72D6610D9562}"/>
-              </a:ext>
-            </a:extLst>
-          </p:cNvPr>
-          <p:cNvSpPr>
-            <a:spLocks noGrp="1"/>
-          </p:cNvSpPr>
-          <p:nvPr>
-            <p:ph type="ftr" sz="quarter" idx="3"/>
           </p:nvPr>
         </p:nvSpPr>
         <p:spPr/>
@@ -3799,6 +3484,120 @@
           <a:bodyPr/>
           <a:lstStyle/>
           <a:p>
+            <a:pPr marL="342900" indent="-342900">
+              <a:buAutoNum type="arabicPeriod"/>
+            </a:pPr>
+            <a:r>
+              <a:rPr lang="de-DE" strike="sngStrike" dirty="0"/>
+              <a:t>Ansatz:</a:t>
+            </a:r>
+          </a:p>
+          <a:p>
+            <a:pPr marL="685800" lvl="1">
+              <a:buAutoNum type="alphaLcPeriod"/>
+            </a:pPr>
+            <a:r>
+              <a:rPr lang="de-DE" strike="sngStrike" dirty="0"/>
+              <a:t>Trainiere Modelle mit unterschiedlichen </a:t>
+            </a:r>
+            <a:r>
+              <a:rPr lang="de-DE" strike="sngStrike" dirty="0" err="1"/>
+              <a:t>Augmentierungen</a:t>
+            </a:r>
+            <a:endParaRPr lang="de-DE" strike="sngStrike" dirty="0"/>
+          </a:p>
+          <a:p>
+            <a:pPr marL="685800" lvl="1">
+              <a:buAutoNum type="alphaLcPeriod"/>
+            </a:pPr>
+            <a:r>
+              <a:rPr lang="de-DE" strike="sngStrike" dirty="0"/>
+              <a:t>Vergleiche </a:t>
+            </a:r>
+            <a:r>
+              <a:rPr lang="de-DE" strike="sngStrike" dirty="0" err="1"/>
+              <a:t>Evaluationsmetriken</a:t>
+            </a:r>
+            <a:endParaRPr lang="de-DE" strike="sngStrike" dirty="0"/>
+          </a:p>
+          <a:p>
+            <a:pPr marL="342900" indent="-342900">
+              <a:buAutoNum type="arabicPeriod"/>
+            </a:pPr>
+            <a:r>
+              <a:rPr lang="de-DE" dirty="0"/>
+              <a:t>Ansatz:</a:t>
+            </a:r>
+          </a:p>
+          <a:p>
+            <a:pPr marL="685800" lvl="1">
+              <a:buAutoNum type="alphaLcPeriod"/>
+            </a:pPr>
+            <a:r>
+              <a:rPr lang="de-DE" dirty="0"/>
+              <a:t>Trainiere Baseline Modell und Modell mit Kombination aus </a:t>
+            </a:r>
+            <a:r>
+              <a:rPr lang="de-DE" dirty="0" err="1"/>
+              <a:t>Augmentierungen</a:t>
+            </a:r>
+            <a:endParaRPr lang="de-DE" dirty="0"/>
+          </a:p>
+          <a:p>
+            <a:pPr marL="685800" lvl="1">
+              <a:buAutoNum type="alphaLcPeriod"/>
+            </a:pPr>
+            <a:r>
+              <a:rPr lang="de-DE" dirty="0"/>
+              <a:t>Vergleiche </a:t>
+            </a:r>
+            <a:r>
+              <a:rPr lang="de-DE" dirty="0" err="1"/>
+              <a:t>Evaluationsmetriken</a:t>
+            </a:r>
+            <a:endParaRPr lang="de-DE" dirty="0"/>
+          </a:p>
+          <a:p>
+            <a:pPr marL="1098550" lvl="2" indent="-400050">
+              <a:buAutoNum type="romanLcPeriod"/>
+            </a:pPr>
+            <a:r>
+              <a:rPr lang="de-DE" dirty="0"/>
+              <a:t>auf unveränderten Testdaten</a:t>
+            </a:r>
+          </a:p>
+          <a:p>
+            <a:pPr marL="1098550" lvl="2" indent="-400050">
+              <a:buAutoNum type="romanLcPeriod"/>
+            </a:pPr>
+            <a:r>
+              <a:rPr lang="de-DE" dirty="0"/>
+              <a:t>auf veränderten Testdaten</a:t>
+            </a:r>
+          </a:p>
+        </p:txBody>
+      </p:sp>
+      <p:sp>
+        <p:nvSpPr>
+          <p:cNvPr id="4" name="Fußzeilenplatzhalter 3">
+            <a:extLst>
+              <a:ext uri="{FF2B5EF4-FFF2-40B4-BE49-F238E27FC236}">
+                <a16:creationId xmlns:a16="http://schemas.microsoft.com/office/drawing/2014/main" id="{16ED9490-4C16-A1FB-12FC-CF182F01C3C5}"/>
+              </a:ext>
+            </a:extLst>
+          </p:cNvPr>
+          <p:cNvSpPr>
+            <a:spLocks noGrp="1"/>
+          </p:cNvSpPr>
+          <p:nvPr>
+            <p:ph type="ftr" sz="quarter" idx="3"/>
+          </p:nvPr>
+        </p:nvSpPr>
+        <p:spPr/>
+        <p:txBody>
+          <a:bodyPr/>
+          <a:lstStyle/>
+          <a:p>
             <a:pPr>
               <a:defRPr/>
             </a:pPr>
@@ -3815,7 +3614,7 @@
           <p:cNvPr id="5" name="Foliennummernplatzhalter 4">
             <a:extLst>
               <a:ext uri="{FF2B5EF4-FFF2-40B4-BE49-F238E27FC236}">
-                <a16:creationId xmlns:a16="http://schemas.microsoft.com/office/drawing/2014/main" id="{B848AEA1-184A-7CA0-36D0-C3591AC2E798}"/>
+                <a16:creationId xmlns:a16="http://schemas.microsoft.com/office/drawing/2014/main" id="{F2771940-9105-5F48-62AA-6ED8F6751FEB}"/>
               </a:ext>
             </a:extLst>
           </p:cNvPr>
@@ -3840,241 +3639,10 @@
           </a:p>
         </p:txBody>
       </p:sp>
-      <p:sp>
-        <p:nvSpPr>
-          <p:cNvPr id="8" name="Textfeld 7">
-            <a:extLst>
-              <a:ext uri="{FF2B5EF4-FFF2-40B4-BE49-F238E27FC236}">
-                <a16:creationId xmlns:a16="http://schemas.microsoft.com/office/drawing/2014/main" id="{10565672-E126-8741-625D-05FF5B440B10}"/>
-              </a:ext>
-            </a:extLst>
-          </p:cNvPr>
-          <p:cNvSpPr txBox="1"/>
-          <p:nvPr/>
-        </p:nvSpPr>
-        <p:spPr>
-          <a:xfrm>
-            <a:off x="6719265" y="2204864"/>
-            <a:ext cx="5039101" cy="2343655"/>
-          </a:xfrm>
-          <a:prstGeom prst="rect">
-            <a:avLst/>
-          </a:prstGeom>
-          <a:noFill/>
-        </p:spPr>
-        <p:txBody>
-          <a:bodyPr wrap="square" rtlCol="0">
-            <a:spAutoFit/>
-          </a:bodyPr>
-          <a:lstStyle/>
-          <a:p>
-            <a:pPr>
-              <a:lnSpc>
-                <a:spcPct val="150000"/>
-              </a:lnSpc>
-            </a:pPr>
-            <a:r>
-              <a:rPr lang="en-US" sz="2000" b="1" dirty="0"/>
-              <a:t>Was </a:t>
-            </a:r>
-            <a:r>
-              <a:rPr lang="en-US" sz="2000" b="1" dirty="0" err="1"/>
-              <a:t>zeigt</a:t>
-            </a:r>
-            <a:r>
-              <a:rPr lang="en-US" sz="2000" b="1" dirty="0"/>
-              <a:t> </a:t>
-            </a:r>
-            <a:r>
-              <a:rPr lang="en-US" sz="2000" b="1" dirty="0" err="1"/>
-              <a:t>uns</a:t>
-            </a:r>
-            <a:r>
-              <a:rPr lang="en-US" sz="2000" b="1" dirty="0"/>
-              <a:t> die </a:t>
-            </a:r>
-            <a:r>
-              <a:rPr lang="en-US" sz="2000" b="1" dirty="0" err="1"/>
-              <a:t>Analyse</a:t>
-            </a:r>
-            <a:r>
-              <a:rPr lang="en-US" sz="2000" b="1" dirty="0"/>
-              <a:t>?</a:t>
-            </a:r>
-          </a:p>
-          <a:p>
-            <a:pPr marL="285750" indent="-285750">
-              <a:lnSpc>
-                <a:spcPct val="150000"/>
-              </a:lnSpc>
-              <a:buFont typeface="Arial" panose="020B0604020202020204" pitchFamily="34" charset="0"/>
-              <a:buChar char="•"/>
-            </a:pPr>
-            <a:r>
-              <a:rPr lang="en-US" sz="2000" dirty="0" err="1"/>
-              <a:t>Farbfeatures</a:t>
-            </a:r>
-            <a:r>
-              <a:rPr lang="en-US" sz="2000" dirty="0"/>
-              <a:t> </a:t>
-            </a:r>
-            <a:r>
-              <a:rPr lang="en-US" sz="2000" dirty="0" err="1"/>
-              <a:t>dominieren</a:t>
-            </a:r>
-            <a:r>
-              <a:rPr lang="en-US" sz="2000" dirty="0"/>
-              <a:t> die </a:t>
-            </a:r>
-            <a:r>
-              <a:rPr lang="en-US" sz="2000" dirty="0" err="1"/>
-              <a:t>Klassifikation</a:t>
-            </a:r>
-            <a:endParaRPr lang="en-US" sz="2000" dirty="0"/>
-          </a:p>
-          <a:p>
-            <a:pPr marL="285750" indent="-285750">
-              <a:lnSpc>
-                <a:spcPct val="150000"/>
-              </a:lnSpc>
-              <a:buFont typeface="Arial" panose="020B0604020202020204" pitchFamily="34" charset="0"/>
-              <a:buChar char="•"/>
-            </a:pPr>
-            <a:r>
-              <a:rPr lang="en-US" sz="2000" dirty="0"/>
-              <a:t>Rot </a:t>
-            </a:r>
-            <a:r>
-              <a:rPr lang="en-US" sz="2000" dirty="0" err="1"/>
-              <a:t>Mittelwert</a:t>
-            </a:r>
-            <a:r>
-              <a:rPr lang="en-US" sz="2000" dirty="0"/>
-              <a:t> das </a:t>
-            </a:r>
-            <a:r>
-              <a:rPr lang="en-US" sz="2000" dirty="0" err="1"/>
-              <a:t>wichtigste</a:t>
-            </a:r>
-            <a:r>
-              <a:rPr lang="en-US" sz="2000" dirty="0"/>
-              <a:t> Feature, </a:t>
-            </a:r>
-            <a:r>
-              <a:rPr lang="en-US" sz="2000" dirty="0" err="1"/>
-              <a:t>gefolgt</a:t>
-            </a:r>
-            <a:r>
-              <a:rPr lang="en-US" sz="2000" dirty="0"/>
-              <a:t> von Blau </a:t>
-            </a:r>
-            <a:r>
-              <a:rPr lang="en-US" sz="2000" dirty="0" err="1"/>
-              <a:t>basierten</a:t>
-            </a:r>
-            <a:r>
-              <a:rPr lang="en-US" sz="2000" dirty="0"/>
-              <a:t> Features</a:t>
-            </a:r>
-            <a:endParaRPr lang="en-DE" sz="2000" dirty="0"/>
-          </a:p>
-        </p:txBody>
-      </p:sp>
-      <p:sp>
-        <p:nvSpPr>
-          <p:cNvPr id="9" name="Textfeld 8">
-            <a:extLst>
-              <a:ext uri="{FF2B5EF4-FFF2-40B4-BE49-F238E27FC236}">
-                <a16:creationId xmlns:a16="http://schemas.microsoft.com/office/drawing/2014/main" id="{3140CF40-AECC-A9CB-8384-46E8A09E669C}"/>
-              </a:ext>
-            </a:extLst>
-          </p:cNvPr>
-          <p:cNvSpPr txBox="1"/>
-          <p:nvPr/>
-        </p:nvSpPr>
-        <p:spPr>
-          <a:xfrm>
-            <a:off x="695400" y="5589240"/>
-            <a:ext cx="6192689" cy="646331"/>
-          </a:xfrm>
-          <a:prstGeom prst="rect">
-            <a:avLst/>
-          </a:prstGeom>
-          <a:noFill/>
-        </p:spPr>
-        <p:txBody>
-          <a:bodyPr wrap="square" rtlCol="0">
-            <a:spAutoFit/>
-          </a:bodyPr>
-          <a:lstStyle/>
-          <a:p>
-            <a:r>
-              <a:rPr lang="en-US" u="sng" dirty="0"/>
-              <a:t>Positive </a:t>
-            </a:r>
-            <a:r>
-              <a:rPr lang="en-US" u="sng" dirty="0" err="1"/>
-              <a:t>Werte</a:t>
-            </a:r>
-            <a:r>
-              <a:rPr lang="en-US" u="sng" dirty="0"/>
-              <a:t> </a:t>
-            </a:r>
-            <a:r>
-              <a:rPr lang="en-US" dirty="0"/>
-              <a:t>= </a:t>
-            </a:r>
-            <a:r>
-              <a:rPr lang="en-US" dirty="0" err="1"/>
-              <a:t>erhöhte</a:t>
-            </a:r>
-            <a:r>
-              <a:rPr lang="en-US" dirty="0"/>
-              <a:t> Wildfire </a:t>
-            </a:r>
-            <a:r>
-              <a:rPr lang="en-US" dirty="0" err="1"/>
-              <a:t>Wahrscheinlichkeit</a:t>
-            </a:r>
-            <a:endParaRPr lang="en-US" dirty="0"/>
-          </a:p>
-          <a:p>
-            <a:r>
-              <a:rPr lang="en-US" u="sng" dirty="0"/>
-              <a:t>Negative </a:t>
-            </a:r>
-            <a:r>
-              <a:rPr lang="en-US" u="sng" dirty="0" err="1"/>
-              <a:t>Werte</a:t>
-            </a:r>
-            <a:r>
-              <a:rPr lang="en-US" u="sng" dirty="0"/>
-              <a:t> </a:t>
-            </a:r>
-            <a:r>
-              <a:rPr lang="en-US" dirty="0"/>
-              <a:t>= </a:t>
-            </a:r>
-            <a:r>
-              <a:rPr lang="en-US" dirty="0" err="1"/>
-              <a:t>reduzierte</a:t>
-            </a:r>
-            <a:r>
-              <a:rPr lang="en-US" dirty="0"/>
-              <a:t> Wildfire </a:t>
-            </a:r>
-            <a:r>
-              <a:rPr lang="en-US" dirty="0" err="1"/>
-              <a:t>Wahrscheinlichkeit</a:t>
-            </a:r>
-            <a:endParaRPr lang="en-DE" dirty="0"/>
-          </a:p>
-        </p:txBody>
-      </p:sp>
     </p:spTree>
     <p:extLst>
       <p:ext uri="{BB962C8B-B14F-4D97-AF65-F5344CB8AC3E}">
-        <p14:creationId xmlns:p14="http://schemas.microsoft.com/office/powerpoint/2010/main" val="915341297"/>
+        <p14:creationId xmlns:p14="http://schemas.microsoft.com/office/powerpoint/2010/main" val="289717981"/>
       </p:ext>
     </p:extLst>
   </p:cSld>
@@ -4106,7 +3674,7 @@
           <p:cNvPr id="2" name="Titel 1">
             <a:extLst>
               <a:ext uri="{FF2B5EF4-FFF2-40B4-BE49-F238E27FC236}">
-                <a16:creationId xmlns:a16="http://schemas.microsoft.com/office/drawing/2014/main" id="{6188F99A-4FA3-101A-D43B-60A9A7EE47C8}"/>
+                <a16:creationId xmlns:a16="http://schemas.microsoft.com/office/drawing/2014/main" id="{4E2BCB5E-63C1-A62B-EEA1-112C3A2E12E1}"/>
               </a:ext>
             </a:extLst>
           </p:cNvPr>
@@ -4122,36 +3690,90 @@
           <a:bodyPr/>
           <a:lstStyle/>
           <a:p>
+            <a:pPr algn="ctr"/>
             <a:r>
               <a:rPr lang="de-DE" dirty="0"/>
-              <a:t>Welche Kriterien nutzt das Model hauptsächlich zur Klassifizierung? – </a:t>
-            </a:r>
-            <a:r>
-              <a:rPr lang="en-US" dirty="0"/>
-              <a:t>RGB-</a:t>
-            </a:r>
-            <a:r>
-              <a:rPr lang="en-US" dirty="0" err="1"/>
-              <a:t>Kanäle</a:t>
-            </a:r>
-            <a:r>
-              <a:rPr lang="en-US" dirty="0"/>
-              <a:t> </a:t>
-            </a:r>
-            <a:r>
-              <a:rPr lang="en-US" dirty="0" err="1"/>
-              <a:t>Detailanalyse</a:t>
-            </a:r>
-            <a:endParaRPr lang="en-DE" dirty="0"/>
+              <a:t>Vergleich – unveränderte und veränderte Testdaten</a:t>
+            </a:r>
+            <a:br>
+              <a:rPr lang="de-DE" dirty="0"/>
+            </a:br>
+            <a:r>
+              <a:rPr lang="de-DE" sz="2000" dirty="0"/>
+              <a:t>Baseline</a:t>
+            </a:r>
+            <a:endParaRPr lang="de-DE" dirty="0"/>
+          </a:p>
+        </p:txBody>
+      </p:sp>
+      <p:sp>
+        <p:nvSpPr>
+          <p:cNvPr id="4" name="Fußzeilenplatzhalter 3">
+            <a:extLst>
+              <a:ext uri="{FF2B5EF4-FFF2-40B4-BE49-F238E27FC236}">
+                <a16:creationId xmlns:a16="http://schemas.microsoft.com/office/drawing/2014/main" id="{86FA6C3E-7EAB-F84A-A921-2F9305CCF7B6}"/>
+              </a:ext>
+            </a:extLst>
+          </p:cNvPr>
+          <p:cNvSpPr>
+            <a:spLocks noGrp="1"/>
+          </p:cNvSpPr>
+          <p:nvPr>
+            <p:ph type="ftr" sz="quarter" idx="3"/>
+          </p:nvPr>
+        </p:nvSpPr>
+        <p:spPr/>
+        <p:txBody>
+          <a:bodyPr/>
+          <a:lstStyle/>
+          <a:p>
+            <a:pPr>
+              <a:defRPr/>
+            </a:pPr>
+            <a:r>
+              <a:rPr lang="de-DE"/>
+              <a:t>Titel des Projekts | Nachnamen der Autoren einfügen</a:t>
+            </a:r>
+            <a:endParaRPr lang="de-DE" dirty="0"/>
+          </a:p>
+        </p:txBody>
+      </p:sp>
+      <p:sp>
+        <p:nvSpPr>
+          <p:cNvPr id="5" name="Foliennummernplatzhalter 4">
+            <a:extLst>
+              <a:ext uri="{FF2B5EF4-FFF2-40B4-BE49-F238E27FC236}">
+                <a16:creationId xmlns:a16="http://schemas.microsoft.com/office/drawing/2014/main" id="{36622BA0-1B78-119F-794D-920F36C098E9}"/>
+              </a:ext>
+            </a:extLst>
+          </p:cNvPr>
+          <p:cNvSpPr>
+            <a:spLocks noGrp="1"/>
+          </p:cNvSpPr>
+          <p:nvPr>
+            <p:ph type="sldNum" sz="quarter" idx="4"/>
+          </p:nvPr>
+        </p:nvSpPr>
+        <p:spPr/>
+        <p:txBody>
+          <a:bodyPr/>
+          <a:lstStyle/>
+          <a:p>
+            <a:fld id="{029DE7E0-E051-4C03-AF53-7018E0F7EF0C}" type="slidenum">
+              <a:rPr lang="de-DE" altLang="de-DE" smtClean="0"/>
+              <a:pPr/>
+              <a:t>12</a:t>
+            </a:fld>
+            <a:endParaRPr lang="de-DE" altLang="de-DE"/>
           </a:p>
         </p:txBody>
       </p:sp>
       <p:pic>
         <p:nvPicPr>
-          <p:cNvPr id="7" name="Inhaltsplatzhalter 6">
-            <a:extLst>
-              <a:ext uri="{FF2B5EF4-FFF2-40B4-BE49-F238E27FC236}">
-                <a16:creationId xmlns:a16="http://schemas.microsoft.com/office/drawing/2014/main" id="{8036BF37-DEB3-C012-0DB6-795A564FABA7}"/>
+          <p:cNvPr id="18" name="Inhaltsplatzhalter 17">
+            <a:extLst>
+              <a:ext uri="{FF2B5EF4-FFF2-40B4-BE49-F238E27FC236}">
+                <a16:creationId xmlns:a16="http://schemas.microsoft.com/office/drawing/2014/main" id="{B6150671-2145-4691-4F5E-F00F04CC934A}"/>
               </a:ext>
             </a:extLst>
           </p:cNvPr>
@@ -4163,240 +3785,52 @@
           </p:nvPr>
         </p:nvPicPr>
         <p:blipFill>
-          <a:blip r:embed="rId3">
-            <a:extLst>
-              <a:ext uri="{28A0092B-C50C-407E-A947-70E740481C1C}">
-                <a14:useLocalDpi xmlns:a14="http://schemas.microsoft.com/office/drawing/2010/main" val="0"/>
-              </a:ext>
-            </a:extLst>
-          </a:blip>
+          <a:blip r:embed="rId2"/>
           <a:stretch>
             <a:fillRect/>
           </a:stretch>
         </p:blipFill>
         <p:spPr>
           <a:xfrm>
-            <a:off x="767408" y="1340768"/>
-            <a:ext cx="10176321" cy="3364385"/>
+            <a:off x="10954" y="1443417"/>
+            <a:ext cx="5561618" cy="4573613"/>
           </a:xfrm>
         </p:spPr>
       </p:pic>
-      <p:sp>
-        <p:nvSpPr>
-          <p:cNvPr id="4" name="Fußzeilenplatzhalter 3">
-            <a:extLst>
-              <a:ext uri="{FF2B5EF4-FFF2-40B4-BE49-F238E27FC236}">
-                <a16:creationId xmlns:a16="http://schemas.microsoft.com/office/drawing/2014/main" id="{7B4A52B2-FFF4-8DA8-0103-1CAA18DB3116}"/>
-              </a:ext>
-            </a:extLst>
-          </p:cNvPr>
-          <p:cNvSpPr>
-            <a:spLocks noGrp="1"/>
-          </p:cNvSpPr>
-          <p:nvPr>
-            <p:ph type="ftr" sz="quarter" idx="3"/>
-          </p:nvPr>
-        </p:nvSpPr>
-        <p:spPr/>
-        <p:txBody>
-          <a:bodyPr/>
-          <a:lstStyle/>
-          <a:p>
-            <a:pPr>
-              <a:defRPr/>
-            </a:pPr>
-            <a:r>
-              <a:rPr lang="de-DE"/>
-              <a:t>Titel des Projekts | Nachnamen der Autoren einfügen</a:t>
-            </a:r>
-            <a:endParaRPr lang="de-DE" dirty="0"/>
-          </a:p>
-        </p:txBody>
-      </p:sp>
-      <p:sp>
-        <p:nvSpPr>
-          <p:cNvPr id="5" name="Foliennummernplatzhalter 4">
-            <a:extLst>
-              <a:ext uri="{FF2B5EF4-FFF2-40B4-BE49-F238E27FC236}">
-                <a16:creationId xmlns:a16="http://schemas.microsoft.com/office/drawing/2014/main" id="{125B148E-4600-ABD9-FC23-EA35479EEE11}"/>
-              </a:ext>
-            </a:extLst>
-          </p:cNvPr>
-          <p:cNvSpPr>
-            <a:spLocks noGrp="1"/>
-          </p:cNvSpPr>
-          <p:nvPr>
-            <p:ph type="sldNum" sz="quarter" idx="4"/>
-          </p:nvPr>
-        </p:nvSpPr>
-        <p:spPr/>
-        <p:txBody>
-          <a:bodyPr/>
-          <a:lstStyle/>
-          <a:p>
-            <a:fld id="{029DE7E0-E051-4C03-AF53-7018E0F7EF0C}" type="slidenum">
-              <a:rPr lang="de-DE" altLang="de-DE" smtClean="0"/>
-              <a:pPr/>
-              <a:t>12</a:t>
-            </a:fld>
-            <a:endParaRPr lang="de-DE" altLang="de-DE"/>
-          </a:p>
-        </p:txBody>
-      </p:sp>
-      <p:sp>
-        <p:nvSpPr>
-          <p:cNvPr id="8" name="Textfeld 7">
-            <a:extLst>
-              <a:ext uri="{FF2B5EF4-FFF2-40B4-BE49-F238E27FC236}">
-                <a16:creationId xmlns:a16="http://schemas.microsoft.com/office/drawing/2014/main" id="{8797DF71-DE75-D708-358E-10C2A3B37816}"/>
-              </a:ext>
-            </a:extLst>
-          </p:cNvPr>
-          <p:cNvSpPr txBox="1"/>
+      <p:pic>
+        <p:nvPicPr>
+          <p:cNvPr id="20" name="Grafik 19">
+            <a:extLst>
+              <a:ext uri="{FF2B5EF4-FFF2-40B4-BE49-F238E27FC236}">
+                <a16:creationId xmlns:a16="http://schemas.microsoft.com/office/drawing/2014/main" id="{EDC3A646-7865-DBF8-989F-41F5FAA9A37E}"/>
+              </a:ext>
+            </a:extLst>
+          </p:cNvPr>
+          <p:cNvPicPr>
+            <a:picLocks noChangeAspect="1"/>
+          </p:cNvPicPr>
           <p:nvPr/>
-        </p:nvSpPr>
+        </p:nvPicPr>
+        <p:blipFill>
+          <a:blip r:embed="rId3"/>
+          <a:stretch>
+            <a:fillRect/>
+          </a:stretch>
+        </p:blipFill>
         <p:spPr>
           <a:xfrm>
-            <a:off x="2855640" y="4797152"/>
-            <a:ext cx="7416824" cy="1287532"/>
+            <a:off x="5760000" y="1419513"/>
+            <a:ext cx="5561618" cy="4597517"/>
           </a:xfrm>
           <a:prstGeom prst="rect">
             <a:avLst/>
           </a:prstGeom>
-          <a:noFill/>
         </p:spPr>
-        <p:txBody>
-          <a:bodyPr wrap="square" rtlCol="0">
-            <a:spAutoFit/>
-          </a:bodyPr>
-          <a:lstStyle/>
-          <a:p>
-            <a:pPr marL="285750" indent="-285750">
-              <a:lnSpc>
-                <a:spcPct val="150000"/>
-              </a:lnSpc>
-              <a:buFont typeface="Arial" panose="020B0604020202020204" pitchFamily="34" charset="0"/>
-              <a:buChar char="•"/>
-            </a:pPr>
-            <a:r>
-              <a:rPr lang="en-US" dirty="0"/>
-              <a:t>Rot-Kanal: </a:t>
-            </a:r>
-            <a:r>
-              <a:rPr lang="en-US" dirty="0" err="1"/>
-              <a:t>Größte</a:t>
-            </a:r>
-            <a:r>
-              <a:rPr lang="en-US" dirty="0"/>
-              <a:t> </a:t>
-            </a:r>
-            <a:r>
-              <a:rPr lang="en-US" dirty="0" err="1"/>
-              <a:t>Differenz</a:t>
-            </a:r>
-            <a:r>
-              <a:rPr lang="en-US" dirty="0"/>
-              <a:t> </a:t>
-            </a:r>
-            <a:r>
-              <a:rPr lang="en-US" dirty="0" err="1"/>
-              <a:t>zwischen</a:t>
-            </a:r>
-            <a:r>
-              <a:rPr lang="en-US" dirty="0"/>
-              <a:t> den Klassen</a:t>
-            </a:r>
-          </a:p>
-          <a:p>
-            <a:pPr marL="285750" indent="-285750">
-              <a:lnSpc>
-                <a:spcPct val="150000"/>
-              </a:lnSpc>
-              <a:buFont typeface="Arial" panose="020B0604020202020204" pitchFamily="34" charset="0"/>
-              <a:buChar char="•"/>
-            </a:pPr>
-            <a:r>
-              <a:rPr lang="en-US" dirty="0"/>
-              <a:t>Blau-Kanal: </a:t>
-            </a:r>
-            <a:r>
-              <a:rPr lang="en-US" dirty="0" err="1"/>
-              <a:t>Zweitgrößte</a:t>
-            </a:r>
-            <a:r>
-              <a:rPr lang="en-US" dirty="0"/>
-              <a:t> </a:t>
-            </a:r>
-            <a:r>
-              <a:rPr lang="en-US" dirty="0" err="1"/>
-              <a:t>Differenz</a:t>
-            </a:r>
-            <a:r>
-              <a:rPr lang="en-US" dirty="0"/>
-              <a:t> – </a:t>
-            </a:r>
-            <a:r>
-              <a:rPr lang="en-US" dirty="0" err="1"/>
-              <a:t>unterstützt</a:t>
-            </a:r>
-            <a:r>
-              <a:rPr lang="en-US" dirty="0"/>
-              <a:t> die </a:t>
-            </a:r>
-            <a:r>
-              <a:rPr lang="en-US" dirty="0" err="1"/>
-              <a:t>Klassifikation</a:t>
-            </a:r>
-            <a:endParaRPr lang="en-US" dirty="0"/>
-          </a:p>
-          <a:p>
-            <a:pPr marL="285750" indent="-285750">
-              <a:lnSpc>
-                <a:spcPct val="150000"/>
-              </a:lnSpc>
-              <a:buFont typeface="Arial" panose="020B0604020202020204" pitchFamily="34" charset="0"/>
-              <a:buChar char="•"/>
-            </a:pPr>
-            <a:r>
-              <a:rPr lang="en-US" dirty="0"/>
-              <a:t>Grün-Kanal: </a:t>
-            </a:r>
-            <a:r>
-              <a:rPr lang="en-US" dirty="0" err="1"/>
-              <a:t>Kleinere</a:t>
-            </a:r>
-            <a:r>
-              <a:rPr lang="en-US" dirty="0"/>
-              <a:t> </a:t>
-            </a:r>
-            <a:r>
-              <a:rPr lang="en-US" dirty="0" err="1"/>
-              <a:t>aber</a:t>
-            </a:r>
-            <a:r>
-              <a:rPr lang="en-US" dirty="0"/>
-              <a:t> </a:t>
-            </a:r>
-            <a:r>
-              <a:rPr lang="en-US" dirty="0" err="1"/>
-              <a:t>messbare</a:t>
-            </a:r>
-            <a:r>
-              <a:rPr lang="en-US" dirty="0"/>
-              <a:t> </a:t>
-            </a:r>
-            <a:r>
-              <a:rPr lang="en-US" dirty="0" err="1"/>
-              <a:t>Differenz</a:t>
-            </a:r>
-            <a:endParaRPr lang="en-US" dirty="0"/>
-          </a:p>
-        </p:txBody>
-      </p:sp>
+      </p:pic>
     </p:spTree>
     <p:extLst>
       <p:ext uri="{BB962C8B-B14F-4D97-AF65-F5344CB8AC3E}">
-        <p14:creationId xmlns:p14="http://schemas.microsoft.com/office/powerpoint/2010/main" val="2264139518"/>
+        <p14:creationId xmlns:p14="http://schemas.microsoft.com/office/powerpoint/2010/main" val="3520649761"/>
       </p:ext>
     </p:extLst>
   </p:cSld>
@@ -4428,7 +3862,7 @@
           <p:cNvPr id="2" name="Titel 1">
             <a:extLst>
               <a:ext uri="{FF2B5EF4-FFF2-40B4-BE49-F238E27FC236}">
-                <a16:creationId xmlns:a16="http://schemas.microsoft.com/office/drawing/2014/main" id="{564010CA-FA90-C551-4B2E-BC5C6C34FE57}"/>
+                <a16:creationId xmlns:a16="http://schemas.microsoft.com/office/drawing/2014/main" id="{2CE903D5-8827-D1B7-A1B8-040E1ADEB192}"/>
               </a:ext>
             </a:extLst>
           </p:cNvPr>
@@ -4444,24 +3878,57 @@
           <a:bodyPr/>
           <a:lstStyle/>
           <a:p>
+            <a:pPr algn="ctr"/>
             <a:r>
               <a:rPr lang="de-DE" dirty="0"/>
-              <a:t>Welche Kriterien nutzt das Model hauptsächlich zur Klassifizierung? – Rot vs. Blau </a:t>
-            </a:r>
-            <a:r>
-              <a:rPr lang="de-DE" dirty="0" err="1"/>
-              <a:t>Scatter</a:t>
-            </a:r>
-            <a:endParaRPr lang="en-DE" dirty="0"/>
-          </a:p>
-        </p:txBody>
-      </p:sp>
+              <a:t>Vergleich – unveränderte und veränderte Testdaten</a:t>
+            </a:r>
+            <a:br>
+              <a:rPr lang="de-DE" dirty="0"/>
+            </a:br>
+            <a:r>
+              <a:rPr lang="de-DE" sz="2000" dirty="0"/>
+              <a:t>Kombination</a:t>
+            </a:r>
+            <a:endParaRPr lang="de-DE" dirty="0"/>
+          </a:p>
+        </p:txBody>
+      </p:sp>
+      <p:pic>
+        <p:nvPicPr>
+          <p:cNvPr id="7" name="Inhaltsplatzhalter 6">
+            <a:extLst>
+              <a:ext uri="{FF2B5EF4-FFF2-40B4-BE49-F238E27FC236}">
+                <a16:creationId xmlns:a16="http://schemas.microsoft.com/office/drawing/2014/main" id="{AE9AFE5E-56A8-8642-6E18-B096C75659E2}"/>
+              </a:ext>
+            </a:extLst>
+          </p:cNvPr>
+          <p:cNvPicPr>
+            <a:picLocks noGrp="1" noChangeAspect="1"/>
+          </p:cNvPicPr>
+          <p:nvPr>
+            <p:ph idx="1"/>
+          </p:nvPr>
+        </p:nvPicPr>
+        <p:blipFill>
+          <a:blip r:embed="rId2"/>
+          <a:stretch>
+            <a:fillRect/>
+          </a:stretch>
+        </p:blipFill>
+        <p:spPr>
+          <a:xfrm>
+            <a:off x="47328" y="1399668"/>
+            <a:ext cx="5502073" cy="4617812"/>
+          </a:xfrm>
+        </p:spPr>
+      </p:pic>
       <p:sp>
         <p:nvSpPr>
           <p:cNvPr id="4" name="Fußzeilenplatzhalter 3">
             <a:extLst>
               <a:ext uri="{FF2B5EF4-FFF2-40B4-BE49-F238E27FC236}">
-                <a16:creationId xmlns:a16="http://schemas.microsoft.com/office/drawing/2014/main" id="{4F054651-5EA0-B220-DEF2-7B22846AA84D}"/>
+                <a16:creationId xmlns:a16="http://schemas.microsoft.com/office/drawing/2014/main" id="{C3671DE2-E329-7173-17FF-3EDA58D75B2F}"/>
               </a:ext>
             </a:extLst>
           </p:cNvPr>
@@ -4493,7 +3960,7 @@
           <p:cNvPr id="5" name="Foliennummernplatzhalter 4">
             <a:extLst>
               <a:ext uri="{FF2B5EF4-FFF2-40B4-BE49-F238E27FC236}">
-                <a16:creationId xmlns:a16="http://schemas.microsoft.com/office/drawing/2014/main" id="{3A9B289F-E2CE-2423-29E7-E673CAF1AEA3}"/>
+                <a16:creationId xmlns:a16="http://schemas.microsoft.com/office/drawing/2014/main" id="{FFCFB8B6-A851-4F0E-2983-24D2FBBCC9B2}"/>
               </a:ext>
             </a:extLst>
           </p:cNvPr>
@@ -4513,6 +3980,2280 @@
               <a:rPr lang="de-DE" altLang="de-DE" smtClean="0"/>
               <a:pPr/>
               <a:t>13</a:t>
+            </a:fld>
+            <a:endParaRPr lang="de-DE" altLang="de-DE"/>
+          </a:p>
+        </p:txBody>
+      </p:sp>
+      <p:pic>
+        <p:nvPicPr>
+          <p:cNvPr id="9" name="Grafik 8">
+            <a:extLst>
+              <a:ext uri="{FF2B5EF4-FFF2-40B4-BE49-F238E27FC236}">
+                <a16:creationId xmlns:a16="http://schemas.microsoft.com/office/drawing/2014/main" id="{C6BB3679-D5CD-0F82-BDA3-0BE4A2FA73FE}"/>
+              </a:ext>
+            </a:extLst>
+          </p:cNvPr>
+          <p:cNvPicPr>
+            <a:picLocks noChangeAspect="1"/>
+          </p:cNvPicPr>
+          <p:nvPr/>
+        </p:nvPicPr>
+        <p:blipFill>
+          <a:blip r:embed="rId3"/>
+          <a:stretch>
+            <a:fillRect/>
+          </a:stretch>
+        </p:blipFill>
+        <p:spPr>
+          <a:xfrm>
+            <a:off x="5778503" y="1399668"/>
+            <a:ext cx="5605365" cy="4621620"/>
+          </a:xfrm>
+          <a:prstGeom prst="rect">
+            <a:avLst/>
+          </a:prstGeom>
+        </p:spPr>
+      </p:pic>
+    </p:spTree>
+    <p:extLst>
+      <p:ext uri="{BB962C8B-B14F-4D97-AF65-F5344CB8AC3E}">
+        <p14:creationId xmlns:p14="http://schemas.microsoft.com/office/powerpoint/2010/main" val="1125395663"/>
+      </p:ext>
+    </p:extLst>
+  </p:cSld>
+  <p:clrMapOvr>
+    <a:masterClrMapping/>
+  </p:clrMapOvr>
+</p:sld>
+</file>
+
+<file path=ppt/slides/slide14.xml><?xml version="1.0" encoding="utf-8"?>
+<p:sld xmlns:a="http://schemas.openxmlformats.org/drawingml/2006/main" xmlns:r="http://schemas.openxmlformats.org/officeDocument/2006/relationships" xmlns:p="http://schemas.openxmlformats.org/presentationml/2006/main">
+  <p:cSld>
+    <p:spTree>
+      <p:nvGrpSpPr>
+        <p:cNvPr id="1" name=""/>
+        <p:cNvGrpSpPr/>
+        <p:nvPr/>
+      </p:nvGrpSpPr>
+      <p:grpSpPr>
+        <a:xfrm>
+          <a:off x="0" y="0"/>
+          <a:ext cx="0" cy="0"/>
+          <a:chOff x="0" y="0"/>
+          <a:chExt cx="0" cy="0"/>
+        </a:xfrm>
+      </p:grpSpPr>
+      <p:sp>
+        <p:nvSpPr>
+          <p:cNvPr id="2" name="Titel 1">
+            <a:extLst>
+              <a:ext uri="{FF2B5EF4-FFF2-40B4-BE49-F238E27FC236}">
+                <a16:creationId xmlns:a16="http://schemas.microsoft.com/office/drawing/2014/main" id="{B9238149-E390-1762-58B5-6F1D8A432F28}"/>
+              </a:ext>
+            </a:extLst>
+          </p:cNvPr>
+          <p:cNvSpPr>
+            <a:spLocks noGrp="1"/>
+          </p:cNvSpPr>
+          <p:nvPr>
+            <p:ph type="title"/>
+          </p:nvPr>
+        </p:nvSpPr>
+        <p:spPr/>
+        <p:txBody>
+          <a:bodyPr/>
+          <a:lstStyle/>
+          <a:p>
+            <a:r>
+              <a:rPr lang="de-DE" dirty="0"/>
+              <a:t>Welche Kriterien nutzt das Model hauptsächlich zur Klassifizierung? - </a:t>
+            </a:r>
+            <a:r>
+              <a:rPr lang="de-DE" dirty="0" err="1"/>
+              <a:t>GradCam</a:t>
+            </a:r>
+            <a:br>
+              <a:rPr lang="de-DE" dirty="0"/>
+            </a:br>
+            <a:endParaRPr lang="en-DE" dirty="0"/>
+          </a:p>
+        </p:txBody>
+      </p:sp>
+      <p:sp>
+        <p:nvSpPr>
+          <p:cNvPr id="3" name="Inhaltsplatzhalter 2">
+            <a:extLst>
+              <a:ext uri="{FF2B5EF4-FFF2-40B4-BE49-F238E27FC236}">
+                <a16:creationId xmlns:a16="http://schemas.microsoft.com/office/drawing/2014/main" id="{12985055-DC01-557E-02EB-1B2F2284234C}"/>
+              </a:ext>
+            </a:extLst>
+          </p:cNvPr>
+          <p:cNvSpPr>
+            <a:spLocks noGrp="1"/>
+          </p:cNvSpPr>
+          <p:nvPr>
+            <p:ph idx="1"/>
+          </p:nvPr>
+        </p:nvSpPr>
+        <p:spPr>
+          <a:xfrm>
+            <a:off x="551384" y="1844824"/>
+            <a:ext cx="6552728" cy="4491174"/>
+          </a:xfrm>
+        </p:spPr>
+        <p:txBody>
+          <a:bodyPr/>
+          <a:lstStyle/>
+          <a:p>
+            <a:pPr marL="285750" indent="-285750">
+              <a:buFont typeface="Arial" panose="020B0604020202020204" pitchFamily="34" charset="0"/>
+              <a:buChar char="•"/>
+            </a:pPr>
+            <a:endParaRPr lang="en-US" dirty="0"/>
+          </a:p>
+          <a:p>
+            <a:pPr marL="285750" indent="-285750">
+              <a:lnSpc>
+                <a:spcPct val="150000"/>
+              </a:lnSpc>
+              <a:buFont typeface="Arial" panose="020B0604020202020204" pitchFamily="34" charset="0"/>
+              <a:buChar char="•"/>
+            </a:pPr>
+            <a:r>
+              <a:rPr lang="en-US" dirty="0" err="1"/>
+              <a:t>GradCam</a:t>
+            </a:r>
+            <a:r>
+              <a:rPr lang="en-US" dirty="0"/>
+              <a:t> – Was </a:t>
+            </a:r>
+            <a:r>
+              <a:rPr lang="en-US" dirty="0" err="1"/>
+              <a:t>ist</a:t>
+            </a:r>
+            <a:r>
+              <a:rPr lang="en-US" dirty="0"/>
+              <a:t> das?</a:t>
+            </a:r>
+          </a:p>
+          <a:p>
+            <a:pPr marL="628650" lvl="1" indent="-285750">
+              <a:lnSpc>
+                <a:spcPct val="150000"/>
+              </a:lnSpc>
+            </a:pPr>
+            <a:r>
+              <a:rPr lang="en-US" dirty="0" err="1"/>
+              <a:t>Visualisiert</a:t>
+            </a:r>
+            <a:r>
+              <a:rPr lang="en-US" dirty="0"/>
+              <a:t> </a:t>
+            </a:r>
+            <a:r>
+              <a:rPr lang="en-US" dirty="0" err="1"/>
+              <a:t>wichtige</a:t>
+            </a:r>
+            <a:r>
+              <a:rPr lang="en-US" dirty="0"/>
+              <a:t> </a:t>
+            </a:r>
+            <a:r>
+              <a:rPr lang="en-US" dirty="0" err="1"/>
+              <a:t>Bildbereiche</a:t>
+            </a:r>
+            <a:endParaRPr lang="en-US" dirty="0"/>
+          </a:p>
+          <a:p>
+            <a:pPr marL="628650" lvl="1" indent="-285750">
+              <a:lnSpc>
+                <a:spcPct val="150000"/>
+              </a:lnSpc>
+            </a:pPr>
+            <a:r>
+              <a:rPr lang="en-US" dirty="0" err="1"/>
+              <a:t>Zeigt</a:t>
+            </a:r>
+            <a:r>
+              <a:rPr lang="en-US" dirty="0"/>
+              <a:t>: “</a:t>
+            </a:r>
+            <a:r>
+              <a:rPr lang="en-US" dirty="0" err="1"/>
+              <a:t>Worauf</a:t>
+            </a:r>
+            <a:r>
+              <a:rPr lang="en-US" dirty="0"/>
+              <a:t> </a:t>
+            </a:r>
+            <a:r>
+              <a:rPr lang="en-US" dirty="0" err="1"/>
+              <a:t>achtet</a:t>
+            </a:r>
+            <a:r>
+              <a:rPr lang="en-US" dirty="0"/>
+              <a:t> das Modell?”</a:t>
+            </a:r>
+          </a:p>
+          <a:p>
+            <a:pPr marL="628650" lvl="1" indent="-285750">
+              <a:lnSpc>
+                <a:spcPct val="150000"/>
+              </a:lnSpc>
+            </a:pPr>
+            <a:r>
+              <a:rPr lang="en-US" dirty="0"/>
+              <a:t>Standard-Tool für CNN Interpretation</a:t>
+            </a:r>
+          </a:p>
+          <a:p>
+            <a:pPr marL="628650" lvl="1" indent="-285750">
+              <a:lnSpc>
+                <a:spcPct val="150000"/>
+              </a:lnSpc>
+            </a:pPr>
+            <a:endParaRPr lang="en-US" dirty="0"/>
+          </a:p>
+          <a:p>
+            <a:r>
+              <a:rPr lang="en-US" b="1" dirty="0" err="1"/>
+              <a:t>Erwartung</a:t>
+            </a:r>
+            <a:r>
+              <a:rPr lang="en-US" b="1" dirty="0"/>
+              <a:t>:</a:t>
+            </a:r>
+            <a:r>
+              <a:rPr lang="en-US" dirty="0"/>
+              <a:t> Klare </a:t>
+            </a:r>
+            <a:r>
+              <a:rPr lang="en-US" dirty="0" err="1"/>
+              <a:t>Fokussierung</a:t>
+            </a:r>
+            <a:r>
+              <a:rPr lang="en-US" dirty="0"/>
+              <a:t> auf </a:t>
+            </a:r>
+            <a:r>
+              <a:rPr lang="en-US" dirty="0" err="1"/>
+              <a:t>brennbare</a:t>
+            </a:r>
+            <a:r>
+              <a:rPr lang="en-US" dirty="0"/>
+              <a:t> </a:t>
+            </a:r>
+            <a:r>
+              <a:rPr lang="en-US" dirty="0" err="1"/>
+              <a:t>Objekte</a:t>
+            </a:r>
+            <a:endParaRPr lang="en-US" dirty="0"/>
+          </a:p>
+        </p:txBody>
+      </p:sp>
+      <p:sp>
+        <p:nvSpPr>
+          <p:cNvPr id="4" name="Fußzeilenplatzhalter 3">
+            <a:extLst>
+              <a:ext uri="{FF2B5EF4-FFF2-40B4-BE49-F238E27FC236}">
+                <a16:creationId xmlns:a16="http://schemas.microsoft.com/office/drawing/2014/main" id="{BE855BF1-8386-1063-93BE-5AF7985716B2}"/>
+              </a:ext>
+            </a:extLst>
+          </p:cNvPr>
+          <p:cNvSpPr>
+            <a:spLocks noGrp="1"/>
+          </p:cNvSpPr>
+          <p:nvPr>
+            <p:ph type="ftr" sz="quarter" idx="3"/>
+          </p:nvPr>
+        </p:nvSpPr>
+        <p:spPr/>
+        <p:txBody>
+          <a:bodyPr/>
+          <a:lstStyle/>
+          <a:p>
+            <a:pPr>
+              <a:defRPr/>
+            </a:pPr>
+            <a:r>
+              <a:rPr lang="de-DE"/>
+              <a:t>Titel des Projekts | Nachnamen der Autoren einfügen</a:t>
+            </a:r>
+            <a:endParaRPr lang="de-DE" dirty="0"/>
+          </a:p>
+        </p:txBody>
+      </p:sp>
+      <p:sp>
+        <p:nvSpPr>
+          <p:cNvPr id="5" name="Foliennummernplatzhalter 4">
+            <a:extLst>
+              <a:ext uri="{FF2B5EF4-FFF2-40B4-BE49-F238E27FC236}">
+                <a16:creationId xmlns:a16="http://schemas.microsoft.com/office/drawing/2014/main" id="{AF8C4E8C-6F15-26A6-D715-C6D2C3843F0A}"/>
+              </a:ext>
+            </a:extLst>
+          </p:cNvPr>
+          <p:cNvSpPr>
+            <a:spLocks noGrp="1"/>
+          </p:cNvSpPr>
+          <p:nvPr>
+            <p:ph type="sldNum" sz="quarter" idx="4"/>
+          </p:nvPr>
+        </p:nvSpPr>
+        <p:spPr/>
+        <p:txBody>
+          <a:bodyPr/>
+          <a:lstStyle/>
+          <a:p>
+            <a:fld id="{029DE7E0-E051-4C03-AF53-7018E0F7EF0C}" type="slidenum">
+              <a:rPr lang="de-DE" altLang="de-DE" smtClean="0"/>
+              <a:pPr/>
+              <a:t>14</a:t>
+            </a:fld>
+            <a:endParaRPr lang="de-DE" altLang="de-DE"/>
+          </a:p>
+        </p:txBody>
+      </p:sp>
+      <p:pic>
+        <p:nvPicPr>
+          <p:cNvPr id="6" name="Picture 4" descr="GradCAM: Enhancing Neural Network Interpretability">
+            <a:extLst>
+              <a:ext uri="{FF2B5EF4-FFF2-40B4-BE49-F238E27FC236}">
+                <a16:creationId xmlns:a16="http://schemas.microsoft.com/office/drawing/2014/main" id="{4300C151-C40A-578B-02F3-EECA49B0D529}"/>
+              </a:ext>
+            </a:extLst>
+          </p:cNvPr>
+          <p:cNvPicPr>
+            <a:picLocks noChangeAspect="1" noChangeArrowheads="1"/>
+          </p:cNvPicPr>
+          <p:nvPr/>
+        </p:nvPicPr>
+        <p:blipFill rotWithShape="1">
+          <a:blip r:embed="rId2">
+            <a:extLst>
+              <a:ext uri="{28A0092B-C50C-407E-A947-70E740481C1C}">
+                <a14:useLocalDpi xmlns:a14="http://schemas.microsoft.com/office/drawing/2010/main" val="0"/>
+              </a:ext>
+            </a:extLst>
+          </a:blip>
+          <a:srcRect r="66645"/>
+          <a:stretch>
+            <a:fillRect/>
+          </a:stretch>
+        </p:blipFill>
+        <p:spPr bwMode="auto">
+          <a:xfrm>
+            <a:off x="5978669" y="1556792"/>
+            <a:ext cx="2389044" cy="2499425"/>
+          </a:xfrm>
+          <a:prstGeom prst="rect">
+            <a:avLst/>
+          </a:prstGeom>
+          <a:noFill/>
+          <a:extLst>
+            <a:ext uri="{909E8E84-426E-40DD-AFC4-6F175D3DCCD1}">
+              <a14:hiddenFill xmlns:a14="http://schemas.microsoft.com/office/drawing/2010/main">
+                <a:solidFill>
+                  <a:srgbClr val="FFFFFF"/>
+                </a:solidFill>
+              </a14:hiddenFill>
+            </a:ext>
+          </a:extLst>
+        </p:spPr>
+      </p:pic>
+      <p:pic>
+        <p:nvPicPr>
+          <p:cNvPr id="7" name="Picture 6" descr="GradCAM: Enhancing Neural Network Interpretability">
+            <a:extLst>
+              <a:ext uri="{FF2B5EF4-FFF2-40B4-BE49-F238E27FC236}">
+                <a16:creationId xmlns:a16="http://schemas.microsoft.com/office/drawing/2014/main" id="{31D115B1-AC56-29F2-6840-C6525E80245A}"/>
+              </a:ext>
+            </a:extLst>
+          </p:cNvPr>
+          <p:cNvPicPr>
+            <a:picLocks noChangeAspect="1" noChangeArrowheads="1"/>
+          </p:cNvPicPr>
+          <p:nvPr/>
+        </p:nvPicPr>
+        <p:blipFill rotWithShape="1">
+          <a:blip r:embed="rId2">
+            <a:extLst>
+              <a:ext uri="{28A0092B-C50C-407E-A947-70E740481C1C}">
+                <a14:useLocalDpi xmlns:a14="http://schemas.microsoft.com/office/drawing/2010/main" val="0"/>
+              </a:ext>
+            </a:extLst>
+          </a:blip>
+          <a:srcRect l="66734"/>
+          <a:stretch>
+            <a:fillRect/>
+          </a:stretch>
+        </p:blipFill>
+        <p:spPr bwMode="auto">
+          <a:xfrm>
+            <a:off x="8733676" y="1550113"/>
+            <a:ext cx="2389044" cy="2506104"/>
+          </a:xfrm>
+          <a:prstGeom prst="rect">
+            <a:avLst/>
+          </a:prstGeom>
+          <a:noFill/>
+          <a:extLst>
+            <a:ext uri="{909E8E84-426E-40DD-AFC4-6F175D3DCCD1}">
+              <a14:hiddenFill xmlns:a14="http://schemas.microsoft.com/office/drawing/2010/main">
+                <a:solidFill>
+                  <a:srgbClr val="FFFFFF"/>
+                </a:solidFill>
+              </a14:hiddenFill>
+            </a:ext>
+          </a:extLst>
+        </p:spPr>
+      </p:pic>
+      <p:sp>
+        <p:nvSpPr>
+          <p:cNvPr id="8" name="Pfeil: nach rechts 7">
+            <a:extLst>
+              <a:ext uri="{FF2B5EF4-FFF2-40B4-BE49-F238E27FC236}">
+                <a16:creationId xmlns:a16="http://schemas.microsoft.com/office/drawing/2014/main" id="{E2DBFE24-B053-0F73-EFE7-89BA13870244}"/>
+              </a:ext>
+            </a:extLst>
+          </p:cNvPr>
+          <p:cNvSpPr/>
+          <p:nvPr/>
+        </p:nvSpPr>
+        <p:spPr>
+          <a:xfrm>
+            <a:off x="8394773" y="2596235"/>
+            <a:ext cx="338903" cy="375029"/>
+          </a:xfrm>
+          <a:prstGeom prst="rightArrow">
+            <a:avLst/>
+          </a:prstGeom>
+        </p:spPr>
+        <p:style>
+          <a:lnRef idx="2">
+            <a:schemeClr val="accent1">
+              <a:shade val="15000"/>
+            </a:schemeClr>
+          </a:lnRef>
+          <a:fillRef idx="1">
+            <a:schemeClr val="accent1"/>
+          </a:fillRef>
+          <a:effectRef idx="0">
+            <a:schemeClr val="accent1"/>
+          </a:effectRef>
+          <a:fontRef idx="minor">
+            <a:schemeClr val="lt1"/>
+          </a:fontRef>
+        </p:style>
+        <p:txBody>
+          <a:bodyPr rtlCol="0" anchor="ctr"/>
+          <a:lstStyle/>
+          <a:p>
+            <a:pPr algn="ctr"/>
+            <a:endParaRPr lang="en-DE"/>
+          </a:p>
+        </p:txBody>
+      </p:sp>
+      <p:sp>
+        <p:nvSpPr>
+          <p:cNvPr id="9" name="Textfeld 8">
+            <a:extLst>
+              <a:ext uri="{FF2B5EF4-FFF2-40B4-BE49-F238E27FC236}">
+                <a16:creationId xmlns:a16="http://schemas.microsoft.com/office/drawing/2014/main" id="{2CC092FC-3AEF-203D-2699-9AC54809EE29}"/>
+              </a:ext>
+            </a:extLst>
+          </p:cNvPr>
+          <p:cNvSpPr txBox="1"/>
+          <p:nvPr/>
+        </p:nvSpPr>
+        <p:spPr>
+          <a:xfrm>
+            <a:off x="7104112" y="4017386"/>
+            <a:ext cx="4914093" cy="338554"/>
+          </a:xfrm>
+          <a:prstGeom prst="rect">
+            <a:avLst/>
+          </a:prstGeom>
+          <a:noFill/>
+        </p:spPr>
+        <p:txBody>
+          <a:bodyPr wrap="square" rtlCol="0">
+            <a:spAutoFit/>
+          </a:bodyPr>
+          <a:lstStyle/>
+          <a:p>
+            <a:r>
+              <a:rPr lang="en-US" sz="1600" dirty="0"/>
+              <a:t>Abb. 1: </a:t>
+            </a:r>
+            <a:r>
+              <a:rPr lang="en-US" sz="1600" dirty="0" err="1"/>
+              <a:t>GradCam</a:t>
+            </a:r>
+            <a:r>
+              <a:rPr lang="en-US" sz="1600" dirty="0"/>
+              <a:t> </a:t>
+            </a:r>
+            <a:r>
+              <a:rPr lang="en-US" sz="1600" dirty="0" err="1"/>
+              <a:t>Visualisierung</a:t>
+            </a:r>
+            <a:endParaRPr lang="en-DE" sz="1600" dirty="0"/>
+          </a:p>
+        </p:txBody>
+      </p:sp>
+    </p:spTree>
+    <p:extLst>
+      <p:ext uri="{BB962C8B-B14F-4D97-AF65-F5344CB8AC3E}">
+        <p14:creationId xmlns:p14="http://schemas.microsoft.com/office/powerpoint/2010/main" val="2507666670"/>
+      </p:ext>
+    </p:extLst>
+  </p:cSld>
+  <p:clrMapOvr>
+    <a:masterClrMapping/>
+  </p:clrMapOvr>
+</p:sld>
+</file>
+
+<file path=ppt/slides/slide15.xml><?xml version="1.0" encoding="utf-8"?>
+<p:sld xmlns:a="http://schemas.openxmlformats.org/drawingml/2006/main" xmlns:r="http://schemas.openxmlformats.org/officeDocument/2006/relationships" xmlns:p="http://schemas.openxmlformats.org/presentationml/2006/main">
+  <p:cSld>
+    <p:spTree>
+      <p:nvGrpSpPr>
+        <p:cNvPr id="1" name=""/>
+        <p:cNvGrpSpPr/>
+        <p:nvPr/>
+      </p:nvGrpSpPr>
+      <p:grpSpPr>
+        <a:xfrm>
+          <a:off x="0" y="0"/>
+          <a:ext cx="0" cy="0"/>
+          <a:chOff x="0" y="0"/>
+          <a:chExt cx="0" cy="0"/>
+        </a:xfrm>
+      </p:grpSpPr>
+      <p:sp>
+        <p:nvSpPr>
+          <p:cNvPr id="2" name="Titel 1">
+            <a:extLst>
+              <a:ext uri="{FF2B5EF4-FFF2-40B4-BE49-F238E27FC236}">
+                <a16:creationId xmlns:a16="http://schemas.microsoft.com/office/drawing/2014/main" id="{9CCB9BE9-D776-9A3B-7386-D672D996F170}"/>
+              </a:ext>
+            </a:extLst>
+          </p:cNvPr>
+          <p:cNvSpPr>
+            <a:spLocks noGrp="1"/>
+          </p:cNvSpPr>
+          <p:nvPr>
+            <p:ph type="title"/>
+          </p:nvPr>
+        </p:nvSpPr>
+        <p:spPr/>
+        <p:txBody>
+          <a:bodyPr/>
+          <a:lstStyle/>
+          <a:p>
+            <a:r>
+              <a:rPr lang="de-DE" dirty="0"/>
+              <a:t>Welche Kriterien nutzt das Model hauptsächlich zur Klassifizierung? - </a:t>
+            </a:r>
+            <a:r>
+              <a:rPr lang="de-DE" dirty="0" err="1"/>
+              <a:t>GradCam</a:t>
+            </a:r>
+            <a:endParaRPr lang="en-DE" dirty="0"/>
+          </a:p>
+        </p:txBody>
+      </p:sp>
+      <p:pic>
+        <p:nvPicPr>
+          <p:cNvPr id="7" name="Inhaltsplatzhalter 6">
+            <a:extLst>
+              <a:ext uri="{FF2B5EF4-FFF2-40B4-BE49-F238E27FC236}">
+                <a16:creationId xmlns:a16="http://schemas.microsoft.com/office/drawing/2014/main" id="{B79A8EA9-8785-9E21-A18B-6566F3E7459E}"/>
+              </a:ext>
+            </a:extLst>
+          </p:cNvPr>
+          <p:cNvPicPr>
+            <a:picLocks noGrp="1" noChangeAspect="1"/>
+          </p:cNvPicPr>
+          <p:nvPr>
+            <p:ph idx="1"/>
+          </p:nvPr>
+        </p:nvPicPr>
+        <p:blipFill rotWithShape="1">
+          <a:blip r:embed="rId3">
+            <a:extLst>
+              <a:ext uri="{28A0092B-C50C-407E-A947-70E740481C1C}">
+                <a14:useLocalDpi xmlns:a14="http://schemas.microsoft.com/office/drawing/2010/main" val="0"/>
+              </a:ext>
+            </a:extLst>
+          </a:blip>
+          <a:srcRect t="5089"/>
+          <a:stretch>
+            <a:fillRect/>
+          </a:stretch>
+        </p:blipFill>
+        <p:spPr>
+          <a:xfrm>
+            <a:off x="551384" y="3913893"/>
+            <a:ext cx="5040561" cy="2535976"/>
+          </a:xfrm>
+        </p:spPr>
+      </p:pic>
+      <p:sp>
+        <p:nvSpPr>
+          <p:cNvPr id="4" name="Fußzeilenplatzhalter 3">
+            <a:extLst>
+              <a:ext uri="{FF2B5EF4-FFF2-40B4-BE49-F238E27FC236}">
+                <a16:creationId xmlns:a16="http://schemas.microsoft.com/office/drawing/2014/main" id="{F84CE3A0-1660-DEA8-2B74-9448FC8DDF1C}"/>
+              </a:ext>
+            </a:extLst>
+          </p:cNvPr>
+          <p:cNvSpPr>
+            <a:spLocks noGrp="1"/>
+          </p:cNvSpPr>
+          <p:nvPr>
+            <p:ph type="ftr" sz="quarter" idx="3"/>
+          </p:nvPr>
+        </p:nvSpPr>
+        <p:spPr/>
+        <p:txBody>
+          <a:bodyPr/>
+          <a:lstStyle/>
+          <a:p>
+            <a:pPr>
+              <a:defRPr/>
+            </a:pPr>
+            <a:r>
+              <a:rPr lang="de-DE"/>
+              <a:t>Titel des Projekts | Nachnamen der Autoren einfügen</a:t>
+            </a:r>
+            <a:endParaRPr lang="de-DE" dirty="0"/>
+          </a:p>
+        </p:txBody>
+      </p:sp>
+      <p:sp>
+        <p:nvSpPr>
+          <p:cNvPr id="5" name="Foliennummernplatzhalter 4">
+            <a:extLst>
+              <a:ext uri="{FF2B5EF4-FFF2-40B4-BE49-F238E27FC236}">
+                <a16:creationId xmlns:a16="http://schemas.microsoft.com/office/drawing/2014/main" id="{5B393019-4F4E-8D36-DEBB-AA7222A12857}"/>
+              </a:ext>
+            </a:extLst>
+          </p:cNvPr>
+          <p:cNvSpPr>
+            <a:spLocks noGrp="1"/>
+          </p:cNvSpPr>
+          <p:nvPr>
+            <p:ph type="sldNum" sz="quarter" idx="4"/>
+          </p:nvPr>
+        </p:nvSpPr>
+        <p:spPr/>
+        <p:txBody>
+          <a:bodyPr/>
+          <a:lstStyle/>
+          <a:p>
+            <a:fld id="{029DE7E0-E051-4C03-AF53-7018E0F7EF0C}" type="slidenum">
+              <a:rPr lang="de-DE" altLang="de-DE" smtClean="0"/>
+              <a:pPr/>
+              <a:t>15</a:t>
+            </a:fld>
+            <a:endParaRPr lang="de-DE" altLang="de-DE"/>
+          </a:p>
+        </p:txBody>
+      </p:sp>
+      <p:pic>
+        <p:nvPicPr>
+          <p:cNvPr id="9" name="Grafik 8">
+            <a:extLst>
+              <a:ext uri="{FF2B5EF4-FFF2-40B4-BE49-F238E27FC236}">
+                <a16:creationId xmlns:a16="http://schemas.microsoft.com/office/drawing/2014/main" id="{A87AFE59-DD18-549A-180D-1F5F71D82AB2}"/>
+              </a:ext>
+            </a:extLst>
+          </p:cNvPr>
+          <p:cNvPicPr>
+            <a:picLocks noChangeAspect="1"/>
+          </p:cNvPicPr>
+          <p:nvPr/>
+        </p:nvPicPr>
+        <p:blipFill>
+          <a:blip r:embed="rId4">
+            <a:extLst>
+              <a:ext uri="{28A0092B-C50C-407E-A947-70E740481C1C}">
+                <a14:useLocalDpi xmlns:a14="http://schemas.microsoft.com/office/drawing/2010/main" val="0"/>
+              </a:ext>
+            </a:extLst>
+          </a:blip>
+          <a:stretch>
+            <a:fillRect/>
+          </a:stretch>
+        </p:blipFill>
+        <p:spPr>
+          <a:xfrm>
+            <a:off x="551384" y="1228456"/>
+            <a:ext cx="5040560" cy="2671964"/>
+          </a:xfrm>
+          <a:prstGeom prst="rect">
+            <a:avLst/>
+          </a:prstGeom>
+        </p:spPr>
+      </p:pic>
+      <p:sp>
+        <p:nvSpPr>
+          <p:cNvPr id="10" name="Pfeil: nach rechts 9">
+            <a:extLst>
+              <a:ext uri="{FF2B5EF4-FFF2-40B4-BE49-F238E27FC236}">
+                <a16:creationId xmlns:a16="http://schemas.microsoft.com/office/drawing/2014/main" id="{DD597DAE-13CC-0DA3-C42C-29EFD825A1EE}"/>
+              </a:ext>
+            </a:extLst>
+          </p:cNvPr>
+          <p:cNvSpPr/>
+          <p:nvPr/>
+        </p:nvSpPr>
+        <p:spPr>
+          <a:xfrm>
+            <a:off x="2927648" y="2348880"/>
+            <a:ext cx="288032" cy="313858"/>
+          </a:xfrm>
+          <a:prstGeom prst="rightArrow">
+            <a:avLst/>
+          </a:prstGeom>
+        </p:spPr>
+        <p:style>
+          <a:lnRef idx="2">
+            <a:schemeClr val="accent1">
+              <a:shade val="15000"/>
+            </a:schemeClr>
+          </a:lnRef>
+          <a:fillRef idx="1">
+            <a:schemeClr val="accent1"/>
+          </a:fillRef>
+          <a:effectRef idx="0">
+            <a:schemeClr val="accent1"/>
+          </a:effectRef>
+          <a:fontRef idx="minor">
+            <a:schemeClr val="lt1"/>
+          </a:fontRef>
+        </p:style>
+        <p:txBody>
+          <a:bodyPr rtlCol="0" anchor="ctr"/>
+          <a:lstStyle/>
+          <a:p>
+            <a:pPr algn="ctr"/>
+            <a:endParaRPr lang="en-DE"/>
+          </a:p>
+        </p:txBody>
+      </p:sp>
+      <p:sp>
+        <p:nvSpPr>
+          <p:cNvPr id="11" name="Pfeil: nach rechts 10">
+            <a:extLst>
+              <a:ext uri="{FF2B5EF4-FFF2-40B4-BE49-F238E27FC236}">
+                <a16:creationId xmlns:a16="http://schemas.microsoft.com/office/drawing/2014/main" id="{C38D1F46-B1B3-7466-24B2-C9954F4ABD2F}"/>
+              </a:ext>
+            </a:extLst>
+          </p:cNvPr>
+          <p:cNvSpPr/>
+          <p:nvPr/>
+        </p:nvSpPr>
+        <p:spPr>
+          <a:xfrm>
+            <a:off x="2927648" y="4863915"/>
+            <a:ext cx="288032" cy="313858"/>
+          </a:xfrm>
+          <a:prstGeom prst="rightArrow">
+            <a:avLst/>
+          </a:prstGeom>
+        </p:spPr>
+        <p:style>
+          <a:lnRef idx="2">
+            <a:schemeClr val="accent1">
+              <a:shade val="15000"/>
+            </a:schemeClr>
+          </a:lnRef>
+          <a:fillRef idx="1">
+            <a:schemeClr val="accent1"/>
+          </a:fillRef>
+          <a:effectRef idx="0">
+            <a:schemeClr val="accent1"/>
+          </a:effectRef>
+          <a:fontRef idx="minor">
+            <a:schemeClr val="lt1"/>
+          </a:fontRef>
+        </p:style>
+        <p:txBody>
+          <a:bodyPr rtlCol="0" anchor="ctr"/>
+          <a:lstStyle/>
+          <a:p>
+            <a:pPr algn="ctr"/>
+            <a:endParaRPr lang="en-DE"/>
+          </a:p>
+        </p:txBody>
+      </p:sp>
+      <p:sp>
+        <p:nvSpPr>
+          <p:cNvPr id="12" name="Textfeld 11">
+            <a:extLst>
+              <a:ext uri="{FF2B5EF4-FFF2-40B4-BE49-F238E27FC236}">
+                <a16:creationId xmlns:a16="http://schemas.microsoft.com/office/drawing/2014/main" id="{FEA3B881-3A3D-A1FF-00F9-9EEBCE827E22}"/>
+              </a:ext>
+            </a:extLst>
+          </p:cNvPr>
+          <p:cNvSpPr txBox="1"/>
+          <p:nvPr/>
+        </p:nvSpPr>
+        <p:spPr>
+          <a:xfrm>
+            <a:off x="6168008" y="1880211"/>
+            <a:ext cx="6539420" cy="3016210"/>
+          </a:xfrm>
+          <a:prstGeom prst="rect">
+            <a:avLst/>
+          </a:prstGeom>
+          <a:noFill/>
+        </p:spPr>
+        <p:txBody>
+          <a:bodyPr wrap="square" rtlCol="0">
+            <a:spAutoFit/>
+          </a:bodyPr>
+          <a:lstStyle/>
+          <a:p>
+            <a:pPr>
+              <a:lnSpc>
+                <a:spcPct val="150000"/>
+              </a:lnSpc>
+            </a:pPr>
+            <a:r>
+              <a:rPr lang="en-US" sz="2000" b="1" dirty="0"/>
+              <a:t>Problem:</a:t>
+            </a:r>
+          </a:p>
+          <a:p>
+            <a:pPr marL="285750" indent="-285750">
+              <a:lnSpc>
+                <a:spcPct val="150000"/>
+              </a:lnSpc>
+              <a:buFont typeface="Arial" panose="020B0604020202020204" pitchFamily="34" charset="0"/>
+              <a:buChar char="•"/>
+            </a:pPr>
+            <a:r>
+              <a:rPr lang="en-US" sz="2000" dirty="0" err="1"/>
+              <a:t>Schwache</a:t>
+            </a:r>
+            <a:r>
+              <a:rPr lang="en-US" sz="2000" dirty="0"/>
+              <a:t>, diffuse Muster</a:t>
+            </a:r>
+          </a:p>
+          <a:p>
+            <a:pPr marL="285750" indent="-285750">
+              <a:lnSpc>
+                <a:spcPct val="150000"/>
+              </a:lnSpc>
+              <a:buFont typeface="Arial" panose="020B0604020202020204" pitchFamily="34" charset="0"/>
+              <a:buChar char="•"/>
+            </a:pPr>
+            <a:r>
+              <a:rPr lang="en-US" sz="2000" dirty="0" err="1"/>
+              <a:t>Keine</a:t>
+            </a:r>
+            <a:r>
+              <a:rPr lang="en-US" sz="2000" dirty="0"/>
+              <a:t> </a:t>
+            </a:r>
+            <a:r>
+              <a:rPr lang="en-US" sz="2000" dirty="0" err="1"/>
+              <a:t>klare</a:t>
+            </a:r>
+            <a:r>
+              <a:rPr lang="en-US" sz="2000" dirty="0"/>
+              <a:t> </a:t>
+            </a:r>
+            <a:r>
+              <a:rPr lang="en-US" sz="2000" dirty="0" err="1"/>
+              <a:t>Objektfokussierung</a:t>
+            </a:r>
+            <a:endParaRPr lang="en-US" sz="2000" dirty="0"/>
+          </a:p>
+          <a:p>
+            <a:pPr marL="285750" indent="-285750">
+              <a:lnSpc>
+                <a:spcPct val="150000"/>
+              </a:lnSpc>
+              <a:buFont typeface="Arial" panose="020B0604020202020204" pitchFamily="34" charset="0"/>
+              <a:buChar char="•"/>
+            </a:pPr>
+            <a:r>
+              <a:rPr lang="en-US" sz="2000" dirty="0"/>
+              <a:t>Bei 32x32 Pixel </a:t>
+            </a:r>
+            <a:r>
+              <a:rPr lang="en-US" sz="2000" dirty="0" err="1"/>
+              <a:t>schwer</a:t>
+            </a:r>
+            <a:r>
+              <a:rPr lang="en-US" sz="2000" dirty="0"/>
+              <a:t> </a:t>
+            </a:r>
+            <a:r>
+              <a:rPr lang="en-US" sz="2000" dirty="0" err="1"/>
+              <a:t>interpretierbar</a:t>
+            </a:r>
+            <a:endParaRPr lang="en-US" sz="2000" dirty="0"/>
+          </a:p>
+          <a:p>
+            <a:pPr>
+              <a:lnSpc>
+                <a:spcPct val="150000"/>
+              </a:lnSpc>
+            </a:pPr>
+            <a:endParaRPr lang="en-US" sz="2000" dirty="0"/>
+          </a:p>
+          <a:p>
+            <a:r>
+              <a:rPr lang="en-US" sz="2000" b="1" dirty="0"/>
+              <a:t>Frage: </a:t>
+            </a:r>
+            <a:r>
+              <a:rPr lang="en-US" sz="2000" dirty="0"/>
+              <a:t>Lernt das Modell </a:t>
+            </a:r>
+            <a:r>
+              <a:rPr lang="en-US" sz="2000" dirty="0" err="1"/>
+              <a:t>überhaupt</a:t>
+            </a:r>
+            <a:r>
+              <a:rPr lang="en-US" sz="2000" dirty="0"/>
+              <a:t> </a:t>
+            </a:r>
+          </a:p>
+          <a:p>
+            <a:r>
+              <a:rPr lang="en-US" sz="2000" dirty="0" err="1"/>
+              <a:t>sinnvolle</a:t>
+            </a:r>
+            <a:r>
+              <a:rPr lang="en-US" sz="2000" dirty="0"/>
+              <a:t> Features?</a:t>
+            </a:r>
+            <a:endParaRPr lang="en-DE" sz="2000" dirty="0"/>
+          </a:p>
+        </p:txBody>
+      </p:sp>
+    </p:spTree>
+    <p:extLst>
+      <p:ext uri="{BB962C8B-B14F-4D97-AF65-F5344CB8AC3E}">
+        <p14:creationId xmlns:p14="http://schemas.microsoft.com/office/powerpoint/2010/main" val="2159623008"/>
+      </p:ext>
+    </p:extLst>
+  </p:cSld>
+  <p:clrMapOvr>
+    <a:masterClrMapping/>
+  </p:clrMapOvr>
+</p:sld>
+</file>
+
+<file path=ppt/slides/slide16.xml><?xml version="1.0" encoding="utf-8"?>
+<p:sld xmlns:a="http://schemas.openxmlformats.org/drawingml/2006/main" xmlns:r="http://schemas.openxmlformats.org/officeDocument/2006/relationships" xmlns:p="http://schemas.openxmlformats.org/presentationml/2006/main">
+  <p:cSld>
+    <p:spTree>
+      <p:nvGrpSpPr>
+        <p:cNvPr id="1" name=""/>
+        <p:cNvGrpSpPr/>
+        <p:nvPr/>
+      </p:nvGrpSpPr>
+      <p:grpSpPr>
+        <a:xfrm>
+          <a:off x="0" y="0"/>
+          <a:ext cx="0" cy="0"/>
+          <a:chOff x="0" y="0"/>
+          <a:chExt cx="0" cy="0"/>
+        </a:xfrm>
+      </p:grpSpPr>
+      <p:sp>
+        <p:nvSpPr>
+          <p:cNvPr id="2" name="Titel 1">
+            <a:extLst>
+              <a:ext uri="{FF2B5EF4-FFF2-40B4-BE49-F238E27FC236}">
+                <a16:creationId xmlns:a16="http://schemas.microsoft.com/office/drawing/2014/main" id="{587155F3-AA3E-4C56-08A4-78D1BD1A5112}"/>
+              </a:ext>
+            </a:extLst>
+          </p:cNvPr>
+          <p:cNvSpPr>
+            <a:spLocks noGrp="1"/>
+          </p:cNvSpPr>
+          <p:nvPr>
+            <p:ph type="title"/>
+          </p:nvPr>
+        </p:nvSpPr>
+        <p:spPr/>
+        <p:txBody>
+          <a:bodyPr/>
+          <a:lstStyle/>
+          <a:p>
+            <a:r>
+              <a:rPr lang="de-DE" dirty="0"/>
+              <a:t>Welche Kriterien nutzt das Model hauptsächlich zur Klassifizierung? - Hypothese</a:t>
+            </a:r>
+            <a:endParaRPr lang="en-DE" dirty="0"/>
+          </a:p>
+        </p:txBody>
+      </p:sp>
+      <p:sp>
+        <p:nvSpPr>
+          <p:cNvPr id="3" name="Inhaltsplatzhalter 2">
+            <a:extLst>
+              <a:ext uri="{FF2B5EF4-FFF2-40B4-BE49-F238E27FC236}">
+                <a16:creationId xmlns:a16="http://schemas.microsoft.com/office/drawing/2014/main" id="{066D8F7E-9892-560F-55B3-42CFAA2B9FB3}"/>
+              </a:ext>
+            </a:extLst>
+          </p:cNvPr>
+          <p:cNvSpPr>
+            <a:spLocks noGrp="1"/>
+          </p:cNvSpPr>
+          <p:nvPr>
+            <p:ph idx="1"/>
+          </p:nvPr>
+        </p:nvSpPr>
+        <p:spPr>
+          <a:xfrm>
+            <a:off x="695400" y="1556792"/>
+            <a:ext cx="10440600" cy="4779206"/>
+          </a:xfrm>
+        </p:spPr>
+        <p:txBody>
+          <a:bodyPr/>
+          <a:lstStyle/>
+          <a:p>
+            <a:r>
+              <a:rPr lang="en-US" b="1" dirty="0" err="1"/>
+              <a:t>Hypothese</a:t>
+            </a:r>
+            <a:r>
+              <a:rPr lang="en-US" b="1" dirty="0"/>
+              <a:t>:</a:t>
+            </a:r>
+            <a:r>
+              <a:rPr lang="en-US" dirty="0"/>
+              <a:t> “</a:t>
+            </a:r>
+            <a:r>
+              <a:rPr lang="de-DE" dirty="0"/>
+              <a:t>Das Modell erkennt </a:t>
+            </a:r>
+            <a:r>
+              <a:rPr lang="de-DE" dirty="0" err="1"/>
+              <a:t>Wildfire</a:t>
+            </a:r>
+            <a:r>
+              <a:rPr lang="de-DE" dirty="0"/>
+              <a:t>-Risiko </a:t>
+            </a:r>
+          </a:p>
+          <a:p>
+            <a:r>
+              <a:rPr lang="de-DE" dirty="0"/>
+              <a:t>über Trockenheits-Indikatoren in RGB-Daten</a:t>
+            </a:r>
+            <a:r>
+              <a:rPr lang="en-US" dirty="0"/>
+              <a:t>”</a:t>
+            </a:r>
+          </a:p>
+          <a:p>
+            <a:endParaRPr lang="en-US" dirty="0"/>
+          </a:p>
+          <a:p>
+            <a:r>
+              <a:rPr lang="en-US" b="1" dirty="0"/>
+              <a:t>Wildfire </a:t>
+            </a:r>
+            <a:r>
+              <a:rPr lang="en-US" b="1" dirty="0" err="1"/>
+              <a:t>Risiko</a:t>
+            </a:r>
+            <a:r>
+              <a:rPr lang="en-US" b="1" dirty="0"/>
+              <a:t>:</a:t>
+            </a:r>
+          </a:p>
+          <a:p>
+            <a:pPr marL="285750" indent="-285750">
+              <a:buFont typeface="Arial" panose="020B0604020202020204" pitchFamily="34" charset="0"/>
+              <a:buChar char="•"/>
+            </a:pPr>
+            <a:r>
+              <a:rPr lang="en-US" dirty="0" err="1"/>
+              <a:t>Dunklere</a:t>
+            </a:r>
+            <a:r>
+              <a:rPr lang="en-US" dirty="0"/>
+              <a:t> RGB-</a:t>
+            </a:r>
+            <a:r>
+              <a:rPr lang="en-US" dirty="0" err="1"/>
+              <a:t>Werte</a:t>
+            </a:r>
+            <a:endParaRPr lang="en-US" dirty="0"/>
+          </a:p>
+          <a:p>
+            <a:pPr marL="285750" indent="-285750">
+              <a:buFont typeface="Arial" panose="020B0604020202020204" pitchFamily="34" charset="0"/>
+              <a:buChar char="•"/>
+            </a:pPr>
+            <a:r>
+              <a:rPr lang="en-US" dirty="0" err="1"/>
+              <a:t>Gedämpftere</a:t>
+            </a:r>
+            <a:r>
+              <a:rPr lang="en-US" dirty="0"/>
+              <a:t> </a:t>
+            </a:r>
+            <a:r>
+              <a:rPr lang="en-US" dirty="0" err="1"/>
+              <a:t>Farbintensität</a:t>
+            </a:r>
+            <a:endParaRPr lang="en-US" dirty="0"/>
+          </a:p>
+          <a:p>
+            <a:r>
+              <a:rPr lang="en-DE" dirty="0"/>
+              <a:t>⇒</a:t>
+            </a:r>
+            <a:r>
+              <a:rPr lang="en-US" dirty="0"/>
+              <a:t> </a:t>
+            </a:r>
+            <a:r>
+              <a:rPr lang="en-US" dirty="0" err="1"/>
+              <a:t>ausgetrocknete</a:t>
+            </a:r>
+            <a:r>
+              <a:rPr lang="en-US" dirty="0"/>
+              <a:t> Vegetation</a:t>
+            </a:r>
+          </a:p>
+          <a:p>
+            <a:endParaRPr lang="en-US" dirty="0"/>
+          </a:p>
+          <a:p>
+            <a:r>
+              <a:rPr lang="en-US" b="1" dirty="0"/>
+              <a:t>No-Wildfire </a:t>
+            </a:r>
+            <a:r>
+              <a:rPr lang="en-US" b="1" dirty="0" err="1"/>
+              <a:t>Gebiete</a:t>
+            </a:r>
+            <a:r>
+              <a:rPr lang="en-US" b="1" dirty="0"/>
+              <a:t>:</a:t>
+            </a:r>
+          </a:p>
+          <a:p>
+            <a:pPr marL="285750" indent="-285750">
+              <a:buFont typeface="Arial" panose="020B0604020202020204" pitchFamily="34" charset="0"/>
+              <a:buChar char="•"/>
+            </a:pPr>
+            <a:r>
+              <a:rPr lang="en-US" dirty="0" err="1"/>
+              <a:t>Hellere</a:t>
+            </a:r>
+            <a:r>
+              <a:rPr lang="en-US" dirty="0"/>
+              <a:t> RGB-</a:t>
+            </a:r>
+            <a:r>
+              <a:rPr lang="en-US" dirty="0" err="1"/>
+              <a:t>Werte</a:t>
+            </a:r>
+            <a:endParaRPr lang="en-US" dirty="0"/>
+          </a:p>
+          <a:p>
+            <a:pPr marL="285750" indent="-285750">
+              <a:buFont typeface="Arial" panose="020B0604020202020204" pitchFamily="34" charset="0"/>
+              <a:buChar char="•"/>
+            </a:pPr>
+            <a:r>
+              <a:rPr lang="en-US" dirty="0" err="1"/>
+              <a:t>Intensivere</a:t>
+            </a:r>
+            <a:r>
+              <a:rPr lang="en-US" dirty="0"/>
+              <a:t> Farben</a:t>
+            </a:r>
+          </a:p>
+          <a:p>
+            <a:r>
+              <a:rPr lang="en-DE" dirty="0"/>
+              <a:t>⇒</a:t>
+            </a:r>
+            <a:r>
+              <a:rPr lang="en-US" dirty="0"/>
+              <a:t> </a:t>
+            </a:r>
+            <a:r>
+              <a:rPr lang="en-US" dirty="0" err="1"/>
+              <a:t>gesunde</a:t>
+            </a:r>
+            <a:r>
+              <a:rPr lang="en-US" dirty="0"/>
+              <a:t>, </a:t>
+            </a:r>
+            <a:r>
+              <a:rPr lang="en-US" dirty="0" err="1"/>
+              <a:t>wasserreiche</a:t>
+            </a:r>
+            <a:r>
+              <a:rPr lang="en-US" dirty="0"/>
+              <a:t> Vegetation</a:t>
+            </a:r>
+          </a:p>
+        </p:txBody>
+      </p:sp>
+      <p:sp>
+        <p:nvSpPr>
+          <p:cNvPr id="4" name="Fußzeilenplatzhalter 3">
+            <a:extLst>
+              <a:ext uri="{FF2B5EF4-FFF2-40B4-BE49-F238E27FC236}">
+                <a16:creationId xmlns:a16="http://schemas.microsoft.com/office/drawing/2014/main" id="{E16FEBEC-2DEE-B103-30EE-EFBD29CA096D}"/>
+              </a:ext>
+            </a:extLst>
+          </p:cNvPr>
+          <p:cNvSpPr>
+            <a:spLocks noGrp="1"/>
+          </p:cNvSpPr>
+          <p:nvPr>
+            <p:ph type="ftr" sz="quarter" idx="3"/>
+          </p:nvPr>
+        </p:nvSpPr>
+        <p:spPr/>
+        <p:txBody>
+          <a:bodyPr/>
+          <a:lstStyle/>
+          <a:p>
+            <a:pPr>
+              <a:defRPr/>
+            </a:pPr>
+            <a:r>
+              <a:rPr lang="de-DE"/>
+              <a:t>Titel des Projekts | Nachnamen der Autoren einfügen</a:t>
+            </a:r>
+            <a:endParaRPr lang="de-DE" dirty="0"/>
+          </a:p>
+        </p:txBody>
+      </p:sp>
+      <p:sp>
+        <p:nvSpPr>
+          <p:cNvPr id="5" name="Foliennummernplatzhalter 4">
+            <a:extLst>
+              <a:ext uri="{FF2B5EF4-FFF2-40B4-BE49-F238E27FC236}">
+                <a16:creationId xmlns:a16="http://schemas.microsoft.com/office/drawing/2014/main" id="{2D7CB488-D52D-4719-984D-1D643EA27EEF}"/>
+              </a:ext>
+            </a:extLst>
+          </p:cNvPr>
+          <p:cNvSpPr>
+            <a:spLocks noGrp="1"/>
+          </p:cNvSpPr>
+          <p:nvPr>
+            <p:ph type="sldNum" sz="quarter" idx="4"/>
+          </p:nvPr>
+        </p:nvSpPr>
+        <p:spPr/>
+        <p:txBody>
+          <a:bodyPr/>
+          <a:lstStyle/>
+          <a:p>
+            <a:fld id="{029DE7E0-E051-4C03-AF53-7018E0F7EF0C}" type="slidenum">
+              <a:rPr lang="de-DE" altLang="de-DE" smtClean="0"/>
+              <a:pPr/>
+              <a:t>16</a:t>
+            </a:fld>
+            <a:endParaRPr lang="de-DE" altLang="de-DE"/>
+          </a:p>
+        </p:txBody>
+      </p:sp>
+      <p:sp>
+        <p:nvSpPr>
+          <p:cNvPr id="6" name="Textfeld 5">
+            <a:extLst>
+              <a:ext uri="{FF2B5EF4-FFF2-40B4-BE49-F238E27FC236}">
+                <a16:creationId xmlns:a16="http://schemas.microsoft.com/office/drawing/2014/main" id="{78E44BE2-1523-3DC9-F8C7-9A8F11390424}"/>
+              </a:ext>
+            </a:extLst>
+          </p:cNvPr>
+          <p:cNvSpPr txBox="1"/>
+          <p:nvPr/>
+        </p:nvSpPr>
+        <p:spPr>
+          <a:xfrm>
+            <a:off x="7317689" y="2529770"/>
+            <a:ext cx="3600400" cy="646331"/>
+          </a:xfrm>
+          <a:prstGeom prst="rect">
+            <a:avLst/>
+          </a:prstGeom>
+          <a:noFill/>
+        </p:spPr>
+        <p:txBody>
+          <a:bodyPr wrap="square" rtlCol="0">
+            <a:spAutoFit/>
+          </a:bodyPr>
+          <a:lstStyle/>
+          <a:p>
+            <a:r>
+              <a:rPr lang="de-DE" b="1" dirty="0"/>
+              <a:t>Erster Experimenteller Test: </a:t>
+            </a:r>
+          </a:p>
+          <a:p>
+            <a:r>
+              <a:rPr lang="de-DE" dirty="0"/>
+              <a:t>CNN vs. Einfaches Farbmodell</a:t>
+            </a:r>
+            <a:endParaRPr lang="en-DE" dirty="0"/>
+          </a:p>
+        </p:txBody>
+      </p:sp>
+      <p:pic>
+        <p:nvPicPr>
+          <p:cNvPr id="8" name="Grafik 7">
+            <a:extLst>
+              <a:ext uri="{FF2B5EF4-FFF2-40B4-BE49-F238E27FC236}">
+                <a16:creationId xmlns:a16="http://schemas.microsoft.com/office/drawing/2014/main" id="{054651A8-4720-135C-2FDD-C0CD6CEE730A}"/>
+              </a:ext>
+            </a:extLst>
+          </p:cNvPr>
+          <p:cNvPicPr>
+            <a:picLocks noChangeAspect="1"/>
+          </p:cNvPicPr>
+          <p:nvPr/>
+        </p:nvPicPr>
+        <p:blipFill>
+          <a:blip r:embed="rId2">
+            <a:extLst>
+              <a:ext uri="{28A0092B-C50C-407E-A947-70E740481C1C}">
+                <a14:useLocalDpi xmlns:a14="http://schemas.microsoft.com/office/drawing/2010/main" val="0"/>
+              </a:ext>
+            </a:extLst>
+          </a:blip>
+          <a:stretch>
+            <a:fillRect/>
+          </a:stretch>
+        </p:blipFill>
+        <p:spPr>
+          <a:xfrm>
+            <a:off x="7176120" y="3140968"/>
+            <a:ext cx="4173457" cy="1582435"/>
+          </a:xfrm>
+          <a:prstGeom prst="rect">
+            <a:avLst/>
+          </a:prstGeom>
+        </p:spPr>
+      </p:pic>
+      <p:sp>
+        <p:nvSpPr>
+          <p:cNvPr id="9" name="Textfeld 8">
+            <a:extLst>
+              <a:ext uri="{FF2B5EF4-FFF2-40B4-BE49-F238E27FC236}">
+                <a16:creationId xmlns:a16="http://schemas.microsoft.com/office/drawing/2014/main" id="{E23DAE58-DB2E-16E7-A192-25C4DF45FECB}"/>
+              </a:ext>
+            </a:extLst>
+          </p:cNvPr>
+          <p:cNvSpPr txBox="1"/>
+          <p:nvPr/>
+        </p:nvSpPr>
+        <p:spPr>
+          <a:xfrm>
+            <a:off x="7320136" y="4797152"/>
+            <a:ext cx="3744416" cy="646331"/>
+          </a:xfrm>
+          <a:prstGeom prst="rect">
+            <a:avLst/>
+          </a:prstGeom>
+          <a:noFill/>
+        </p:spPr>
+        <p:txBody>
+          <a:bodyPr wrap="square" rtlCol="0">
+            <a:spAutoFit/>
+          </a:bodyPr>
+          <a:lstStyle/>
+          <a:p>
+            <a:r>
+              <a:rPr lang="en-DE" dirty="0"/>
+              <a:t>⇒</a:t>
+            </a:r>
+            <a:r>
+              <a:rPr lang="en-US" dirty="0"/>
+              <a:t> Farben </a:t>
+            </a:r>
+            <a:r>
+              <a:rPr lang="en-US" dirty="0" err="1"/>
+              <a:t>scheinen</a:t>
+            </a:r>
+            <a:r>
+              <a:rPr lang="en-US" dirty="0"/>
+              <a:t> </a:t>
+            </a:r>
+            <a:r>
+              <a:rPr lang="en-US" dirty="0" err="1"/>
+              <a:t>wichtige</a:t>
+            </a:r>
+            <a:r>
+              <a:rPr lang="en-US" dirty="0"/>
+              <a:t> </a:t>
+            </a:r>
+            <a:r>
+              <a:rPr lang="en-US" dirty="0" err="1"/>
+              <a:t>Entscheidungskriterien</a:t>
+            </a:r>
+            <a:r>
+              <a:rPr lang="en-US" dirty="0"/>
+              <a:t> </a:t>
+            </a:r>
+            <a:r>
+              <a:rPr lang="en-US" dirty="0" err="1"/>
+              <a:t>zu</a:t>
+            </a:r>
+            <a:r>
+              <a:rPr lang="en-US" dirty="0"/>
+              <a:t> sein</a:t>
+            </a:r>
+            <a:endParaRPr lang="en-DE" dirty="0"/>
+          </a:p>
+        </p:txBody>
+      </p:sp>
+    </p:spTree>
+    <p:extLst>
+      <p:ext uri="{BB962C8B-B14F-4D97-AF65-F5344CB8AC3E}">
+        <p14:creationId xmlns:p14="http://schemas.microsoft.com/office/powerpoint/2010/main" val="3654420089"/>
+      </p:ext>
+    </p:extLst>
+  </p:cSld>
+  <p:clrMapOvr>
+    <a:masterClrMapping/>
+  </p:clrMapOvr>
+</p:sld>
+</file>
+
+<file path=ppt/slides/slide17.xml><?xml version="1.0" encoding="utf-8"?>
+<p:sld xmlns:a="http://schemas.openxmlformats.org/drawingml/2006/main" xmlns:r="http://schemas.openxmlformats.org/officeDocument/2006/relationships" xmlns:p="http://schemas.openxmlformats.org/presentationml/2006/main">
+  <p:cSld>
+    <p:spTree>
+      <p:nvGrpSpPr>
+        <p:cNvPr id="1" name=""/>
+        <p:cNvGrpSpPr/>
+        <p:nvPr/>
+      </p:nvGrpSpPr>
+      <p:grpSpPr>
+        <a:xfrm>
+          <a:off x="0" y="0"/>
+          <a:ext cx="0" cy="0"/>
+          <a:chOff x="0" y="0"/>
+          <a:chExt cx="0" cy="0"/>
+        </a:xfrm>
+      </p:grpSpPr>
+      <p:sp>
+        <p:nvSpPr>
+          <p:cNvPr id="2" name="Titel 1">
+            <a:extLst>
+              <a:ext uri="{FF2B5EF4-FFF2-40B4-BE49-F238E27FC236}">
+                <a16:creationId xmlns:a16="http://schemas.microsoft.com/office/drawing/2014/main" id="{DA0AED7F-2FF9-66C3-762E-C901F62D9470}"/>
+              </a:ext>
+            </a:extLst>
+          </p:cNvPr>
+          <p:cNvSpPr>
+            <a:spLocks noGrp="1"/>
+          </p:cNvSpPr>
+          <p:nvPr>
+            <p:ph type="title"/>
+          </p:nvPr>
+        </p:nvSpPr>
+        <p:spPr/>
+        <p:txBody>
+          <a:bodyPr/>
+          <a:lstStyle/>
+          <a:p>
+            <a:r>
+              <a:rPr lang="de-DE" dirty="0"/>
+              <a:t>Welche Kriterien nutzt das Model hauptsächlich zur Klassifizierung? – Feature Analyse</a:t>
+            </a:r>
+            <a:endParaRPr lang="en-DE" dirty="0"/>
+          </a:p>
+        </p:txBody>
+      </p:sp>
+      <p:pic>
+        <p:nvPicPr>
+          <p:cNvPr id="7" name="Inhaltsplatzhalter 6">
+            <a:extLst>
+              <a:ext uri="{FF2B5EF4-FFF2-40B4-BE49-F238E27FC236}">
+                <a16:creationId xmlns:a16="http://schemas.microsoft.com/office/drawing/2014/main" id="{CE72601E-7B95-305B-6F37-BA07CD692F4D}"/>
+              </a:ext>
+            </a:extLst>
+          </p:cNvPr>
+          <p:cNvPicPr>
+            <a:picLocks noGrp="1" noChangeAspect="1"/>
+          </p:cNvPicPr>
+          <p:nvPr>
+            <p:ph idx="1"/>
+          </p:nvPr>
+        </p:nvPicPr>
+        <p:blipFill>
+          <a:blip r:embed="rId2">
+            <a:extLst>
+              <a:ext uri="{28A0092B-C50C-407E-A947-70E740481C1C}">
+                <a14:useLocalDpi xmlns:a14="http://schemas.microsoft.com/office/drawing/2010/main" val="0"/>
+              </a:ext>
+            </a:extLst>
+          </a:blip>
+          <a:stretch>
+            <a:fillRect/>
+          </a:stretch>
+        </p:blipFill>
+        <p:spPr>
+          <a:xfrm>
+            <a:off x="433634" y="1558782"/>
+            <a:ext cx="5726601" cy="3888432"/>
+          </a:xfrm>
+        </p:spPr>
+      </p:pic>
+      <p:sp>
+        <p:nvSpPr>
+          <p:cNvPr id="4" name="Fußzeilenplatzhalter 3">
+            <a:extLst>
+              <a:ext uri="{FF2B5EF4-FFF2-40B4-BE49-F238E27FC236}">
+                <a16:creationId xmlns:a16="http://schemas.microsoft.com/office/drawing/2014/main" id="{5FCD0DF9-4E62-35E1-54BA-72D6610D9562}"/>
+              </a:ext>
+            </a:extLst>
+          </p:cNvPr>
+          <p:cNvSpPr>
+            <a:spLocks noGrp="1"/>
+          </p:cNvSpPr>
+          <p:nvPr>
+            <p:ph type="ftr" sz="quarter" idx="3"/>
+          </p:nvPr>
+        </p:nvSpPr>
+        <p:spPr/>
+        <p:txBody>
+          <a:bodyPr/>
+          <a:lstStyle/>
+          <a:p>
+            <a:pPr>
+              <a:defRPr/>
+            </a:pPr>
+            <a:r>
+              <a:rPr lang="de-DE"/>
+              <a:t>Titel des Projekts | Nachnamen der Autoren einfügen</a:t>
+            </a:r>
+            <a:endParaRPr lang="de-DE" dirty="0"/>
+          </a:p>
+        </p:txBody>
+      </p:sp>
+      <p:sp>
+        <p:nvSpPr>
+          <p:cNvPr id="5" name="Foliennummernplatzhalter 4">
+            <a:extLst>
+              <a:ext uri="{FF2B5EF4-FFF2-40B4-BE49-F238E27FC236}">
+                <a16:creationId xmlns:a16="http://schemas.microsoft.com/office/drawing/2014/main" id="{B848AEA1-184A-7CA0-36D0-C3591AC2E798}"/>
+              </a:ext>
+            </a:extLst>
+          </p:cNvPr>
+          <p:cNvSpPr>
+            <a:spLocks noGrp="1"/>
+          </p:cNvSpPr>
+          <p:nvPr>
+            <p:ph type="sldNum" sz="quarter" idx="4"/>
+          </p:nvPr>
+        </p:nvSpPr>
+        <p:spPr/>
+        <p:txBody>
+          <a:bodyPr/>
+          <a:lstStyle/>
+          <a:p>
+            <a:fld id="{029DE7E0-E051-4C03-AF53-7018E0F7EF0C}" type="slidenum">
+              <a:rPr lang="de-DE" altLang="de-DE" smtClean="0"/>
+              <a:pPr/>
+              <a:t>17</a:t>
+            </a:fld>
+            <a:endParaRPr lang="de-DE" altLang="de-DE"/>
+          </a:p>
+        </p:txBody>
+      </p:sp>
+      <p:sp>
+        <p:nvSpPr>
+          <p:cNvPr id="8" name="Textfeld 7">
+            <a:extLst>
+              <a:ext uri="{FF2B5EF4-FFF2-40B4-BE49-F238E27FC236}">
+                <a16:creationId xmlns:a16="http://schemas.microsoft.com/office/drawing/2014/main" id="{10565672-E126-8741-625D-05FF5B440B10}"/>
+              </a:ext>
+            </a:extLst>
+          </p:cNvPr>
+          <p:cNvSpPr txBox="1"/>
+          <p:nvPr/>
+        </p:nvSpPr>
+        <p:spPr>
+          <a:xfrm>
+            <a:off x="6719265" y="2204864"/>
+            <a:ext cx="5039101" cy="2343655"/>
+          </a:xfrm>
+          <a:prstGeom prst="rect">
+            <a:avLst/>
+          </a:prstGeom>
+          <a:noFill/>
+        </p:spPr>
+        <p:txBody>
+          <a:bodyPr wrap="square" rtlCol="0">
+            <a:spAutoFit/>
+          </a:bodyPr>
+          <a:lstStyle/>
+          <a:p>
+            <a:pPr>
+              <a:lnSpc>
+                <a:spcPct val="150000"/>
+              </a:lnSpc>
+            </a:pPr>
+            <a:r>
+              <a:rPr lang="en-US" sz="2000" b="1" dirty="0"/>
+              <a:t>Was </a:t>
+            </a:r>
+            <a:r>
+              <a:rPr lang="en-US" sz="2000" b="1" dirty="0" err="1"/>
+              <a:t>zeigt</a:t>
+            </a:r>
+            <a:r>
+              <a:rPr lang="en-US" sz="2000" b="1" dirty="0"/>
+              <a:t> </a:t>
+            </a:r>
+            <a:r>
+              <a:rPr lang="en-US" sz="2000" b="1" dirty="0" err="1"/>
+              <a:t>uns</a:t>
+            </a:r>
+            <a:r>
+              <a:rPr lang="en-US" sz="2000" b="1" dirty="0"/>
+              <a:t> die </a:t>
+            </a:r>
+            <a:r>
+              <a:rPr lang="en-US" sz="2000" b="1" dirty="0" err="1"/>
+              <a:t>Analyse</a:t>
+            </a:r>
+            <a:r>
+              <a:rPr lang="en-US" sz="2000" b="1" dirty="0"/>
+              <a:t>?</a:t>
+            </a:r>
+          </a:p>
+          <a:p>
+            <a:pPr marL="285750" indent="-285750">
+              <a:lnSpc>
+                <a:spcPct val="150000"/>
+              </a:lnSpc>
+              <a:buFont typeface="Arial" panose="020B0604020202020204" pitchFamily="34" charset="0"/>
+              <a:buChar char="•"/>
+            </a:pPr>
+            <a:r>
+              <a:rPr lang="en-US" sz="2000" dirty="0" err="1"/>
+              <a:t>Farbfeatures</a:t>
+            </a:r>
+            <a:r>
+              <a:rPr lang="en-US" sz="2000" dirty="0"/>
+              <a:t> </a:t>
+            </a:r>
+            <a:r>
+              <a:rPr lang="en-US" sz="2000" dirty="0" err="1"/>
+              <a:t>dominieren</a:t>
+            </a:r>
+            <a:r>
+              <a:rPr lang="en-US" sz="2000" dirty="0"/>
+              <a:t> die </a:t>
+            </a:r>
+            <a:r>
+              <a:rPr lang="en-US" sz="2000" dirty="0" err="1"/>
+              <a:t>Klassifikation</a:t>
+            </a:r>
+            <a:endParaRPr lang="en-US" sz="2000" dirty="0"/>
+          </a:p>
+          <a:p>
+            <a:pPr marL="285750" indent="-285750">
+              <a:lnSpc>
+                <a:spcPct val="150000"/>
+              </a:lnSpc>
+              <a:buFont typeface="Arial" panose="020B0604020202020204" pitchFamily="34" charset="0"/>
+              <a:buChar char="•"/>
+            </a:pPr>
+            <a:r>
+              <a:rPr lang="en-US" sz="2000" dirty="0"/>
+              <a:t>Rot </a:t>
+            </a:r>
+            <a:r>
+              <a:rPr lang="en-US" sz="2000" dirty="0" err="1"/>
+              <a:t>Mittelwert</a:t>
+            </a:r>
+            <a:r>
+              <a:rPr lang="en-US" sz="2000" dirty="0"/>
+              <a:t> das </a:t>
+            </a:r>
+            <a:r>
+              <a:rPr lang="en-US" sz="2000" dirty="0" err="1"/>
+              <a:t>wichtigste</a:t>
+            </a:r>
+            <a:r>
+              <a:rPr lang="en-US" sz="2000" dirty="0"/>
+              <a:t> Feature, </a:t>
+            </a:r>
+            <a:r>
+              <a:rPr lang="en-US" sz="2000" dirty="0" err="1"/>
+              <a:t>gefolgt</a:t>
+            </a:r>
+            <a:r>
+              <a:rPr lang="en-US" sz="2000" dirty="0"/>
+              <a:t> von Blau </a:t>
+            </a:r>
+            <a:r>
+              <a:rPr lang="en-US" sz="2000" dirty="0" err="1"/>
+              <a:t>basierten</a:t>
+            </a:r>
+            <a:r>
+              <a:rPr lang="en-US" sz="2000" dirty="0"/>
+              <a:t> Features</a:t>
+            </a:r>
+            <a:endParaRPr lang="en-DE" sz="2000" dirty="0"/>
+          </a:p>
+        </p:txBody>
+      </p:sp>
+      <p:sp>
+        <p:nvSpPr>
+          <p:cNvPr id="9" name="Textfeld 8">
+            <a:extLst>
+              <a:ext uri="{FF2B5EF4-FFF2-40B4-BE49-F238E27FC236}">
+                <a16:creationId xmlns:a16="http://schemas.microsoft.com/office/drawing/2014/main" id="{3140CF40-AECC-A9CB-8384-46E8A09E669C}"/>
+              </a:ext>
+            </a:extLst>
+          </p:cNvPr>
+          <p:cNvSpPr txBox="1"/>
+          <p:nvPr/>
+        </p:nvSpPr>
+        <p:spPr>
+          <a:xfrm>
+            <a:off x="695400" y="5589240"/>
+            <a:ext cx="6192689" cy="646331"/>
+          </a:xfrm>
+          <a:prstGeom prst="rect">
+            <a:avLst/>
+          </a:prstGeom>
+          <a:noFill/>
+        </p:spPr>
+        <p:txBody>
+          <a:bodyPr wrap="square" rtlCol="0">
+            <a:spAutoFit/>
+          </a:bodyPr>
+          <a:lstStyle/>
+          <a:p>
+            <a:r>
+              <a:rPr lang="en-US" u="sng" dirty="0"/>
+              <a:t>Positive </a:t>
+            </a:r>
+            <a:r>
+              <a:rPr lang="en-US" u="sng" dirty="0" err="1"/>
+              <a:t>Werte</a:t>
+            </a:r>
+            <a:r>
+              <a:rPr lang="en-US" u="sng" dirty="0"/>
+              <a:t> </a:t>
+            </a:r>
+            <a:r>
+              <a:rPr lang="en-US" dirty="0"/>
+              <a:t>= </a:t>
+            </a:r>
+            <a:r>
+              <a:rPr lang="en-US" dirty="0" err="1"/>
+              <a:t>erhöhte</a:t>
+            </a:r>
+            <a:r>
+              <a:rPr lang="en-US" dirty="0"/>
+              <a:t> Wildfire </a:t>
+            </a:r>
+            <a:r>
+              <a:rPr lang="en-US" dirty="0" err="1"/>
+              <a:t>Wahrscheinlichkeit</a:t>
+            </a:r>
+            <a:endParaRPr lang="en-US" dirty="0"/>
+          </a:p>
+          <a:p>
+            <a:r>
+              <a:rPr lang="en-US" u="sng" dirty="0"/>
+              <a:t>Negative </a:t>
+            </a:r>
+            <a:r>
+              <a:rPr lang="en-US" u="sng" dirty="0" err="1"/>
+              <a:t>Werte</a:t>
+            </a:r>
+            <a:r>
+              <a:rPr lang="en-US" u="sng" dirty="0"/>
+              <a:t> </a:t>
+            </a:r>
+            <a:r>
+              <a:rPr lang="en-US" dirty="0"/>
+              <a:t>= </a:t>
+            </a:r>
+            <a:r>
+              <a:rPr lang="en-US" dirty="0" err="1"/>
+              <a:t>reduzierte</a:t>
+            </a:r>
+            <a:r>
+              <a:rPr lang="en-US" dirty="0"/>
+              <a:t> Wildfire </a:t>
+            </a:r>
+            <a:r>
+              <a:rPr lang="en-US" dirty="0" err="1"/>
+              <a:t>Wahrscheinlichkeit</a:t>
+            </a:r>
+            <a:endParaRPr lang="en-DE" dirty="0"/>
+          </a:p>
+        </p:txBody>
+      </p:sp>
+    </p:spTree>
+    <p:extLst>
+      <p:ext uri="{BB962C8B-B14F-4D97-AF65-F5344CB8AC3E}">
+        <p14:creationId xmlns:p14="http://schemas.microsoft.com/office/powerpoint/2010/main" val="915341297"/>
+      </p:ext>
+    </p:extLst>
+  </p:cSld>
+  <p:clrMapOvr>
+    <a:masterClrMapping/>
+  </p:clrMapOvr>
+</p:sld>
+</file>
+
+<file path=ppt/slides/slide18.xml><?xml version="1.0" encoding="utf-8"?>
+<p:sld xmlns:a="http://schemas.openxmlformats.org/drawingml/2006/main" xmlns:r="http://schemas.openxmlformats.org/officeDocument/2006/relationships" xmlns:p="http://schemas.openxmlformats.org/presentationml/2006/main">
+  <p:cSld>
+    <p:spTree>
+      <p:nvGrpSpPr>
+        <p:cNvPr id="1" name=""/>
+        <p:cNvGrpSpPr/>
+        <p:nvPr/>
+      </p:nvGrpSpPr>
+      <p:grpSpPr>
+        <a:xfrm>
+          <a:off x="0" y="0"/>
+          <a:ext cx="0" cy="0"/>
+          <a:chOff x="0" y="0"/>
+          <a:chExt cx="0" cy="0"/>
+        </a:xfrm>
+      </p:grpSpPr>
+      <p:sp>
+        <p:nvSpPr>
+          <p:cNvPr id="2" name="Titel 1">
+            <a:extLst>
+              <a:ext uri="{FF2B5EF4-FFF2-40B4-BE49-F238E27FC236}">
+                <a16:creationId xmlns:a16="http://schemas.microsoft.com/office/drawing/2014/main" id="{6188F99A-4FA3-101A-D43B-60A9A7EE47C8}"/>
+              </a:ext>
+            </a:extLst>
+          </p:cNvPr>
+          <p:cNvSpPr>
+            <a:spLocks noGrp="1"/>
+          </p:cNvSpPr>
+          <p:nvPr>
+            <p:ph type="title"/>
+          </p:nvPr>
+        </p:nvSpPr>
+        <p:spPr/>
+        <p:txBody>
+          <a:bodyPr/>
+          <a:lstStyle/>
+          <a:p>
+            <a:r>
+              <a:rPr lang="de-DE" dirty="0"/>
+              <a:t>Welche Kriterien nutzt das Model hauptsächlich zur Klassifizierung? – </a:t>
+            </a:r>
+            <a:r>
+              <a:rPr lang="en-US" dirty="0"/>
+              <a:t>RGB-</a:t>
+            </a:r>
+            <a:r>
+              <a:rPr lang="en-US" dirty="0" err="1"/>
+              <a:t>Kanäle</a:t>
+            </a:r>
+            <a:r>
+              <a:rPr lang="en-US" dirty="0"/>
+              <a:t> </a:t>
+            </a:r>
+            <a:r>
+              <a:rPr lang="en-US" dirty="0" err="1"/>
+              <a:t>Detailanalyse</a:t>
+            </a:r>
+            <a:endParaRPr lang="en-DE" dirty="0"/>
+          </a:p>
+        </p:txBody>
+      </p:sp>
+      <p:pic>
+        <p:nvPicPr>
+          <p:cNvPr id="7" name="Inhaltsplatzhalter 6">
+            <a:extLst>
+              <a:ext uri="{FF2B5EF4-FFF2-40B4-BE49-F238E27FC236}">
+                <a16:creationId xmlns:a16="http://schemas.microsoft.com/office/drawing/2014/main" id="{8036BF37-DEB3-C012-0DB6-795A564FABA7}"/>
+              </a:ext>
+            </a:extLst>
+          </p:cNvPr>
+          <p:cNvPicPr>
+            <a:picLocks noGrp="1" noChangeAspect="1"/>
+          </p:cNvPicPr>
+          <p:nvPr>
+            <p:ph idx="1"/>
+          </p:nvPr>
+        </p:nvPicPr>
+        <p:blipFill>
+          <a:blip r:embed="rId3">
+            <a:extLst>
+              <a:ext uri="{28A0092B-C50C-407E-A947-70E740481C1C}">
+                <a14:useLocalDpi xmlns:a14="http://schemas.microsoft.com/office/drawing/2010/main" val="0"/>
+              </a:ext>
+            </a:extLst>
+          </a:blip>
+          <a:stretch>
+            <a:fillRect/>
+          </a:stretch>
+        </p:blipFill>
+        <p:spPr>
+          <a:xfrm>
+            <a:off x="767408" y="1340768"/>
+            <a:ext cx="10176321" cy="3364385"/>
+          </a:xfrm>
+        </p:spPr>
+      </p:pic>
+      <p:sp>
+        <p:nvSpPr>
+          <p:cNvPr id="4" name="Fußzeilenplatzhalter 3">
+            <a:extLst>
+              <a:ext uri="{FF2B5EF4-FFF2-40B4-BE49-F238E27FC236}">
+                <a16:creationId xmlns:a16="http://schemas.microsoft.com/office/drawing/2014/main" id="{7B4A52B2-FFF4-8DA8-0103-1CAA18DB3116}"/>
+              </a:ext>
+            </a:extLst>
+          </p:cNvPr>
+          <p:cNvSpPr>
+            <a:spLocks noGrp="1"/>
+          </p:cNvSpPr>
+          <p:nvPr>
+            <p:ph type="ftr" sz="quarter" idx="3"/>
+          </p:nvPr>
+        </p:nvSpPr>
+        <p:spPr/>
+        <p:txBody>
+          <a:bodyPr/>
+          <a:lstStyle/>
+          <a:p>
+            <a:pPr>
+              <a:defRPr/>
+            </a:pPr>
+            <a:r>
+              <a:rPr lang="de-DE"/>
+              <a:t>Titel des Projekts | Nachnamen der Autoren einfügen</a:t>
+            </a:r>
+            <a:endParaRPr lang="de-DE" dirty="0"/>
+          </a:p>
+        </p:txBody>
+      </p:sp>
+      <p:sp>
+        <p:nvSpPr>
+          <p:cNvPr id="5" name="Foliennummernplatzhalter 4">
+            <a:extLst>
+              <a:ext uri="{FF2B5EF4-FFF2-40B4-BE49-F238E27FC236}">
+                <a16:creationId xmlns:a16="http://schemas.microsoft.com/office/drawing/2014/main" id="{125B148E-4600-ABD9-FC23-EA35479EEE11}"/>
+              </a:ext>
+            </a:extLst>
+          </p:cNvPr>
+          <p:cNvSpPr>
+            <a:spLocks noGrp="1"/>
+          </p:cNvSpPr>
+          <p:nvPr>
+            <p:ph type="sldNum" sz="quarter" idx="4"/>
+          </p:nvPr>
+        </p:nvSpPr>
+        <p:spPr/>
+        <p:txBody>
+          <a:bodyPr/>
+          <a:lstStyle/>
+          <a:p>
+            <a:fld id="{029DE7E0-E051-4C03-AF53-7018E0F7EF0C}" type="slidenum">
+              <a:rPr lang="de-DE" altLang="de-DE" smtClean="0"/>
+              <a:pPr/>
+              <a:t>18</a:t>
+            </a:fld>
+            <a:endParaRPr lang="de-DE" altLang="de-DE"/>
+          </a:p>
+        </p:txBody>
+      </p:sp>
+      <p:sp>
+        <p:nvSpPr>
+          <p:cNvPr id="8" name="Textfeld 7">
+            <a:extLst>
+              <a:ext uri="{FF2B5EF4-FFF2-40B4-BE49-F238E27FC236}">
+                <a16:creationId xmlns:a16="http://schemas.microsoft.com/office/drawing/2014/main" id="{8797DF71-DE75-D708-358E-10C2A3B37816}"/>
+              </a:ext>
+            </a:extLst>
+          </p:cNvPr>
+          <p:cNvSpPr txBox="1"/>
+          <p:nvPr/>
+        </p:nvSpPr>
+        <p:spPr>
+          <a:xfrm>
+            <a:off x="2855640" y="4797152"/>
+            <a:ext cx="7416824" cy="1287532"/>
+          </a:xfrm>
+          <a:prstGeom prst="rect">
+            <a:avLst/>
+          </a:prstGeom>
+          <a:noFill/>
+        </p:spPr>
+        <p:txBody>
+          <a:bodyPr wrap="square" rtlCol="0">
+            <a:spAutoFit/>
+          </a:bodyPr>
+          <a:lstStyle/>
+          <a:p>
+            <a:pPr marL="285750" indent="-285750">
+              <a:lnSpc>
+                <a:spcPct val="150000"/>
+              </a:lnSpc>
+              <a:buFont typeface="Arial" panose="020B0604020202020204" pitchFamily="34" charset="0"/>
+              <a:buChar char="•"/>
+            </a:pPr>
+            <a:r>
+              <a:rPr lang="en-US" dirty="0"/>
+              <a:t>Rot-Kanal: </a:t>
+            </a:r>
+            <a:r>
+              <a:rPr lang="en-US" dirty="0" err="1"/>
+              <a:t>Größte</a:t>
+            </a:r>
+            <a:r>
+              <a:rPr lang="en-US" dirty="0"/>
+              <a:t> </a:t>
+            </a:r>
+            <a:r>
+              <a:rPr lang="en-US" dirty="0" err="1"/>
+              <a:t>Differenz</a:t>
+            </a:r>
+            <a:r>
+              <a:rPr lang="en-US" dirty="0"/>
+              <a:t> </a:t>
+            </a:r>
+            <a:r>
+              <a:rPr lang="en-US" dirty="0" err="1"/>
+              <a:t>zwischen</a:t>
+            </a:r>
+            <a:r>
+              <a:rPr lang="en-US" dirty="0"/>
+              <a:t> den Klassen</a:t>
+            </a:r>
+          </a:p>
+          <a:p>
+            <a:pPr marL="285750" indent="-285750">
+              <a:lnSpc>
+                <a:spcPct val="150000"/>
+              </a:lnSpc>
+              <a:buFont typeface="Arial" panose="020B0604020202020204" pitchFamily="34" charset="0"/>
+              <a:buChar char="•"/>
+            </a:pPr>
+            <a:r>
+              <a:rPr lang="en-US" dirty="0"/>
+              <a:t>Blau-Kanal: </a:t>
+            </a:r>
+            <a:r>
+              <a:rPr lang="en-US" dirty="0" err="1"/>
+              <a:t>Zweitgrößte</a:t>
+            </a:r>
+            <a:r>
+              <a:rPr lang="en-US" dirty="0"/>
+              <a:t> </a:t>
+            </a:r>
+            <a:r>
+              <a:rPr lang="en-US" dirty="0" err="1"/>
+              <a:t>Differenz</a:t>
+            </a:r>
+            <a:r>
+              <a:rPr lang="en-US" dirty="0"/>
+              <a:t> – </a:t>
+            </a:r>
+            <a:r>
+              <a:rPr lang="en-US" dirty="0" err="1"/>
+              <a:t>unterstützt</a:t>
+            </a:r>
+            <a:r>
+              <a:rPr lang="en-US" dirty="0"/>
+              <a:t> die </a:t>
+            </a:r>
+            <a:r>
+              <a:rPr lang="en-US" dirty="0" err="1"/>
+              <a:t>Klassifikation</a:t>
+            </a:r>
+            <a:endParaRPr lang="en-US" dirty="0"/>
+          </a:p>
+          <a:p>
+            <a:pPr marL="285750" indent="-285750">
+              <a:lnSpc>
+                <a:spcPct val="150000"/>
+              </a:lnSpc>
+              <a:buFont typeface="Arial" panose="020B0604020202020204" pitchFamily="34" charset="0"/>
+              <a:buChar char="•"/>
+            </a:pPr>
+            <a:r>
+              <a:rPr lang="en-US" dirty="0"/>
+              <a:t>Grün-Kanal: </a:t>
+            </a:r>
+            <a:r>
+              <a:rPr lang="en-US" dirty="0" err="1"/>
+              <a:t>Kleinere</a:t>
+            </a:r>
+            <a:r>
+              <a:rPr lang="en-US" dirty="0"/>
+              <a:t> </a:t>
+            </a:r>
+            <a:r>
+              <a:rPr lang="en-US" dirty="0" err="1"/>
+              <a:t>aber</a:t>
+            </a:r>
+            <a:r>
+              <a:rPr lang="en-US" dirty="0"/>
+              <a:t> </a:t>
+            </a:r>
+            <a:r>
+              <a:rPr lang="en-US" dirty="0" err="1"/>
+              <a:t>messbare</a:t>
+            </a:r>
+            <a:r>
+              <a:rPr lang="en-US" dirty="0"/>
+              <a:t> </a:t>
+            </a:r>
+            <a:r>
+              <a:rPr lang="en-US" dirty="0" err="1"/>
+              <a:t>Differenz</a:t>
+            </a:r>
+            <a:endParaRPr lang="en-US" dirty="0"/>
+          </a:p>
+        </p:txBody>
+      </p:sp>
+    </p:spTree>
+    <p:extLst>
+      <p:ext uri="{BB962C8B-B14F-4D97-AF65-F5344CB8AC3E}">
+        <p14:creationId xmlns:p14="http://schemas.microsoft.com/office/powerpoint/2010/main" val="2264139518"/>
+      </p:ext>
+    </p:extLst>
+  </p:cSld>
+  <p:clrMapOvr>
+    <a:masterClrMapping/>
+  </p:clrMapOvr>
+</p:sld>
+</file>
+
+<file path=ppt/slides/slide19.xml><?xml version="1.0" encoding="utf-8"?>
+<p:sld xmlns:a="http://schemas.openxmlformats.org/drawingml/2006/main" xmlns:r="http://schemas.openxmlformats.org/officeDocument/2006/relationships" xmlns:p="http://schemas.openxmlformats.org/presentationml/2006/main">
+  <p:cSld>
+    <p:spTree>
+      <p:nvGrpSpPr>
+        <p:cNvPr id="1" name=""/>
+        <p:cNvGrpSpPr/>
+        <p:nvPr/>
+      </p:nvGrpSpPr>
+      <p:grpSpPr>
+        <a:xfrm>
+          <a:off x="0" y="0"/>
+          <a:ext cx="0" cy="0"/>
+          <a:chOff x="0" y="0"/>
+          <a:chExt cx="0" cy="0"/>
+        </a:xfrm>
+      </p:grpSpPr>
+      <p:sp>
+        <p:nvSpPr>
+          <p:cNvPr id="2" name="Titel 1">
+            <a:extLst>
+              <a:ext uri="{FF2B5EF4-FFF2-40B4-BE49-F238E27FC236}">
+                <a16:creationId xmlns:a16="http://schemas.microsoft.com/office/drawing/2014/main" id="{564010CA-FA90-C551-4B2E-BC5C6C34FE57}"/>
+              </a:ext>
+            </a:extLst>
+          </p:cNvPr>
+          <p:cNvSpPr>
+            <a:spLocks noGrp="1"/>
+          </p:cNvSpPr>
+          <p:nvPr>
+            <p:ph type="title"/>
+          </p:nvPr>
+        </p:nvSpPr>
+        <p:spPr/>
+        <p:txBody>
+          <a:bodyPr/>
+          <a:lstStyle/>
+          <a:p>
+            <a:r>
+              <a:rPr lang="de-DE" dirty="0"/>
+              <a:t>Welche Kriterien nutzt das Model hauptsächlich zur Klassifizierung? – Rot vs. Blau </a:t>
+            </a:r>
+            <a:r>
+              <a:rPr lang="de-DE" dirty="0" err="1"/>
+              <a:t>Scatter</a:t>
+            </a:r>
+            <a:endParaRPr lang="en-DE" dirty="0"/>
+          </a:p>
+        </p:txBody>
+      </p:sp>
+      <p:sp>
+        <p:nvSpPr>
+          <p:cNvPr id="4" name="Fußzeilenplatzhalter 3">
+            <a:extLst>
+              <a:ext uri="{FF2B5EF4-FFF2-40B4-BE49-F238E27FC236}">
+                <a16:creationId xmlns:a16="http://schemas.microsoft.com/office/drawing/2014/main" id="{4F054651-5EA0-B220-DEF2-7B22846AA84D}"/>
+              </a:ext>
+            </a:extLst>
+          </p:cNvPr>
+          <p:cNvSpPr>
+            <a:spLocks noGrp="1"/>
+          </p:cNvSpPr>
+          <p:nvPr>
+            <p:ph type="ftr" sz="quarter" idx="3"/>
+          </p:nvPr>
+        </p:nvSpPr>
+        <p:spPr/>
+        <p:txBody>
+          <a:bodyPr/>
+          <a:lstStyle/>
+          <a:p>
+            <a:pPr>
+              <a:defRPr/>
+            </a:pPr>
+            <a:r>
+              <a:rPr lang="de-DE"/>
+              <a:t>Titel des Projekts | Nachnamen der Autoren einfügen</a:t>
+            </a:r>
+            <a:endParaRPr lang="de-DE" dirty="0"/>
+          </a:p>
+        </p:txBody>
+      </p:sp>
+      <p:sp>
+        <p:nvSpPr>
+          <p:cNvPr id="5" name="Foliennummernplatzhalter 4">
+            <a:extLst>
+              <a:ext uri="{FF2B5EF4-FFF2-40B4-BE49-F238E27FC236}">
+                <a16:creationId xmlns:a16="http://schemas.microsoft.com/office/drawing/2014/main" id="{3A9B289F-E2CE-2423-29E7-E673CAF1AEA3}"/>
+              </a:ext>
+            </a:extLst>
+          </p:cNvPr>
+          <p:cNvSpPr>
+            <a:spLocks noGrp="1"/>
+          </p:cNvSpPr>
+          <p:nvPr>
+            <p:ph type="sldNum" sz="quarter" idx="4"/>
+          </p:nvPr>
+        </p:nvSpPr>
+        <p:spPr/>
+        <p:txBody>
+          <a:bodyPr/>
+          <a:lstStyle/>
+          <a:p>
+            <a:fld id="{029DE7E0-E051-4C03-AF53-7018E0F7EF0C}" type="slidenum">
+              <a:rPr lang="de-DE" altLang="de-DE" smtClean="0"/>
+              <a:pPr/>
+              <a:t>19</a:t>
             </a:fld>
             <a:endParaRPr lang="de-DE" altLang="de-DE"/>
           </a:p>
@@ -4785,7 +6526,258 @@
 </p:sld>
 </file>
 
-<file path=ppt/slides/slide14.xml><?xml version="1.0" encoding="utf-8"?>
+<file path=ppt/slides/slide2.xml><?xml version="1.0" encoding="utf-8"?>
+<p:sld xmlns:a="http://schemas.openxmlformats.org/drawingml/2006/main" xmlns:r="http://schemas.openxmlformats.org/officeDocument/2006/relationships" xmlns:p="http://schemas.openxmlformats.org/presentationml/2006/main">
+  <p:cSld>
+    <p:spTree>
+      <p:nvGrpSpPr>
+        <p:cNvPr id="1" name="">
+          <a:extLst>
+            <a:ext uri="{FF2B5EF4-FFF2-40B4-BE49-F238E27FC236}">
+              <a16:creationId xmlns:a16="http://schemas.microsoft.com/office/drawing/2014/main" id="{9644A08A-6CD7-534E-5EFE-68F852CA3FE2}"/>
+            </a:ext>
+          </a:extLst>
+        </p:cNvPr>
+        <p:cNvGrpSpPr/>
+        <p:nvPr/>
+      </p:nvGrpSpPr>
+      <p:grpSpPr>
+        <a:xfrm>
+          <a:off x="0" y="0"/>
+          <a:ext cx="0" cy="0"/>
+          <a:chOff x="0" y="0"/>
+          <a:chExt cx="0" cy="0"/>
+        </a:xfrm>
+      </p:grpSpPr>
+      <p:sp>
+        <p:nvSpPr>
+          <p:cNvPr id="2" name="Titel 1">
+            <a:extLst>
+              <a:ext uri="{FF2B5EF4-FFF2-40B4-BE49-F238E27FC236}">
+                <a16:creationId xmlns:a16="http://schemas.microsoft.com/office/drawing/2014/main" id="{5FB9E4B8-620F-7251-D2F2-2DD01D9606E6}"/>
+              </a:ext>
+            </a:extLst>
+          </p:cNvPr>
+          <p:cNvSpPr>
+            <a:spLocks noGrp="1"/>
+          </p:cNvSpPr>
+          <p:nvPr>
+            <p:ph type="title"/>
+          </p:nvPr>
+        </p:nvSpPr>
+        <p:spPr/>
+        <p:txBody>
+          <a:bodyPr/>
+          <a:lstStyle/>
+          <a:p>
+            <a:r>
+              <a:rPr lang="de-DE" dirty="0"/>
+              <a:t>Inhaltsverzeichnis</a:t>
+            </a:r>
+          </a:p>
+        </p:txBody>
+      </p:sp>
+      <p:sp>
+        <p:nvSpPr>
+          <p:cNvPr id="3" name="Inhaltsplatzhalter 2">
+            <a:extLst>
+              <a:ext uri="{FF2B5EF4-FFF2-40B4-BE49-F238E27FC236}">
+                <a16:creationId xmlns:a16="http://schemas.microsoft.com/office/drawing/2014/main" id="{3E93D819-E017-3285-E225-B0CF7363E308}"/>
+              </a:ext>
+            </a:extLst>
+          </p:cNvPr>
+          <p:cNvSpPr>
+            <a:spLocks noGrp="1"/>
+          </p:cNvSpPr>
+          <p:nvPr>
+            <p:ph idx="1"/>
+          </p:nvPr>
+        </p:nvSpPr>
+        <p:spPr/>
+        <p:txBody>
+          <a:bodyPr/>
+          <a:lstStyle/>
+          <a:p>
+            <a:pPr marL="285750" indent="-285750">
+              <a:spcAft>
+                <a:spcPts val="1800"/>
+              </a:spcAft>
+              <a:buFont typeface="Arial" panose="020B0604020202020204" pitchFamily="34" charset="0"/>
+              <a:buChar char="•"/>
+            </a:pPr>
+            <a:r>
+              <a:rPr lang="de-DE" dirty="0"/>
+              <a:t>Datensatz</a:t>
+            </a:r>
+          </a:p>
+          <a:p>
+            <a:pPr marL="285750" indent="-285750">
+              <a:spcAft>
+                <a:spcPts val="1800"/>
+              </a:spcAft>
+              <a:buFont typeface="Arial" panose="020B0604020202020204" pitchFamily="34" charset="0"/>
+              <a:buChar char="•"/>
+            </a:pPr>
+            <a:r>
+              <a:rPr lang="de-DE" dirty="0"/>
+              <a:t>Vorverarbeitung und Explorative Datenanalyse</a:t>
+            </a:r>
+          </a:p>
+          <a:p>
+            <a:pPr marL="285750" indent="-285750">
+              <a:spcAft>
+                <a:spcPts val="1800"/>
+              </a:spcAft>
+              <a:buFont typeface="Arial" panose="020B0604020202020204" pitchFamily="34" charset="0"/>
+              <a:buChar char="•"/>
+            </a:pPr>
+            <a:r>
+              <a:rPr lang="de-DE" dirty="0"/>
+              <a:t>Einordung des Anwendungsproblems</a:t>
+            </a:r>
+          </a:p>
+          <a:p>
+            <a:pPr marL="285750" indent="-285750">
+              <a:spcAft>
+                <a:spcPts val="1800"/>
+              </a:spcAft>
+              <a:buFont typeface="Arial" panose="020B0604020202020204" pitchFamily="34" charset="0"/>
+              <a:buChar char="•"/>
+            </a:pPr>
+            <a:r>
+              <a:rPr lang="de-DE" dirty="0"/>
+              <a:t>Detailfragen:</a:t>
+            </a:r>
+          </a:p>
+          <a:p>
+            <a:pPr marL="628650" lvl="1" indent="-285750">
+              <a:spcAft>
+                <a:spcPts val="1800"/>
+              </a:spcAft>
+            </a:pPr>
+            <a:r>
+              <a:rPr lang="de-DE" dirty="0"/>
+              <a:t>Welche CNN Architektur erreicht die höchste Genauigkeit?</a:t>
+            </a:r>
+          </a:p>
+          <a:p>
+            <a:pPr marL="628650" lvl="1" indent="-285750">
+              <a:spcAft>
+                <a:spcPts val="1800"/>
+              </a:spcAft>
+            </a:pPr>
+            <a:r>
+              <a:rPr lang="de-DE" dirty="0"/>
+              <a:t>Wie wirkt sich Data Augmentation auf die Erkennungsgenauigkeit des Modells aus?</a:t>
+            </a:r>
+          </a:p>
+          <a:p>
+            <a:pPr marL="628650" lvl="1" indent="-285750">
+              <a:spcAft>
+                <a:spcPts val="1800"/>
+              </a:spcAft>
+            </a:pPr>
+            <a:r>
+              <a:rPr lang="de-DE" dirty="0"/>
+              <a:t>Welche Kriterien nutzt das Model hauptsächlich zur Klassifizierung?</a:t>
+            </a:r>
+          </a:p>
+          <a:p>
+            <a:pPr marL="285750" indent="-285750">
+              <a:spcAft>
+                <a:spcPts val="1800"/>
+              </a:spcAft>
+              <a:buFont typeface="Arial" panose="020B0604020202020204" pitchFamily="34" charset="0"/>
+              <a:buChar char="•"/>
+            </a:pPr>
+            <a:r>
+              <a:rPr lang="de-DE" dirty="0"/>
+              <a:t>Interpretation und Fazit</a:t>
+            </a:r>
+          </a:p>
+          <a:p>
+            <a:pPr>
+              <a:spcAft>
+                <a:spcPts val="1800"/>
+              </a:spcAft>
+            </a:pPr>
+            <a:endParaRPr lang="de-DE" dirty="0"/>
+          </a:p>
+        </p:txBody>
+      </p:sp>
+      <p:sp>
+        <p:nvSpPr>
+          <p:cNvPr id="4" name="Fußzeilenplatzhalter 3">
+            <a:extLst>
+              <a:ext uri="{FF2B5EF4-FFF2-40B4-BE49-F238E27FC236}">
+                <a16:creationId xmlns:a16="http://schemas.microsoft.com/office/drawing/2014/main" id="{D6C7113E-8F19-7721-F31B-66519741DEE6}"/>
+              </a:ext>
+            </a:extLst>
+          </p:cNvPr>
+          <p:cNvSpPr>
+            <a:spLocks noGrp="1"/>
+          </p:cNvSpPr>
+          <p:nvPr>
+            <p:ph type="ftr" sz="quarter" idx="3"/>
+          </p:nvPr>
+        </p:nvSpPr>
+        <p:spPr/>
+        <p:txBody>
+          <a:bodyPr/>
+          <a:lstStyle/>
+          <a:p>
+            <a:r>
+              <a:rPr lang="de-DE"/>
+              <a:t>Titel des Projekts | Nachnamen der Autoren einfügen</a:t>
+            </a:r>
+            <a:endParaRPr lang="en-US"/>
+          </a:p>
+        </p:txBody>
+      </p:sp>
+      <p:sp>
+        <p:nvSpPr>
+          <p:cNvPr id="5" name="Foliennummernplatzhalter 4">
+            <a:extLst>
+              <a:ext uri="{FF2B5EF4-FFF2-40B4-BE49-F238E27FC236}">
+                <a16:creationId xmlns:a16="http://schemas.microsoft.com/office/drawing/2014/main" id="{8BFC4E3E-802C-A5A0-ABB1-3E122F11C832}"/>
+              </a:ext>
+            </a:extLst>
+          </p:cNvPr>
+          <p:cNvSpPr>
+            <a:spLocks noGrp="1"/>
+          </p:cNvSpPr>
+          <p:nvPr>
+            <p:ph type="sldNum" sz="quarter" idx="4"/>
+          </p:nvPr>
+        </p:nvSpPr>
+        <p:spPr/>
+        <p:txBody>
+          <a:bodyPr/>
+          <a:lstStyle/>
+          <a:p>
+            <a:fld id="{029DE7E0-E051-4C03-AF53-7018E0F7EF0C}" type="slidenum">
+              <a:rPr lang="de-DE" altLang="de-DE" smtClean="0"/>
+              <a:pPr/>
+              <a:t>2</a:t>
+            </a:fld>
+            <a:endParaRPr lang="de-DE" altLang="de-DE"/>
+          </a:p>
+        </p:txBody>
+      </p:sp>
+    </p:spTree>
+    <p:extLst>
+      <p:ext uri="{BB962C8B-B14F-4D97-AF65-F5344CB8AC3E}">
+        <p14:creationId xmlns:p14="http://schemas.microsoft.com/office/powerpoint/2010/main" val="3713519298"/>
+      </p:ext>
+    </p:extLst>
+  </p:cSld>
+  <p:clrMapOvr>
+    <a:masterClrMapping/>
+  </p:clrMapOvr>
+</p:sld>
+</file>
+
+<file path=ppt/slides/slide20.xml><?xml version="1.0" encoding="utf-8"?>
 <p:sld xmlns:a="http://schemas.openxmlformats.org/drawingml/2006/main" xmlns:r="http://schemas.openxmlformats.org/officeDocument/2006/relationships" xmlns:p="http://schemas.openxmlformats.org/presentationml/2006/main">
   <p:cSld>
     <p:spTree>
@@ -4915,7 +6907,7 @@
             <a:fld id="{029DE7E0-E051-4C03-AF53-7018E0F7EF0C}" type="slidenum">
               <a:rPr lang="de-DE" altLang="de-DE" smtClean="0"/>
               <a:pPr/>
-              <a:t>14</a:t>
+              <a:t>20</a:t>
             </a:fld>
             <a:endParaRPr lang="de-DE" altLang="de-DE"/>
           </a:p>
@@ -4934,7 +6926,7 @@
 </p:sld>
 </file>
 
-<file path=ppt/slides/slide15.xml><?xml version="1.0" encoding="utf-8"?>
+<file path=ppt/slides/slide21.xml><?xml version="1.0" encoding="utf-8"?>
 <p:sld xmlns:a="http://schemas.openxmlformats.org/drawingml/2006/main" xmlns:r="http://schemas.openxmlformats.org/officeDocument/2006/relationships" xmlns:p="http://schemas.openxmlformats.org/presentationml/2006/main">
   <p:cSld>
     <p:spTree>
@@ -5506,7 +7498,7 @@
             <a:fld id="{029DE7E0-E051-4C03-AF53-7018E0F7EF0C}" type="slidenum">
               <a:rPr lang="de-DE" altLang="de-DE" smtClean="0"/>
               <a:pPr/>
-              <a:t>15</a:t>
+              <a:t>21</a:t>
             </a:fld>
             <a:endParaRPr lang="de-DE" altLang="de-DE"/>
           </a:p>
@@ -5525,7 +7517,7 @@
 </p:sld>
 </file>
 
-<file path=ppt/slides/slide16.xml><?xml version="1.0" encoding="utf-8"?>
+<file path=ppt/slides/slide22.xml><?xml version="1.0" encoding="utf-8"?>
 <p:sld xmlns:a="http://schemas.openxmlformats.org/drawingml/2006/main" xmlns:r="http://schemas.openxmlformats.org/officeDocument/2006/relationships" xmlns:p="http://schemas.openxmlformats.org/presentationml/2006/main">
   <p:cSld>
     <p:spTree>
@@ -6106,7 +8098,7 @@
             <a:fld id="{029DE7E0-E051-4C03-AF53-7018E0F7EF0C}" type="slidenum">
               <a:rPr lang="de-DE" altLang="de-DE" smtClean="0"/>
               <a:pPr/>
-              <a:t>16</a:t>
+              <a:t>22</a:t>
             </a:fld>
             <a:endParaRPr lang="de-DE" altLang="de-DE"/>
           </a:p>
@@ -6116,257 +8108,6 @@
     <p:extLst>
       <p:ext uri="{BB962C8B-B14F-4D97-AF65-F5344CB8AC3E}">
         <p14:creationId xmlns:p14="http://schemas.microsoft.com/office/powerpoint/2010/main" val="3246341753"/>
-      </p:ext>
-    </p:extLst>
-  </p:cSld>
-  <p:clrMapOvr>
-    <a:masterClrMapping/>
-  </p:clrMapOvr>
-</p:sld>
-</file>
-
-<file path=ppt/slides/slide2.xml><?xml version="1.0" encoding="utf-8"?>
-<p:sld xmlns:a="http://schemas.openxmlformats.org/drawingml/2006/main" xmlns:r="http://schemas.openxmlformats.org/officeDocument/2006/relationships" xmlns:p="http://schemas.openxmlformats.org/presentationml/2006/main">
-  <p:cSld>
-    <p:spTree>
-      <p:nvGrpSpPr>
-        <p:cNvPr id="1" name="">
-          <a:extLst>
-            <a:ext uri="{FF2B5EF4-FFF2-40B4-BE49-F238E27FC236}">
-              <a16:creationId xmlns:a16="http://schemas.microsoft.com/office/drawing/2014/main" id="{9644A08A-6CD7-534E-5EFE-68F852CA3FE2}"/>
-            </a:ext>
-          </a:extLst>
-        </p:cNvPr>
-        <p:cNvGrpSpPr/>
-        <p:nvPr/>
-      </p:nvGrpSpPr>
-      <p:grpSpPr>
-        <a:xfrm>
-          <a:off x="0" y="0"/>
-          <a:ext cx="0" cy="0"/>
-          <a:chOff x="0" y="0"/>
-          <a:chExt cx="0" cy="0"/>
-        </a:xfrm>
-      </p:grpSpPr>
-      <p:sp>
-        <p:nvSpPr>
-          <p:cNvPr id="2" name="Titel 1">
-            <a:extLst>
-              <a:ext uri="{FF2B5EF4-FFF2-40B4-BE49-F238E27FC236}">
-                <a16:creationId xmlns:a16="http://schemas.microsoft.com/office/drawing/2014/main" id="{5FB9E4B8-620F-7251-D2F2-2DD01D9606E6}"/>
-              </a:ext>
-            </a:extLst>
-          </p:cNvPr>
-          <p:cNvSpPr>
-            <a:spLocks noGrp="1"/>
-          </p:cNvSpPr>
-          <p:nvPr>
-            <p:ph type="title"/>
-          </p:nvPr>
-        </p:nvSpPr>
-        <p:spPr/>
-        <p:txBody>
-          <a:bodyPr/>
-          <a:lstStyle/>
-          <a:p>
-            <a:r>
-              <a:rPr lang="de-DE" dirty="0"/>
-              <a:t>Inhaltsverzeichnis</a:t>
-            </a:r>
-          </a:p>
-        </p:txBody>
-      </p:sp>
-      <p:sp>
-        <p:nvSpPr>
-          <p:cNvPr id="3" name="Inhaltsplatzhalter 2">
-            <a:extLst>
-              <a:ext uri="{FF2B5EF4-FFF2-40B4-BE49-F238E27FC236}">
-                <a16:creationId xmlns:a16="http://schemas.microsoft.com/office/drawing/2014/main" id="{3E93D819-E017-3285-E225-B0CF7363E308}"/>
-              </a:ext>
-            </a:extLst>
-          </p:cNvPr>
-          <p:cNvSpPr>
-            <a:spLocks noGrp="1"/>
-          </p:cNvSpPr>
-          <p:nvPr>
-            <p:ph idx="1"/>
-          </p:nvPr>
-        </p:nvSpPr>
-        <p:spPr/>
-        <p:txBody>
-          <a:bodyPr/>
-          <a:lstStyle/>
-          <a:p>
-            <a:pPr marL="285750" indent="-285750">
-              <a:spcAft>
-                <a:spcPts val="1800"/>
-              </a:spcAft>
-              <a:buFont typeface="Arial" panose="020B0604020202020204" pitchFamily="34" charset="0"/>
-              <a:buChar char="•"/>
-            </a:pPr>
-            <a:r>
-              <a:rPr lang="de-DE" dirty="0"/>
-              <a:t>Datensatz</a:t>
-            </a:r>
-          </a:p>
-          <a:p>
-            <a:pPr marL="285750" indent="-285750">
-              <a:spcAft>
-                <a:spcPts val="1800"/>
-              </a:spcAft>
-              <a:buFont typeface="Arial" panose="020B0604020202020204" pitchFamily="34" charset="0"/>
-              <a:buChar char="•"/>
-            </a:pPr>
-            <a:r>
-              <a:rPr lang="de-DE" dirty="0"/>
-              <a:t>Vorverarbeitung und Explorative Datenanalyse</a:t>
-            </a:r>
-          </a:p>
-          <a:p>
-            <a:pPr marL="285750" indent="-285750">
-              <a:spcAft>
-                <a:spcPts val="1800"/>
-              </a:spcAft>
-              <a:buFont typeface="Arial" panose="020B0604020202020204" pitchFamily="34" charset="0"/>
-              <a:buChar char="•"/>
-            </a:pPr>
-            <a:r>
-              <a:rPr lang="de-DE" dirty="0"/>
-              <a:t>Einordung des Anwendungsproblems</a:t>
-            </a:r>
-          </a:p>
-          <a:p>
-            <a:pPr marL="285750" indent="-285750">
-              <a:spcAft>
-                <a:spcPts val="1800"/>
-              </a:spcAft>
-              <a:buFont typeface="Arial" panose="020B0604020202020204" pitchFamily="34" charset="0"/>
-              <a:buChar char="•"/>
-            </a:pPr>
-            <a:r>
-              <a:rPr lang="de-DE" dirty="0"/>
-              <a:t>Detailfragen:</a:t>
-            </a:r>
-          </a:p>
-          <a:p>
-            <a:pPr marL="628650" lvl="1" indent="-285750">
-              <a:spcAft>
-                <a:spcPts val="1800"/>
-              </a:spcAft>
-            </a:pPr>
-            <a:r>
-              <a:rPr lang="de-DE" dirty="0"/>
-              <a:t>Welche CNN Architektur erreicht die höchste Genauigkeit?</a:t>
-            </a:r>
-          </a:p>
-          <a:p>
-            <a:pPr marL="628650" lvl="1" indent="-285750">
-              <a:spcAft>
-                <a:spcPts val="1800"/>
-              </a:spcAft>
-            </a:pPr>
-            <a:r>
-              <a:rPr lang="de-DE" dirty="0"/>
-              <a:t>Wie wirkt sich Data Augmentation auf die Erkennungsgenauigkeit des Modells aus?</a:t>
-            </a:r>
-          </a:p>
-          <a:p>
-            <a:pPr marL="628650" lvl="1" indent="-285750">
-              <a:spcAft>
-                <a:spcPts val="1800"/>
-              </a:spcAft>
-            </a:pPr>
-            <a:r>
-              <a:rPr lang="de-DE" dirty="0"/>
-              <a:t>Welche Kriterien nutzt das Model hauptsächlich zur Klassifizierung?</a:t>
-            </a:r>
-          </a:p>
-          <a:p>
-            <a:pPr marL="285750" indent="-285750">
-              <a:spcAft>
-                <a:spcPts val="1800"/>
-              </a:spcAft>
-              <a:buFont typeface="Arial" panose="020B0604020202020204" pitchFamily="34" charset="0"/>
-              <a:buChar char="•"/>
-            </a:pPr>
-            <a:r>
-              <a:rPr lang="de-DE" dirty="0"/>
-              <a:t>Interpretation und Fazit</a:t>
-            </a:r>
-          </a:p>
-          <a:p>
-            <a:pPr>
-              <a:spcAft>
-                <a:spcPts val="1800"/>
-              </a:spcAft>
-            </a:pPr>
-            <a:endParaRPr lang="de-DE" dirty="0"/>
-          </a:p>
-        </p:txBody>
-      </p:sp>
-      <p:sp>
-        <p:nvSpPr>
-          <p:cNvPr id="4" name="Fußzeilenplatzhalter 3">
-            <a:extLst>
-              <a:ext uri="{FF2B5EF4-FFF2-40B4-BE49-F238E27FC236}">
-                <a16:creationId xmlns:a16="http://schemas.microsoft.com/office/drawing/2014/main" id="{D6C7113E-8F19-7721-F31B-66519741DEE6}"/>
-              </a:ext>
-            </a:extLst>
-          </p:cNvPr>
-          <p:cNvSpPr>
-            <a:spLocks noGrp="1"/>
-          </p:cNvSpPr>
-          <p:nvPr>
-            <p:ph type="ftr" sz="quarter" idx="3"/>
-          </p:nvPr>
-        </p:nvSpPr>
-        <p:spPr/>
-        <p:txBody>
-          <a:bodyPr/>
-          <a:lstStyle/>
-          <a:p>
-            <a:r>
-              <a:rPr lang="de-DE"/>
-              <a:t>Titel des Projekts | Nachnamen der Autoren einfügen</a:t>
-            </a:r>
-            <a:endParaRPr lang="en-US"/>
-          </a:p>
-        </p:txBody>
-      </p:sp>
-      <p:sp>
-        <p:nvSpPr>
-          <p:cNvPr id="5" name="Foliennummernplatzhalter 4">
-            <a:extLst>
-              <a:ext uri="{FF2B5EF4-FFF2-40B4-BE49-F238E27FC236}">
-                <a16:creationId xmlns:a16="http://schemas.microsoft.com/office/drawing/2014/main" id="{8BFC4E3E-802C-A5A0-ABB1-3E122F11C832}"/>
-              </a:ext>
-            </a:extLst>
-          </p:cNvPr>
-          <p:cNvSpPr>
-            <a:spLocks noGrp="1"/>
-          </p:cNvSpPr>
-          <p:nvPr>
-            <p:ph type="sldNum" sz="quarter" idx="4"/>
-          </p:nvPr>
-        </p:nvSpPr>
-        <p:spPr/>
-        <p:txBody>
-          <a:bodyPr/>
-          <a:lstStyle/>
-          <a:p>
-            <a:fld id="{029DE7E0-E051-4C03-AF53-7018E0F7EF0C}" type="slidenum">
-              <a:rPr lang="de-DE" altLang="de-DE" smtClean="0"/>
-              <a:pPr/>
-              <a:t>2</a:t>
-            </a:fld>
-            <a:endParaRPr lang="de-DE" altLang="de-DE"/>
-          </a:p>
-        </p:txBody>
-      </p:sp>
-    </p:spTree>
-    <p:extLst>
-      <p:ext uri="{BB962C8B-B14F-4D97-AF65-F5344CB8AC3E}">
-        <p14:creationId xmlns:p14="http://schemas.microsoft.com/office/powerpoint/2010/main" val="3713519298"/>
       </p:ext>
     </p:extLst>
   </p:cSld>
@@ -7326,7 +9067,41 @@
           <a:bodyPr/>
           <a:lstStyle/>
           <a:p>
-            <a:endParaRPr lang="en-DE"/>
+            <a:pPr marL="342900" indent="-342900">
+              <a:buAutoNum type="arabicPeriod"/>
+            </a:pPr>
+            <a:r>
+              <a:rPr lang="de-DE" dirty="0"/>
+              <a:t>Ansatz:</a:t>
+            </a:r>
+          </a:p>
+          <a:p>
+            <a:pPr marL="685800" lvl="1">
+              <a:buAutoNum type="alphaLcPeriod"/>
+            </a:pPr>
+            <a:r>
+              <a:rPr lang="de-DE" dirty="0"/>
+              <a:t>Trainiere Modelle mit unterschiedlichen </a:t>
+            </a:r>
+            <a:r>
+              <a:rPr lang="de-DE" dirty="0" err="1"/>
+              <a:t>Augmentierungen</a:t>
+            </a:r>
+            <a:endParaRPr lang="de-DE" dirty="0"/>
+          </a:p>
+          <a:p>
+            <a:pPr marL="685800" lvl="1">
+              <a:buAutoNum type="alphaLcPeriod"/>
+            </a:pPr>
+            <a:r>
+              <a:rPr lang="de-DE" dirty="0"/>
+              <a:t>Vergleiche </a:t>
+            </a:r>
+            <a:r>
+              <a:rPr lang="de-DE" dirty="0" err="1"/>
+              <a:t>Evaluationsmetriken</a:t>
+            </a:r>
+            <a:endParaRPr lang="de-DE" dirty="0"/>
           </a:p>
         </p:txBody>
       </p:sp>
@@ -7427,7 +9202,7 @@
           <p:cNvPr id="2" name="Titel 1">
             <a:extLst>
               <a:ext uri="{FF2B5EF4-FFF2-40B4-BE49-F238E27FC236}">
-                <a16:creationId xmlns:a16="http://schemas.microsoft.com/office/drawing/2014/main" id="{B9238149-E390-1762-58B5-6F1D8A432F28}"/>
+                <a16:creationId xmlns:a16="http://schemas.microsoft.com/office/drawing/2014/main" id="{2EEA355E-719A-43D5-DF6F-BAB973A75AB5}"/>
               </a:ext>
             </a:extLst>
           </p:cNvPr>
@@ -7445,212 +9220,36 @@
           <a:p>
             <a:r>
               <a:rPr lang="de-DE" dirty="0"/>
-              <a:t>Welche Kriterien nutzt das Model hauptsächlich zur Klassifizierung? - </a:t>
-            </a:r>
-            <a:r>
-              <a:rPr lang="de-DE" dirty="0" err="1"/>
-              <a:t>GradCam</a:t>
+              <a:t>Wie wirkt sich Data Augmentation auf die Erkennungsgenauigkeit des Modells aus?</a:t>
             </a:r>
             <a:br>
               <a:rPr lang="de-DE" dirty="0"/>
             </a:br>
-            <a:endParaRPr lang="en-DE" dirty="0"/>
-          </a:p>
-        </p:txBody>
-      </p:sp>
-      <p:sp>
-        <p:nvSpPr>
-          <p:cNvPr id="3" name="Inhaltsplatzhalter 2">
-            <a:extLst>
-              <a:ext uri="{FF2B5EF4-FFF2-40B4-BE49-F238E27FC236}">
-                <a16:creationId xmlns:a16="http://schemas.microsoft.com/office/drawing/2014/main" id="{12985055-DC01-557E-02EB-1B2F2284234C}"/>
-              </a:ext>
-            </a:extLst>
-          </p:cNvPr>
-          <p:cNvSpPr>
-            <a:spLocks noGrp="1"/>
-          </p:cNvSpPr>
-          <p:nvPr>
-            <p:ph idx="1"/>
-          </p:nvPr>
-        </p:nvSpPr>
-        <p:spPr>
-          <a:xfrm>
-            <a:off x="551384" y="1844824"/>
-            <a:ext cx="6552728" cy="4491174"/>
-          </a:xfrm>
-        </p:spPr>
+            <a:endParaRPr lang="de-DE" dirty="0"/>
+          </a:p>
+        </p:txBody>
+      </p:sp>
+      <p:sp>
+        <p:nvSpPr>
+          <p:cNvPr id="4" name="Fußzeilenplatzhalter 3">
+            <a:extLst>
+              <a:ext uri="{FF2B5EF4-FFF2-40B4-BE49-F238E27FC236}">
+                <a16:creationId xmlns:a16="http://schemas.microsoft.com/office/drawing/2014/main" id="{DD81E5A7-B12B-2807-549F-BBA35A89AC4A}"/>
+              </a:ext>
+            </a:extLst>
+          </p:cNvPr>
+          <p:cNvSpPr>
+            <a:spLocks noGrp="1"/>
+          </p:cNvSpPr>
+          <p:nvPr>
+            <p:ph type="ftr" sz="quarter" idx="3"/>
+          </p:nvPr>
+        </p:nvSpPr>
+        <p:spPr/>
         <p:txBody>
           <a:bodyPr/>
           <a:lstStyle/>
           <a:p>
-            <a:pPr marL="285750" indent="-285750">
-              <a:buFont typeface="Arial" panose="020B0604020202020204" pitchFamily="34" charset="0"/>
-              <a:buChar char="•"/>
-            </a:pPr>
-            <a:endParaRPr lang="en-US" dirty="0"/>
-          </a:p>
-          <a:p>
-            <a:pPr marL="285750" indent="-285750">
-              <a:lnSpc>
-                <a:spcPct val="150000"/>
-              </a:lnSpc>
-              <a:buFont typeface="Arial" panose="020B0604020202020204" pitchFamily="34" charset="0"/>
-              <a:buChar char="•"/>
-            </a:pPr>
-            <a:r>
-              <a:rPr lang="en-US" dirty="0" err="1"/>
-              <a:t>GradCam</a:t>
-            </a:r>
-            <a:r>
-              <a:rPr lang="en-US" dirty="0"/>
-              <a:t> – Was </a:t>
-            </a:r>
-            <a:r>
-              <a:rPr lang="en-US" dirty="0" err="1"/>
-              <a:t>ist</a:t>
-            </a:r>
-            <a:r>
-              <a:rPr lang="en-US" dirty="0"/>
-              <a:t> das?</a:t>
-            </a:r>
-          </a:p>
-          <a:p>
-            <a:pPr marL="628650" lvl="1" indent="-285750">
-              <a:lnSpc>
-                <a:spcPct val="150000"/>
-              </a:lnSpc>
-            </a:pPr>
-            <a:r>
-              <a:rPr lang="en-US" dirty="0" err="1"/>
-              <a:t>Visualisiert</a:t>
-            </a:r>
-            <a:r>
-              <a:rPr lang="en-US" dirty="0"/>
-              <a:t> </a:t>
-            </a:r>
-            <a:r>
-              <a:rPr lang="en-US" dirty="0" err="1"/>
-              <a:t>wichtige</a:t>
-            </a:r>
-            <a:r>
-              <a:rPr lang="en-US" dirty="0"/>
-              <a:t> </a:t>
-            </a:r>
-            <a:r>
-              <a:rPr lang="en-US" dirty="0" err="1"/>
-              <a:t>Bildbereiche</a:t>
-            </a:r>
-            <a:endParaRPr lang="en-US" dirty="0"/>
-          </a:p>
-          <a:p>
-            <a:pPr marL="628650" lvl="1" indent="-285750">
-              <a:lnSpc>
-                <a:spcPct val="150000"/>
-              </a:lnSpc>
-            </a:pPr>
-            <a:r>
-              <a:rPr lang="en-US" dirty="0" err="1"/>
-              <a:t>Zeigt</a:t>
-            </a:r>
-            <a:r>
-              <a:rPr lang="en-US" dirty="0"/>
-              <a:t>: “</a:t>
-            </a:r>
-            <a:r>
-              <a:rPr lang="en-US" dirty="0" err="1"/>
-              <a:t>Worauf</a:t>
-            </a:r>
-            <a:r>
-              <a:rPr lang="en-US" dirty="0"/>
-              <a:t> </a:t>
-            </a:r>
-            <a:r>
-              <a:rPr lang="en-US" dirty="0" err="1"/>
-              <a:t>achtet</a:t>
-            </a:r>
-            <a:r>
-              <a:rPr lang="en-US" dirty="0"/>
-              <a:t> das Modell?”</a:t>
-            </a:r>
-          </a:p>
-          <a:p>
-            <a:pPr marL="628650" lvl="1" indent="-285750">
-              <a:lnSpc>
-                <a:spcPct val="150000"/>
-              </a:lnSpc>
-            </a:pPr>
-            <a:r>
-              <a:rPr lang="en-US" dirty="0"/>
-              <a:t>Standard-Tool für CNN Interpretation</a:t>
-            </a:r>
-          </a:p>
-          <a:p>
-            <a:pPr marL="628650" lvl="1" indent="-285750">
-              <a:lnSpc>
-                <a:spcPct val="150000"/>
-              </a:lnSpc>
-            </a:pPr>
-            <a:endParaRPr lang="en-US" dirty="0"/>
-          </a:p>
-          <a:p>
-            <a:r>
-              <a:rPr lang="en-US" b="1" dirty="0" err="1"/>
-              <a:t>Erwartung</a:t>
-            </a:r>
-            <a:r>
-              <a:rPr lang="en-US" b="1" dirty="0"/>
-              <a:t>:</a:t>
-            </a:r>
-            <a:r>
-              <a:rPr lang="en-US" dirty="0"/>
-              <a:t> Klare </a:t>
-            </a:r>
-            <a:r>
-              <a:rPr lang="en-US" dirty="0" err="1"/>
-              <a:t>Fokussierung</a:t>
-            </a:r>
-            <a:r>
-              <a:rPr lang="en-US" dirty="0"/>
-              <a:t> auf </a:t>
-            </a:r>
-            <a:r>
-              <a:rPr lang="en-US" dirty="0" err="1"/>
-              <a:t>brennbare</a:t>
-            </a:r>
-            <a:r>
-              <a:rPr lang="en-US" dirty="0"/>
-              <a:t> </a:t>
-            </a:r>
-            <a:r>
-              <a:rPr lang="en-US" dirty="0" err="1"/>
-              <a:t>Objekte</a:t>
-            </a:r>
-            <a:endParaRPr lang="en-US" dirty="0"/>
-          </a:p>
-        </p:txBody>
-      </p:sp>
-      <p:sp>
-        <p:nvSpPr>
-          <p:cNvPr id="4" name="Fußzeilenplatzhalter 3">
-            <a:extLst>
-              <a:ext uri="{FF2B5EF4-FFF2-40B4-BE49-F238E27FC236}">
-                <a16:creationId xmlns:a16="http://schemas.microsoft.com/office/drawing/2014/main" id="{BE855BF1-8386-1063-93BE-5AF7985716B2}"/>
-              </a:ext>
-            </a:extLst>
-          </p:cNvPr>
-          <p:cNvSpPr>
-            <a:spLocks noGrp="1"/>
-          </p:cNvSpPr>
-          <p:nvPr>
-            <p:ph type="ftr" sz="quarter" idx="3"/>
-          </p:nvPr>
-        </p:nvSpPr>
-        <p:spPr/>
-        <p:txBody>
-          <a:bodyPr/>
-          <a:lstStyle/>
-          <a:p>
             <a:pPr>
               <a:defRPr/>
             </a:pPr>
@@ -7667,7 +9266,7 @@
           <p:cNvPr id="5" name="Foliennummernplatzhalter 4">
             <a:extLst>
               <a:ext uri="{FF2B5EF4-FFF2-40B4-BE49-F238E27FC236}">
-                <a16:creationId xmlns:a16="http://schemas.microsoft.com/office/drawing/2014/main" id="{AF8C4E8C-6F15-26A6-D715-C6D2C3843F0A}"/>
+                <a16:creationId xmlns:a16="http://schemas.microsoft.com/office/drawing/2014/main" id="{D20C2B3F-B96C-1B47-C8E0-E6DD9547D325}"/>
               </a:ext>
             </a:extLst>
           </p:cNvPr>
@@ -7694,196 +9293,40 @@
       </p:sp>
       <p:pic>
         <p:nvPicPr>
-          <p:cNvPr id="6" name="Picture 4" descr="GradCAM: Enhancing Neural Network Interpretability">
-            <a:extLst>
-              <a:ext uri="{FF2B5EF4-FFF2-40B4-BE49-F238E27FC236}">
-                <a16:creationId xmlns:a16="http://schemas.microsoft.com/office/drawing/2014/main" id="{4300C151-C40A-578B-02F3-EECA49B0D529}"/>
+          <p:cNvPr id="7" name="Inhaltsplatzhalter 6">
+            <a:extLst>
+              <a:ext uri="{FF2B5EF4-FFF2-40B4-BE49-F238E27FC236}">
+                <a16:creationId xmlns:a16="http://schemas.microsoft.com/office/drawing/2014/main" id="{DBB4B6C4-DB73-BFFB-EFD4-3B9D4F88728C}"/>
               </a:ext>
             </a:extLst>
           </p:cNvPr>
           <p:cNvPicPr>
-            <a:picLocks noChangeAspect="1" noChangeArrowheads="1"/>
+            <a:picLocks noGrp="1" noChangeAspect="1"/>
           </p:cNvPicPr>
-          <p:nvPr/>
+          <p:nvPr>
+            <p:ph idx="1"/>
+          </p:nvPr>
         </p:nvPicPr>
-        <p:blipFill rotWithShape="1">
-          <a:blip r:embed="rId2">
-            <a:extLst>
-              <a:ext uri="{28A0092B-C50C-407E-A947-70E740481C1C}">
-                <a14:useLocalDpi xmlns:a14="http://schemas.microsoft.com/office/drawing/2010/main" val="0"/>
-              </a:ext>
-            </a:extLst>
-          </a:blip>
-          <a:srcRect r="66645"/>
+        <p:blipFill>
+          <a:blip r:embed="rId2"/>
           <a:stretch>
             <a:fillRect/>
           </a:stretch>
         </p:blipFill>
-        <p:spPr bwMode="auto">
+        <p:spPr>
           <a:xfrm>
-            <a:off x="5978669" y="1556792"/>
-            <a:ext cx="2389044" cy="2499425"/>
+            <a:off x="1835396" y="1333947"/>
+            <a:ext cx="7849695" cy="4963218"/>
           </a:xfrm>
           <a:prstGeom prst="rect">
             <a:avLst/>
           </a:prstGeom>
-          <a:noFill/>
-          <a:extLst>
-            <a:ext uri="{909E8E84-426E-40DD-AFC4-6F175D3DCCD1}">
-              <a14:hiddenFill xmlns:a14="http://schemas.microsoft.com/office/drawing/2010/main">
-                <a:solidFill>
-                  <a:srgbClr val="FFFFFF"/>
-                </a:solidFill>
-              </a14:hiddenFill>
-            </a:ext>
-          </a:extLst>
         </p:spPr>
       </p:pic>
-      <p:pic>
-        <p:nvPicPr>
-          <p:cNvPr id="7" name="Picture 6" descr="GradCAM: Enhancing Neural Network Interpretability">
-            <a:extLst>
-              <a:ext uri="{FF2B5EF4-FFF2-40B4-BE49-F238E27FC236}">
-                <a16:creationId xmlns:a16="http://schemas.microsoft.com/office/drawing/2014/main" id="{31D115B1-AC56-29F2-6840-C6525E80245A}"/>
-              </a:ext>
-            </a:extLst>
-          </p:cNvPr>
-          <p:cNvPicPr>
-            <a:picLocks noChangeAspect="1" noChangeArrowheads="1"/>
-          </p:cNvPicPr>
-          <p:nvPr/>
-        </p:nvPicPr>
-        <p:blipFill rotWithShape="1">
-          <a:blip r:embed="rId2">
-            <a:extLst>
-              <a:ext uri="{28A0092B-C50C-407E-A947-70E740481C1C}">
-                <a14:useLocalDpi xmlns:a14="http://schemas.microsoft.com/office/drawing/2010/main" val="0"/>
-              </a:ext>
-            </a:extLst>
-          </a:blip>
-          <a:srcRect l="66734"/>
-          <a:stretch>
-            <a:fillRect/>
-          </a:stretch>
-        </p:blipFill>
-        <p:spPr bwMode="auto">
-          <a:xfrm>
-            <a:off x="8733676" y="1550113"/>
-            <a:ext cx="2389044" cy="2506104"/>
-          </a:xfrm>
-          <a:prstGeom prst="rect">
-            <a:avLst/>
-          </a:prstGeom>
-          <a:noFill/>
-          <a:extLst>
-            <a:ext uri="{909E8E84-426E-40DD-AFC4-6F175D3DCCD1}">
-              <a14:hiddenFill xmlns:a14="http://schemas.microsoft.com/office/drawing/2010/main">
-                <a:solidFill>
-                  <a:srgbClr val="FFFFFF"/>
-                </a:solidFill>
-              </a14:hiddenFill>
-            </a:ext>
-          </a:extLst>
-        </p:spPr>
-      </p:pic>
-      <p:sp>
-        <p:nvSpPr>
-          <p:cNvPr id="8" name="Pfeil: nach rechts 7">
-            <a:extLst>
-              <a:ext uri="{FF2B5EF4-FFF2-40B4-BE49-F238E27FC236}">
-                <a16:creationId xmlns:a16="http://schemas.microsoft.com/office/drawing/2014/main" id="{E2DBFE24-B053-0F73-EFE7-89BA13870244}"/>
-              </a:ext>
-            </a:extLst>
-          </p:cNvPr>
-          <p:cNvSpPr/>
-          <p:nvPr/>
-        </p:nvSpPr>
-        <p:spPr>
-          <a:xfrm>
-            <a:off x="8394773" y="2596235"/>
-            <a:ext cx="338903" cy="375029"/>
-          </a:xfrm>
-          <a:prstGeom prst="rightArrow">
-            <a:avLst/>
-          </a:prstGeom>
-        </p:spPr>
-        <p:style>
-          <a:lnRef idx="2">
-            <a:schemeClr val="accent1">
-              <a:shade val="15000"/>
-            </a:schemeClr>
-          </a:lnRef>
-          <a:fillRef idx="1">
-            <a:schemeClr val="accent1"/>
-          </a:fillRef>
-          <a:effectRef idx="0">
-            <a:schemeClr val="accent1"/>
-          </a:effectRef>
-          <a:fontRef idx="minor">
-            <a:schemeClr val="lt1"/>
-          </a:fontRef>
-        </p:style>
-        <p:txBody>
-          <a:bodyPr rtlCol="0" anchor="ctr"/>
-          <a:lstStyle/>
-          <a:p>
-            <a:pPr algn="ctr"/>
-            <a:endParaRPr lang="en-DE"/>
-          </a:p>
-        </p:txBody>
-      </p:sp>
-      <p:sp>
-        <p:nvSpPr>
-          <p:cNvPr id="9" name="Textfeld 8">
-            <a:extLst>
-              <a:ext uri="{FF2B5EF4-FFF2-40B4-BE49-F238E27FC236}">
-                <a16:creationId xmlns:a16="http://schemas.microsoft.com/office/drawing/2014/main" id="{2CC092FC-3AEF-203D-2699-9AC54809EE29}"/>
-              </a:ext>
-            </a:extLst>
-          </p:cNvPr>
-          <p:cNvSpPr txBox="1"/>
-          <p:nvPr/>
-        </p:nvSpPr>
-        <p:spPr>
-          <a:xfrm>
-            <a:off x="7104112" y="4017386"/>
-            <a:ext cx="4914093" cy="338554"/>
-          </a:xfrm>
-          <a:prstGeom prst="rect">
-            <a:avLst/>
-          </a:prstGeom>
-          <a:noFill/>
-        </p:spPr>
-        <p:txBody>
-          <a:bodyPr wrap="square" rtlCol="0">
-            <a:spAutoFit/>
-          </a:bodyPr>
-          <a:lstStyle/>
-          <a:p>
-            <a:r>
-              <a:rPr lang="en-US" sz="1600" dirty="0"/>
-              <a:t>Abb. 1: </a:t>
-            </a:r>
-            <a:r>
-              <a:rPr lang="en-US" sz="1600" dirty="0" err="1"/>
-              <a:t>GradCam</a:t>
-            </a:r>
-            <a:r>
-              <a:rPr lang="en-US" sz="1600" dirty="0"/>
-              <a:t> </a:t>
-            </a:r>
-            <a:r>
-              <a:rPr lang="en-US" sz="1600" dirty="0" err="1"/>
-              <a:t>Visualisierung</a:t>
-            </a:r>
-            <a:endParaRPr lang="en-DE" sz="1600" dirty="0"/>
-          </a:p>
-        </p:txBody>
-      </p:sp>
     </p:spTree>
     <p:extLst>
       <p:ext uri="{BB962C8B-B14F-4D97-AF65-F5344CB8AC3E}">
-        <p14:creationId xmlns:p14="http://schemas.microsoft.com/office/powerpoint/2010/main" val="2507666670"/>
+        <p14:creationId xmlns:p14="http://schemas.microsoft.com/office/powerpoint/2010/main" val="1246825058"/>
       </p:ext>
     </p:extLst>
   </p:cSld>
@@ -7898,7 +9341,13 @@
   <p:cSld>
     <p:spTree>
       <p:nvGrpSpPr>
-        <p:cNvPr id="1" name=""/>
+        <p:cNvPr id="1" name="">
+          <a:extLst>
+            <a:ext uri="{FF2B5EF4-FFF2-40B4-BE49-F238E27FC236}">
+              <a16:creationId xmlns:a16="http://schemas.microsoft.com/office/drawing/2014/main" id="{05DF5E7E-6BB1-AAF9-706B-33FA3467389F}"/>
+            </a:ext>
+          </a:extLst>
+        </p:cNvPr>
         <p:cNvGrpSpPr/>
         <p:nvPr/>
       </p:nvGrpSpPr>
@@ -7915,7 +9364,7 @@
           <p:cNvPr id="2" name="Titel 1">
             <a:extLst>
               <a:ext uri="{FF2B5EF4-FFF2-40B4-BE49-F238E27FC236}">
-                <a16:creationId xmlns:a16="http://schemas.microsoft.com/office/drawing/2014/main" id="{9CCB9BE9-D776-9A3B-7386-D672D996F170}"/>
+                <a16:creationId xmlns:a16="http://schemas.microsoft.com/office/drawing/2014/main" id="{E50B6620-6132-D1AA-6164-5954884E2927}"/>
               </a:ext>
             </a:extLst>
           </p:cNvPr>
@@ -7933,66 +9382,29 @@
           <a:p>
             <a:r>
               <a:rPr lang="de-DE" dirty="0"/>
-              <a:t>Welche Kriterien nutzt das Model hauptsächlich zur Klassifizierung? - </a:t>
-            </a:r>
-            <a:r>
-              <a:rPr lang="de-DE" dirty="0" err="1"/>
-              <a:t>GradCam</a:t>
-            </a:r>
+              <a:t>Wie wirkt sich Data Augmentation auf die Erkennungsgenauigkeit des Modells aus?</a:t>
+            </a:r>
+            <a:br>
+              <a:rPr lang="de-DE" dirty="0"/>
+            </a:br>
             <a:endParaRPr lang="en-DE" dirty="0"/>
           </a:p>
         </p:txBody>
       </p:sp>
-      <p:pic>
-        <p:nvPicPr>
-          <p:cNvPr id="7" name="Inhaltsplatzhalter 6">
-            <a:extLst>
-              <a:ext uri="{FF2B5EF4-FFF2-40B4-BE49-F238E27FC236}">
-                <a16:creationId xmlns:a16="http://schemas.microsoft.com/office/drawing/2014/main" id="{B79A8EA9-8785-9E21-A18B-6566F3E7459E}"/>
-              </a:ext>
-            </a:extLst>
-          </p:cNvPr>
-          <p:cNvPicPr>
-            <a:picLocks noGrp="1" noChangeAspect="1"/>
-          </p:cNvPicPr>
+      <p:sp>
+        <p:nvSpPr>
+          <p:cNvPr id="3" name="Inhaltsplatzhalter 2">
+            <a:extLst>
+              <a:ext uri="{FF2B5EF4-FFF2-40B4-BE49-F238E27FC236}">
+                <a16:creationId xmlns:a16="http://schemas.microsoft.com/office/drawing/2014/main" id="{86F1B591-2AFE-128F-6EE7-9D7FE33E84E0}"/>
+              </a:ext>
+            </a:extLst>
+          </p:cNvPr>
+          <p:cNvSpPr>
+            <a:spLocks noGrp="1"/>
+          </p:cNvSpPr>
           <p:nvPr>
             <p:ph idx="1"/>
-          </p:nvPr>
-        </p:nvPicPr>
-        <p:blipFill rotWithShape="1">
-          <a:blip r:embed="rId3">
-            <a:extLst>
-              <a:ext uri="{28A0092B-C50C-407E-A947-70E740481C1C}">
-                <a14:useLocalDpi xmlns:a14="http://schemas.microsoft.com/office/drawing/2010/main" val="0"/>
-              </a:ext>
-            </a:extLst>
-          </a:blip>
-          <a:srcRect t="5089"/>
-          <a:stretch>
-            <a:fillRect/>
-          </a:stretch>
-        </p:blipFill>
-        <p:spPr>
-          <a:xfrm>
-            <a:off x="551384" y="3913893"/>
-            <a:ext cx="5040561" cy="2535976"/>
-          </a:xfrm>
-        </p:spPr>
-      </p:pic>
-      <p:sp>
-        <p:nvSpPr>
-          <p:cNvPr id="4" name="Fußzeilenplatzhalter 3">
-            <a:extLst>
-              <a:ext uri="{FF2B5EF4-FFF2-40B4-BE49-F238E27FC236}">
-                <a16:creationId xmlns:a16="http://schemas.microsoft.com/office/drawing/2014/main" id="{F84CE3A0-1660-DEA8-2B74-9448FC8DDF1C}"/>
-              </a:ext>
-            </a:extLst>
-          </p:cNvPr>
-          <p:cNvSpPr>
-            <a:spLocks noGrp="1"/>
-          </p:cNvSpPr>
-          <p:nvPr>
-            <p:ph type="ftr" sz="quarter" idx="3"/>
           </p:nvPr>
         </p:nvSpPr>
         <p:spPr/>
@@ -8000,6 +9412,65 @@
           <a:bodyPr/>
           <a:lstStyle/>
           <a:p>
+            <a:pPr marL="342900" indent="-342900">
+              <a:buAutoNum type="arabicPeriod"/>
+            </a:pPr>
+            <a:r>
+              <a:rPr lang="de-DE" dirty="0"/>
+              <a:t>Ansatz:</a:t>
+            </a:r>
+          </a:p>
+          <a:p>
+            <a:pPr marL="685800" lvl="1">
+              <a:buAutoNum type="alphaLcPeriod"/>
+            </a:pPr>
+            <a:r>
+              <a:rPr lang="de-DE" dirty="0"/>
+              <a:t>Trainiere Modelle mit unterschiedlichen </a:t>
+            </a:r>
+            <a:r>
+              <a:rPr lang="de-DE" dirty="0" err="1"/>
+              <a:t>Augmentierungen</a:t>
+            </a:r>
+            <a:endParaRPr lang="de-DE" dirty="0"/>
+          </a:p>
+          <a:p>
+            <a:pPr marL="685800" lvl="1">
+              <a:buAutoNum type="alphaLcPeriod"/>
+            </a:pPr>
+            <a:r>
+              <a:rPr lang="de-DE" dirty="0"/>
+              <a:t>Vergleiche </a:t>
+            </a:r>
+            <a:r>
+              <a:rPr lang="de-DE" dirty="0" err="1"/>
+              <a:t>Evaluationsmetriken</a:t>
+            </a:r>
+            <a:endParaRPr lang="de-DE" dirty="0"/>
+          </a:p>
+        </p:txBody>
+      </p:sp>
+      <p:sp>
+        <p:nvSpPr>
+          <p:cNvPr id="4" name="Fußzeilenplatzhalter 3">
+            <a:extLst>
+              <a:ext uri="{FF2B5EF4-FFF2-40B4-BE49-F238E27FC236}">
+                <a16:creationId xmlns:a16="http://schemas.microsoft.com/office/drawing/2014/main" id="{12C16F94-4C7B-3F51-C059-76191AC1FE1F}"/>
+              </a:ext>
+            </a:extLst>
+          </p:cNvPr>
+          <p:cNvSpPr>
+            <a:spLocks noGrp="1"/>
+          </p:cNvSpPr>
+          <p:nvPr>
+            <p:ph type="ftr" sz="quarter" idx="3"/>
+          </p:nvPr>
+        </p:nvSpPr>
+        <p:spPr/>
+        <p:txBody>
+          <a:bodyPr/>
+          <a:lstStyle/>
+          <a:p>
             <a:pPr>
               <a:defRPr/>
             </a:pPr>
@@ -8016,7 +9487,7 @@
           <p:cNvPr id="5" name="Foliennummernplatzhalter 4">
             <a:extLst>
               <a:ext uri="{FF2B5EF4-FFF2-40B4-BE49-F238E27FC236}">
-                <a16:creationId xmlns:a16="http://schemas.microsoft.com/office/drawing/2014/main" id="{5B393019-4F4E-8D36-DEBB-AA7222A12857}"/>
+                <a16:creationId xmlns:a16="http://schemas.microsoft.com/office/drawing/2014/main" id="{390A9B3D-581E-82BA-86B4-BCDC0722BBA2}"/>
               </a:ext>
             </a:extLst>
           </p:cNvPr>
@@ -8041,288 +9512,10 @@
           </a:p>
         </p:txBody>
       </p:sp>
-      <p:pic>
-        <p:nvPicPr>
-          <p:cNvPr id="9" name="Grafik 8">
-            <a:extLst>
-              <a:ext uri="{FF2B5EF4-FFF2-40B4-BE49-F238E27FC236}">
-                <a16:creationId xmlns:a16="http://schemas.microsoft.com/office/drawing/2014/main" id="{A87AFE59-DD18-549A-180D-1F5F71D82AB2}"/>
-              </a:ext>
-            </a:extLst>
-          </p:cNvPr>
-          <p:cNvPicPr>
-            <a:picLocks noChangeAspect="1"/>
-          </p:cNvPicPr>
-          <p:nvPr/>
-        </p:nvPicPr>
-        <p:blipFill>
-          <a:blip r:embed="rId4">
-            <a:extLst>
-              <a:ext uri="{28A0092B-C50C-407E-A947-70E740481C1C}">
-                <a14:useLocalDpi xmlns:a14="http://schemas.microsoft.com/office/drawing/2010/main" val="0"/>
-              </a:ext>
-            </a:extLst>
-          </a:blip>
-          <a:stretch>
-            <a:fillRect/>
-          </a:stretch>
-        </p:blipFill>
-        <p:spPr>
-          <a:xfrm>
-            <a:off x="551384" y="1228456"/>
-            <a:ext cx="5040560" cy="2671964"/>
-          </a:xfrm>
-          <a:prstGeom prst="rect">
-            <a:avLst/>
-          </a:prstGeom>
-        </p:spPr>
-      </p:pic>
-      <p:sp>
-        <p:nvSpPr>
-          <p:cNvPr id="10" name="Pfeil: nach rechts 9">
-            <a:extLst>
-              <a:ext uri="{FF2B5EF4-FFF2-40B4-BE49-F238E27FC236}">
-                <a16:creationId xmlns:a16="http://schemas.microsoft.com/office/drawing/2014/main" id="{DD597DAE-13CC-0DA3-C42C-29EFD825A1EE}"/>
-              </a:ext>
-            </a:extLst>
-          </p:cNvPr>
-          <p:cNvSpPr/>
-          <p:nvPr/>
-        </p:nvSpPr>
-        <p:spPr>
-          <a:xfrm>
-            <a:off x="2927648" y="2348880"/>
-            <a:ext cx="288032" cy="313858"/>
-          </a:xfrm>
-          <a:prstGeom prst="rightArrow">
-            <a:avLst/>
-          </a:prstGeom>
-        </p:spPr>
-        <p:style>
-          <a:lnRef idx="2">
-            <a:schemeClr val="accent1">
-              <a:shade val="15000"/>
-            </a:schemeClr>
-          </a:lnRef>
-          <a:fillRef idx="1">
-            <a:schemeClr val="accent1"/>
-          </a:fillRef>
-          <a:effectRef idx="0">
-            <a:schemeClr val="accent1"/>
-          </a:effectRef>
-          <a:fontRef idx="minor">
-            <a:schemeClr val="lt1"/>
-          </a:fontRef>
-        </p:style>
-        <p:txBody>
-          <a:bodyPr rtlCol="0" anchor="ctr"/>
-          <a:lstStyle/>
-          <a:p>
-            <a:pPr algn="ctr"/>
-            <a:endParaRPr lang="en-DE"/>
-          </a:p>
-        </p:txBody>
-      </p:sp>
-      <p:sp>
-        <p:nvSpPr>
-          <p:cNvPr id="11" name="Pfeil: nach rechts 10">
-            <a:extLst>
-              <a:ext uri="{FF2B5EF4-FFF2-40B4-BE49-F238E27FC236}">
-                <a16:creationId xmlns:a16="http://schemas.microsoft.com/office/drawing/2014/main" id="{C38D1F46-B1B3-7466-24B2-C9954F4ABD2F}"/>
-              </a:ext>
-            </a:extLst>
-          </p:cNvPr>
-          <p:cNvSpPr/>
-          <p:nvPr/>
-        </p:nvSpPr>
-        <p:spPr>
-          <a:xfrm>
-            <a:off x="2927648" y="4863915"/>
-            <a:ext cx="288032" cy="313858"/>
-          </a:xfrm>
-          <a:prstGeom prst="rightArrow">
-            <a:avLst/>
-          </a:prstGeom>
-        </p:spPr>
-        <p:style>
-          <a:lnRef idx="2">
-            <a:schemeClr val="accent1">
-              <a:shade val="15000"/>
-            </a:schemeClr>
-          </a:lnRef>
-          <a:fillRef idx="1">
-            <a:schemeClr val="accent1"/>
-          </a:fillRef>
-          <a:effectRef idx="0">
-            <a:schemeClr val="accent1"/>
-          </a:effectRef>
-          <a:fontRef idx="minor">
-            <a:schemeClr val="lt1"/>
-          </a:fontRef>
-        </p:style>
-        <p:txBody>
-          <a:bodyPr rtlCol="0" anchor="ctr"/>
-          <a:lstStyle/>
-          <a:p>
-            <a:pPr algn="ctr"/>
-            <a:endParaRPr lang="en-DE"/>
-          </a:p>
-        </p:txBody>
-      </p:sp>
-      <p:sp>
-        <p:nvSpPr>
-          <p:cNvPr id="12" name="Textfeld 11">
-            <a:extLst>
-              <a:ext uri="{FF2B5EF4-FFF2-40B4-BE49-F238E27FC236}">
-                <a16:creationId xmlns:a16="http://schemas.microsoft.com/office/drawing/2014/main" id="{FEA3B881-3A3D-A1FF-00F9-9EEBCE827E22}"/>
-              </a:ext>
-            </a:extLst>
-          </p:cNvPr>
-          <p:cNvSpPr txBox="1"/>
-          <p:nvPr/>
-        </p:nvSpPr>
-        <p:spPr>
-          <a:xfrm>
-            <a:off x="6168008" y="1880211"/>
-            <a:ext cx="6539420" cy="3016210"/>
-          </a:xfrm>
-          <a:prstGeom prst="rect">
-            <a:avLst/>
-          </a:prstGeom>
-          <a:noFill/>
-        </p:spPr>
-        <p:txBody>
-          <a:bodyPr wrap="square" rtlCol="0">
-            <a:spAutoFit/>
-          </a:bodyPr>
-          <a:lstStyle/>
-          <a:p>
-            <a:pPr>
-              <a:lnSpc>
-                <a:spcPct val="150000"/>
-              </a:lnSpc>
-            </a:pPr>
-            <a:r>
-              <a:rPr lang="en-US" sz="2000" b="1" dirty="0"/>
-              <a:t>Problem:</a:t>
-            </a:r>
-          </a:p>
-          <a:p>
-            <a:pPr marL="285750" indent="-285750">
-              <a:lnSpc>
-                <a:spcPct val="150000"/>
-              </a:lnSpc>
-              <a:buFont typeface="Arial" panose="020B0604020202020204" pitchFamily="34" charset="0"/>
-              <a:buChar char="•"/>
-            </a:pPr>
-            <a:r>
-              <a:rPr lang="en-US" sz="2000" dirty="0" err="1"/>
-              <a:t>Schwache</a:t>
-            </a:r>
-            <a:r>
-              <a:rPr lang="en-US" sz="2000" dirty="0"/>
-              <a:t>, diffuse Muster</a:t>
-            </a:r>
-          </a:p>
-          <a:p>
-            <a:pPr marL="285750" indent="-285750">
-              <a:lnSpc>
-                <a:spcPct val="150000"/>
-              </a:lnSpc>
-              <a:buFont typeface="Arial" panose="020B0604020202020204" pitchFamily="34" charset="0"/>
-              <a:buChar char="•"/>
-            </a:pPr>
-            <a:r>
-              <a:rPr lang="en-US" sz="2000" dirty="0" err="1"/>
-              <a:t>Keine</a:t>
-            </a:r>
-            <a:r>
-              <a:rPr lang="en-US" sz="2000" dirty="0"/>
-              <a:t> </a:t>
-            </a:r>
-            <a:r>
-              <a:rPr lang="en-US" sz="2000" dirty="0" err="1"/>
-              <a:t>klare</a:t>
-            </a:r>
-            <a:r>
-              <a:rPr lang="en-US" sz="2000" dirty="0"/>
-              <a:t> </a:t>
-            </a:r>
-            <a:r>
-              <a:rPr lang="en-US" sz="2000" dirty="0" err="1"/>
-              <a:t>Objektfokussierung</a:t>
-            </a:r>
-            <a:endParaRPr lang="en-US" sz="2000" dirty="0"/>
-          </a:p>
-          <a:p>
-            <a:pPr marL="285750" indent="-285750">
-              <a:lnSpc>
-                <a:spcPct val="150000"/>
-              </a:lnSpc>
-              <a:buFont typeface="Arial" panose="020B0604020202020204" pitchFamily="34" charset="0"/>
-              <a:buChar char="•"/>
-            </a:pPr>
-            <a:r>
-              <a:rPr lang="en-US" sz="2000" dirty="0"/>
-              <a:t>Bei 32x32 Pixel </a:t>
-            </a:r>
-            <a:r>
-              <a:rPr lang="en-US" sz="2000" dirty="0" err="1"/>
-              <a:t>schwer</a:t>
-            </a:r>
-            <a:r>
-              <a:rPr lang="en-US" sz="2000" dirty="0"/>
-              <a:t> </a:t>
-            </a:r>
-            <a:r>
-              <a:rPr lang="en-US" sz="2000" dirty="0" err="1"/>
-              <a:t>interpretierbar</a:t>
-            </a:r>
-            <a:endParaRPr lang="en-US" sz="2000" dirty="0"/>
-          </a:p>
-          <a:p>
-            <a:pPr>
-              <a:lnSpc>
-                <a:spcPct val="150000"/>
-              </a:lnSpc>
-            </a:pPr>
-            <a:endParaRPr lang="en-US" sz="2000" dirty="0"/>
-          </a:p>
-          <a:p>
-            <a:r>
-              <a:rPr lang="en-US" sz="2000" b="1" dirty="0"/>
-              <a:t>Frage: </a:t>
-            </a:r>
-            <a:r>
-              <a:rPr lang="en-US" sz="2000" dirty="0"/>
-              <a:t>Lernt das Modell </a:t>
-            </a:r>
-            <a:r>
-              <a:rPr lang="en-US" sz="2000" dirty="0" err="1"/>
-              <a:t>überhaupt</a:t>
-            </a:r>
-            <a:r>
-              <a:rPr lang="en-US" sz="2000" dirty="0"/>
-              <a:t> </a:t>
-            </a:r>
-          </a:p>
-          <a:p>
-            <a:r>
-              <a:rPr lang="en-US" sz="2000" dirty="0" err="1"/>
-              <a:t>sinnvolle</a:t>
-            </a:r>
-            <a:r>
-              <a:rPr lang="en-US" sz="2000" dirty="0"/>
-              <a:t> Features?</a:t>
-            </a:r>
-            <a:endParaRPr lang="en-DE" sz="2000" dirty="0"/>
-          </a:p>
-        </p:txBody>
-      </p:sp>
     </p:spTree>
     <p:extLst>
       <p:ext uri="{BB962C8B-B14F-4D97-AF65-F5344CB8AC3E}">
-        <p14:creationId xmlns:p14="http://schemas.microsoft.com/office/powerpoint/2010/main" val="2159623008"/>
+        <p14:creationId xmlns:p14="http://schemas.microsoft.com/office/powerpoint/2010/main" val="1929609554"/>
       </p:ext>
     </p:extLst>
   </p:cSld>

--- a/ADA_SoSe2025_Waldbranderkennung.pptx
+++ b/ADA_SoSe2025_Waldbranderkennung.pptx
@@ -397,7 +397,7 @@
               <a:pPr>
                 <a:defRPr/>
               </a:pPr>
-              <a:t>11.06.2025</a:t>
+              <a:t>12.06.2025</a:t>
             </a:fld>
             <a:endParaRPr lang="de-DE"/>
           </a:p>
@@ -639,7 +639,7 @@
               <a:pPr>
                 <a:defRPr/>
               </a:pPr>
-              <a:t>11.06.2025</a:t>
+              <a:t>12.06.2025</a:t>
             </a:fld>
             <a:endParaRPr lang="de-DE"/>
           </a:p>
@@ -1224,6 +1224,385 @@
       </p:grpSpPr>
       <p:sp>
         <p:nvSpPr>
+          <p:cNvPr id="2" name="Folienbildplatzhalter 1"/>
+          <p:cNvSpPr>
+            <a:spLocks noGrp="1" noRot="1" noChangeAspect="1"/>
+          </p:cNvSpPr>
+          <p:nvPr>
+            <p:ph type="sldImg"/>
+          </p:nvPr>
+        </p:nvSpPr>
+        <p:spPr/>
+      </p:sp>
+      <p:sp>
+        <p:nvSpPr>
+          <p:cNvPr id="3" name="Notizenplatzhalter 2"/>
+          <p:cNvSpPr>
+            <a:spLocks noGrp="1"/>
+          </p:cNvSpPr>
+          <p:nvPr>
+            <p:ph type="body" idx="1"/>
+          </p:nvPr>
+        </p:nvSpPr>
+        <p:spPr/>
+        <p:txBody>
+          <a:bodyPr/>
+          <a:lstStyle/>
+          <a:p>
+            <a:r>
+              <a:rPr lang="de-DE" dirty="0"/>
+              <a:t>Meist nur leichte Differenzen -&gt; im 100er und 1000er Bereich</a:t>
+            </a:r>
+          </a:p>
+          <a:p>
+            <a:r>
+              <a:rPr lang="de-DE" dirty="0"/>
+              <a:t>Nur </a:t>
+            </a:r>
+            <a:r>
+              <a:rPr lang="de-DE" dirty="0" err="1"/>
+              <a:t>Brightness</a:t>
+            </a:r>
+            <a:r>
+              <a:rPr lang="de-DE" dirty="0"/>
+              <a:t> hat Leistung stark verschlechtert -&gt; mehr dazu später</a:t>
+            </a:r>
+            <a:endParaRPr lang="en-US" dirty="0"/>
+          </a:p>
+        </p:txBody>
+      </p:sp>
+      <p:sp>
+        <p:nvSpPr>
+          <p:cNvPr id="4" name="Foliennummernplatzhalter 3"/>
+          <p:cNvSpPr>
+            <a:spLocks noGrp="1"/>
+          </p:cNvSpPr>
+          <p:nvPr>
+            <p:ph type="sldNum" sz="quarter" idx="5"/>
+          </p:nvPr>
+        </p:nvSpPr>
+        <p:spPr/>
+        <p:txBody>
+          <a:bodyPr/>
+          <a:lstStyle/>
+          <a:p>
+            <a:pPr>
+              <a:defRPr/>
+            </a:pPr>
+            <a:fld id="{933E609E-29E7-47DF-8388-48CA1BD678D7}" type="slidenum">
+              <a:rPr lang="de-DE" smtClean="0"/>
+              <a:pPr>
+                <a:defRPr/>
+              </a:pPr>
+              <a:t>8</a:t>
+            </a:fld>
+            <a:endParaRPr lang="de-DE"/>
+          </a:p>
+        </p:txBody>
+      </p:sp>
+    </p:spTree>
+    <p:extLst>
+      <p:ext uri="{BB962C8B-B14F-4D97-AF65-F5344CB8AC3E}">
+        <p14:creationId xmlns:p14="http://schemas.microsoft.com/office/powerpoint/2010/main" val="2626326021"/>
+      </p:ext>
+    </p:extLst>
+  </p:cSld>
+  <p:clrMapOvr>
+    <a:masterClrMapping/>
+  </p:clrMapOvr>
+</p:notes>
+</file>
+
+<file path=ppt/notesSlides/notesSlide4.xml><?xml version="1.0" encoding="utf-8"?>
+<p:notes xmlns:a="http://schemas.openxmlformats.org/drawingml/2006/main" xmlns:r="http://schemas.openxmlformats.org/officeDocument/2006/relationships" xmlns:p="http://schemas.openxmlformats.org/presentationml/2006/main">
+  <p:cSld>
+    <p:spTree>
+      <p:nvGrpSpPr>
+        <p:cNvPr id="1" name=""/>
+        <p:cNvGrpSpPr/>
+        <p:nvPr/>
+      </p:nvGrpSpPr>
+      <p:grpSpPr>
+        <a:xfrm>
+          <a:off x="0" y="0"/>
+          <a:ext cx="0" cy="0"/>
+          <a:chOff x="0" y="0"/>
+          <a:chExt cx="0" cy="0"/>
+        </a:xfrm>
+      </p:grpSpPr>
+      <p:sp>
+        <p:nvSpPr>
+          <p:cNvPr id="2" name="Folienbildplatzhalter 1"/>
+          <p:cNvSpPr>
+            <a:spLocks noGrp="1" noRot="1" noChangeAspect="1"/>
+          </p:cNvSpPr>
+          <p:nvPr>
+            <p:ph type="sldImg"/>
+          </p:nvPr>
+        </p:nvSpPr>
+        <p:spPr/>
+      </p:sp>
+      <p:sp>
+        <p:nvSpPr>
+          <p:cNvPr id="3" name="Notizenplatzhalter 2"/>
+          <p:cNvSpPr>
+            <a:spLocks noGrp="1"/>
+          </p:cNvSpPr>
+          <p:nvPr>
+            <p:ph type="body" idx="1"/>
+          </p:nvPr>
+        </p:nvSpPr>
+        <p:spPr/>
+        <p:txBody>
+          <a:bodyPr/>
+          <a:lstStyle/>
+          <a:p>
+            <a:pPr marL="171450" indent="-171450"/>
+            <a:r>
+              <a:rPr lang="de-DE" dirty="0"/>
+              <a:t>Recall als einziger Wert gestiegen -&gt; weniger </a:t>
+            </a:r>
+            <a:r>
+              <a:rPr lang="de-DE" dirty="0" err="1"/>
+              <a:t>false</a:t>
+            </a:r>
+            <a:r>
+              <a:rPr lang="de-DE" dirty="0"/>
+              <a:t> negatives als zuvor</a:t>
+            </a:r>
+          </a:p>
+          <a:p>
+            <a:pPr marL="171450" indent="-171450"/>
+            <a:r>
+              <a:rPr lang="de-DE" dirty="0"/>
+              <a:t>Alle anderen </a:t>
+            </a:r>
+            <a:r>
+              <a:rPr lang="de-DE" dirty="0" err="1"/>
+              <a:t>Gütemaße</a:t>
+            </a:r>
+            <a:r>
+              <a:rPr lang="de-DE" dirty="0"/>
+              <a:t> dafür sichtbar gesunken</a:t>
+            </a:r>
+          </a:p>
+          <a:p>
+            <a:pPr marL="171450" indent="-171450"/>
+            <a:r>
+              <a:rPr lang="de-DE" dirty="0"/>
+              <a:t>Bei </a:t>
+            </a:r>
+            <a:r>
+              <a:rPr lang="de-DE" dirty="0" err="1"/>
+              <a:t>Augmentierung</a:t>
+            </a:r>
+            <a:r>
+              <a:rPr lang="de-DE" dirty="0"/>
+              <a:t>:</a:t>
+            </a:r>
+          </a:p>
+          <a:p>
+            <a:pPr marL="628650" lvl="1" indent="-171450"/>
+            <a:r>
+              <a:rPr lang="de-DE" dirty="0"/>
+              <a:t>Von tats. Kein Waldbrand -&gt; ganze 18,5% </a:t>
+            </a:r>
+            <a:r>
+              <a:rPr lang="de-DE" dirty="0" err="1"/>
+              <a:t>false</a:t>
+            </a:r>
+            <a:endParaRPr lang="de-DE" dirty="0"/>
+          </a:p>
+          <a:p>
+            <a:pPr marL="628650" lvl="1" indent="-171450"/>
+            <a:r>
+              <a:rPr lang="de-DE" dirty="0"/>
+              <a:t>Viele </a:t>
+            </a:r>
+            <a:r>
+              <a:rPr lang="de-DE" dirty="0" err="1"/>
+              <a:t>fehlalarme</a:t>
+            </a:r>
+            <a:endParaRPr lang="en-US" dirty="0"/>
+          </a:p>
+        </p:txBody>
+      </p:sp>
+      <p:sp>
+        <p:nvSpPr>
+          <p:cNvPr id="4" name="Foliennummernplatzhalter 3"/>
+          <p:cNvSpPr>
+            <a:spLocks noGrp="1"/>
+          </p:cNvSpPr>
+          <p:nvPr>
+            <p:ph type="sldNum" sz="quarter" idx="5"/>
+          </p:nvPr>
+        </p:nvSpPr>
+        <p:spPr/>
+        <p:txBody>
+          <a:bodyPr/>
+          <a:lstStyle/>
+          <a:p>
+            <a:pPr>
+              <a:defRPr/>
+            </a:pPr>
+            <a:fld id="{933E609E-29E7-47DF-8388-48CA1BD678D7}" type="slidenum">
+              <a:rPr lang="de-DE" smtClean="0"/>
+              <a:pPr>
+                <a:defRPr/>
+              </a:pPr>
+              <a:t>12</a:t>
+            </a:fld>
+            <a:endParaRPr lang="de-DE"/>
+          </a:p>
+        </p:txBody>
+      </p:sp>
+    </p:spTree>
+    <p:extLst>
+      <p:ext uri="{BB962C8B-B14F-4D97-AF65-F5344CB8AC3E}">
+        <p14:creationId xmlns:p14="http://schemas.microsoft.com/office/powerpoint/2010/main" val="4125280381"/>
+      </p:ext>
+    </p:extLst>
+  </p:cSld>
+  <p:clrMapOvr>
+    <a:masterClrMapping/>
+  </p:clrMapOvr>
+</p:notes>
+</file>
+
+<file path=ppt/notesSlides/notesSlide5.xml><?xml version="1.0" encoding="utf-8"?>
+<p:notes xmlns:a="http://schemas.openxmlformats.org/drawingml/2006/main" xmlns:r="http://schemas.openxmlformats.org/officeDocument/2006/relationships" xmlns:p="http://schemas.openxmlformats.org/presentationml/2006/main">
+  <p:cSld>
+    <p:spTree>
+      <p:nvGrpSpPr>
+        <p:cNvPr id="1" name=""/>
+        <p:cNvGrpSpPr/>
+        <p:nvPr/>
+      </p:nvGrpSpPr>
+      <p:grpSpPr>
+        <a:xfrm>
+          <a:off x="0" y="0"/>
+          <a:ext cx="0" cy="0"/>
+          <a:chOff x="0" y="0"/>
+          <a:chExt cx="0" cy="0"/>
+        </a:xfrm>
+      </p:grpSpPr>
+      <p:sp>
+        <p:nvSpPr>
+          <p:cNvPr id="2" name="Folienbildplatzhalter 1"/>
+          <p:cNvSpPr>
+            <a:spLocks noGrp="1" noRot="1" noChangeAspect="1"/>
+          </p:cNvSpPr>
+          <p:nvPr>
+            <p:ph type="sldImg"/>
+          </p:nvPr>
+        </p:nvSpPr>
+        <p:spPr/>
+      </p:sp>
+      <p:sp>
+        <p:nvSpPr>
+          <p:cNvPr id="3" name="Notizenplatzhalter 2"/>
+          <p:cNvSpPr>
+            <a:spLocks noGrp="1"/>
+          </p:cNvSpPr>
+          <p:nvPr>
+            <p:ph type="body" idx="1"/>
+          </p:nvPr>
+        </p:nvSpPr>
+        <p:spPr/>
+        <p:txBody>
+          <a:bodyPr/>
+          <a:lstStyle/>
+          <a:p>
+            <a:r>
+              <a:rPr lang="de-DE" dirty="0"/>
+              <a:t>Leichte Schwankungen</a:t>
+            </a:r>
+          </a:p>
+          <a:p>
+            <a:r>
+              <a:rPr lang="de-DE" dirty="0"/>
+              <a:t>Außer bei Recall -&gt; deutlicher Anstieg</a:t>
+            </a:r>
+          </a:p>
+          <a:p>
+            <a:pPr lvl="1"/>
+            <a:r>
+              <a:rPr lang="de-DE" dirty="0"/>
+              <a:t>Weniger </a:t>
+            </a:r>
+            <a:r>
+              <a:rPr lang="de-DE" dirty="0" err="1"/>
+              <a:t>waldbrände</a:t>
+            </a:r>
+            <a:r>
+              <a:rPr lang="de-DE" dirty="0"/>
+              <a:t> werden übersehen</a:t>
+            </a:r>
+            <a:endParaRPr lang="en-US" dirty="0"/>
+          </a:p>
+        </p:txBody>
+      </p:sp>
+      <p:sp>
+        <p:nvSpPr>
+          <p:cNvPr id="4" name="Foliennummernplatzhalter 3"/>
+          <p:cNvSpPr>
+            <a:spLocks noGrp="1"/>
+          </p:cNvSpPr>
+          <p:nvPr>
+            <p:ph type="sldNum" sz="quarter" idx="5"/>
+          </p:nvPr>
+        </p:nvSpPr>
+        <p:spPr/>
+        <p:txBody>
+          <a:bodyPr/>
+          <a:lstStyle/>
+          <a:p>
+            <a:pPr>
+              <a:defRPr/>
+            </a:pPr>
+            <a:fld id="{933E609E-29E7-47DF-8388-48CA1BD678D7}" type="slidenum">
+              <a:rPr lang="de-DE" smtClean="0"/>
+              <a:pPr>
+                <a:defRPr/>
+              </a:pPr>
+              <a:t>13</a:t>
+            </a:fld>
+            <a:endParaRPr lang="de-DE"/>
+          </a:p>
+        </p:txBody>
+      </p:sp>
+    </p:spTree>
+    <p:extLst>
+      <p:ext uri="{BB962C8B-B14F-4D97-AF65-F5344CB8AC3E}">
+        <p14:creationId xmlns:p14="http://schemas.microsoft.com/office/powerpoint/2010/main" val="477171527"/>
+      </p:ext>
+    </p:extLst>
+  </p:cSld>
+  <p:clrMapOvr>
+    <a:masterClrMapping/>
+  </p:clrMapOvr>
+</p:notes>
+</file>
+
+<file path=ppt/notesSlides/notesSlide6.xml><?xml version="1.0" encoding="utf-8"?>
+<p:notes xmlns:a="http://schemas.openxmlformats.org/drawingml/2006/main" xmlns:r="http://schemas.openxmlformats.org/officeDocument/2006/relationships" xmlns:p="http://schemas.openxmlformats.org/presentationml/2006/main">
+  <p:cSld>
+    <p:spTree>
+      <p:nvGrpSpPr>
+        <p:cNvPr id="1" name=""/>
+        <p:cNvGrpSpPr/>
+        <p:nvPr/>
+      </p:nvGrpSpPr>
+      <p:grpSpPr>
+        <a:xfrm>
+          <a:off x="0" y="0"/>
+          <a:ext cx="0" cy="0"/>
+          <a:chOff x="0" y="0"/>
+          <a:chExt cx="0" cy="0"/>
+        </a:xfrm>
+      </p:grpSpPr>
+      <p:sp>
+        <p:nvSpPr>
           <p:cNvPr id="2" name="Slide Image Placeholder 1"/>
           <p:cNvSpPr>
             <a:spLocks noGrp="1" noRot="1" noChangeAspect="1"/>
@@ -1295,7 +1674,7 @@
 </p:notes>
 </file>
 
-<file path=ppt/notesSlides/notesSlide4.xml><?xml version="1.0" encoding="utf-8"?>
+<file path=ppt/notesSlides/notesSlide7.xml><?xml version="1.0" encoding="utf-8"?>
 <p:notes xmlns:a="http://schemas.openxmlformats.org/drawingml/2006/main" xmlns:r="http://schemas.openxmlformats.org/officeDocument/2006/relationships" xmlns:p="http://schemas.openxmlformats.org/presentationml/2006/main">
   <p:cSld>
     <p:spTree>
@@ -1707,7 +2086,7 @@
             </a:pPr>
             <a:fld id="{97C69557-540C-447C-8BEF-1BBC1255F022}" type="datetime1">
               <a:rPr lang="de-DE" smtClean="0"/>
-              <a:t>11.06.2025</a:t>
+              <a:t>12.06.2025</a:t>
             </a:fld>
             <a:endParaRPr lang="de-DE" dirty="0"/>
           </a:p>
@@ -2206,7 +2585,7 @@
             </a:pPr>
             <a:fld id="{AC577783-DE3D-4066-A708-26327062C6C4}" type="datetime1">
               <a:rPr lang="de-DE" smtClean="0"/>
-              <a:t>11.06.2025</a:t>
+              <a:t>12.06.2025</a:t>
             </a:fld>
             <a:endParaRPr lang="de-DE" dirty="0"/>
           </a:p>
@@ -2548,7 +2927,7 @@
             </a:pPr>
             <a:fld id="{09D76D4D-BB23-473E-876C-4E3EC0B5B16A}" type="datetime1">
               <a:rPr lang="de-DE" smtClean="0"/>
-              <a:t>11.06.2025</a:t>
+              <a:t>12.06.2025</a:t>
             </a:fld>
             <a:endParaRPr lang="de-DE" dirty="0"/>
           </a:p>
@@ -3401,6 +3780,36 @@
           </a:p>
         </p:txBody>
       </p:sp>
+      <p:pic>
+        <p:nvPicPr>
+          <p:cNvPr id="3" name="Grafik 2">
+            <a:extLst>
+              <a:ext uri="{FF2B5EF4-FFF2-40B4-BE49-F238E27FC236}">
+                <a16:creationId xmlns:a16="http://schemas.microsoft.com/office/drawing/2014/main" id="{9150669C-F04F-B2F6-2DB0-5F36AD6963B9}"/>
+              </a:ext>
+            </a:extLst>
+          </p:cNvPr>
+          <p:cNvPicPr>
+            <a:picLocks noChangeAspect="1"/>
+          </p:cNvPicPr>
+          <p:nvPr/>
+        </p:nvPicPr>
+        <p:blipFill>
+          <a:blip r:embed="rId2"/>
+          <a:stretch>
+            <a:fillRect/>
+          </a:stretch>
+        </p:blipFill>
+        <p:spPr>
+          <a:xfrm>
+            <a:off x="539571" y="4221154"/>
+            <a:ext cx="10440857" cy="2114845"/>
+          </a:xfrm>
+          <a:prstGeom prst="rect">
+            <a:avLst/>
+          </a:prstGeom>
+        </p:spPr>
+      </p:pic>
     </p:spTree>
     <p:extLst>
       <p:ext uri="{BB962C8B-B14F-4D97-AF65-F5344CB8AC3E}">
@@ -3572,7 +3981,7 @@
             </a:pPr>
             <a:r>
               <a:rPr lang="de-DE" dirty="0"/>
-              <a:t>auf veränderten Testdaten</a:t>
+              <a:t>auf augmentierten Testdaten</a:t>
             </a:r>
           </a:p>
         </p:txBody>
@@ -3639,6 +4048,36 @@
           </a:p>
         </p:txBody>
       </p:sp>
+      <p:pic>
+        <p:nvPicPr>
+          <p:cNvPr id="6" name="Grafik 5">
+            <a:extLst>
+              <a:ext uri="{FF2B5EF4-FFF2-40B4-BE49-F238E27FC236}">
+                <a16:creationId xmlns:a16="http://schemas.microsoft.com/office/drawing/2014/main" id="{D388B816-F9CF-5B2A-A733-4C7748B7DC72}"/>
+              </a:ext>
+            </a:extLst>
+          </p:cNvPr>
+          <p:cNvPicPr>
+            <a:picLocks noChangeAspect="1"/>
+          </p:cNvPicPr>
+          <p:nvPr/>
+        </p:nvPicPr>
+        <p:blipFill>
+          <a:blip r:embed="rId2"/>
+          <a:stretch>
+            <a:fillRect/>
+          </a:stretch>
+        </p:blipFill>
+        <p:spPr>
+          <a:xfrm>
+            <a:off x="539571" y="4221154"/>
+            <a:ext cx="10440857" cy="2114845"/>
+          </a:xfrm>
+          <a:prstGeom prst="rect">
+            <a:avLst/>
+          </a:prstGeom>
+        </p:spPr>
+      </p:pic>
     </p:spTree>
     <p:extLst>
       <p:ext uri="{BB962C8B-B14F-4D97-AF65-F5344CB8AC3E}">
@@ -3785,7 +4224,7 @@
           </p:nvPr>
         </p:nvPicPr>
         <p:blipFill>
-          <a:blip r:embed="rId2"/>
+          <a:blip r:embed="rId3"/>
           <a:stretch>
             <a:fillRect/>
           </a:stretch>
@@ -3812,7 +4251,7 @@
           <p:nvPr/>
         </p:nvPicPr>
         <p:blipFill>
-          <a:blip r:embed="rId3"/>
+          <a:blip r:embed="rId4"/>
           <a:stretch>
             <a:fillRect/>
           </a:stretch>
@@ -3911,7 +4350,7 @@
           </p:nvPr>
         </p:nvPicPr>
         <p:blipFill>
-          <a:blip r:embed="rId2"/>
+          <a:blip r:embed="rId3"/>
           <a:stretch>
             <a:fillRect/>
           </a:stretch>
@@ -4000,7 +4439,7 @@
           <p:nvPr/>
         </p:nvPicPr>
         <p:blipFill>
-          <a:blip r:embed="rId3"/>
+          <a:blip r:embed="rId4"/>
           <a:stretch>
             <a:fillRect/>
           </a:stretch>
@@ -9167,6 +9606,36 @@
           </a:p>
         </p:txBody>
       </p:sp>
+      <p:pic>
+        <p:nvPicPr>
+          <p:cNvPr id="9" name="Grafik 8">
+            <a:extLst>
+              <a:ext uri="{FF2B5EF4-FFF2-40B4-BE49-F238E27FC236}">
+                <a16:creationId xmlns:a16="http://schemas.microsoft.com/office/drawing/2014/main" id="{60EB4F7F-C999-248B-B0C7-C3367CE35F43}"/>
+              </a:ext>
+            </a:extLst>
+          </p:cNvPr>
+          <p:cNvPicPr>
+            <a:picLocks noChangeAspect="1"/>
+          </p:cNvPicPr>
+          <p:nvPr/>
+        </p:nvPicPr>
+        <p:blipFill>
+          <a:blip r:embed="rId2"/>
+          <a:stretch>
+            <a:fillRect/>
+          </a:stretch>
+        </p:blipFill>
+        <p:spPr>
+          <a:xfrm>
+            <a:off x="539571" y="4221154"/>
+            <a:ext cx="10440857" cy="2114845"/>
+          </a:xfrm>
+          <a:prstGeom prst="rect">
+            <a:avLst/>
+          </a:prstGeom>
+        </p:spPr>
+      </p:pic>
     </p:spTree>
     <p:extLst>
       <p:ext uri="{BB962C8B-B14F-4D97-AF65-F5344CB8AC3E}">
@@ -9293,10 +9762,10 @@
       </p:sp>
       <p:pic>
         <p:nvPicPr>
-          <p:cNvPr id="7" name="Inhaltsplatzhalter 6">
-            <a:extLst>
-              <a:ext uri="{FF2B5EF4-FFF2-40B4-BE49-F238E27FC236}">
-                <a16:creationId xmlns:a16="http://schemas.microsoft.com/office/drawing/2014/main" id="{DBB4B6C4-DB73-BFFB-EFD4-3B9D4F88728C}"/>
+          <p:cNvPr id="11" name="Inhaltsplatzhalter 10">
+            <a:extLst>
+              <a:ext uri="{FF2B5EF4-FFF2-40B4-BE49-F238E27FC236}">
+                <a16:creationId xmlns:a16="http://schemas.microsoft.com/office/drawing/2014/main" id="{B1E37523-CB50-9DED-9D75-697E65E95EA2}"/>
               </a:ext>
             </a:extLst>
           </p:cNvPr>
@@ -9308,19 +9777,16 @@
           </p:nvPr>
         </p:nvPicPr>
         <p:blipFill>
-          <a:blip r:embed="rId2"/>
+          <a:blip r:embed="rId3"/>
           <a:stretch>
             <a:fillRect/>
           </a:stretch>
         </p:blipFill>
         <p:spPr>
           <a:xfrm>
-            <a:off x="1835396" y="1333947"/>
-            <a:ext cx="7849695" cy="4963218"/>
+            <a:off x="2264844" y="1198239"/>
+            <a:ext cx="7662312" cy="5321385"/>
           </a:xfrm>
-          <a:prstGeom prst="rect">
-            <a:avLst/>
-          </a:prstGeom>
         </p:spPr>
       </p:pic>
     </p:spTree>
@@ -9512,6 +9978,36 @@
           </a:p>
         </p:txBody>
       </p:sp>
+      <p:pic>
+        <p:nvPicPr>
+          <p:cNvPr id="6" name="Grafik 5">
+            <a:extLst>
+              <a:ext uri="{FF2B5EF4-FFF2-40B4-BE49-F238E27FC236}">
+                <a16:creationId xmlns:a16="http://schemas.microsoft.com/office/drawing/2014/main" id="{6D3A7200-B072-80C1-E27C-E045BE9422B2}"/>
+              </a:ext>
+            </a:extLst>
+          </p:cNvPr>
+          <p:cNvPicPr>
+            <a:picLocks noChangeAspect="1"/>
+          </p:cNvPicPr>
+          <p:nvPr/>
+        </p:nvPicPr>
+        <p:blipFill>
+          <a:blip r:embed="rId2"/>
+          <a:stretch>
+            <a:fillRect/>
+          </a:stretch>
+        </p:blipFill>
+        <p:spPr>
+          <a:xfrm>
+            <a:off x="539571" y="4221154"/>
+            <a:ext cx="10440857" cy="2114845"/>
+          </a:xfrm>
+          <a:prstGeom prst="rect">
+            <a:avLst/>
+          </a:prstGeom>
+        </p:spPr>
+      </p:pic>
     </p:spTree>
     <p:extLst>
       <p:ext uri="{BB962C8B-B14F-4D97-AF65-F5344CB8AC3E}">

--- a/ADA_SoSe2025_Waldbranderkennung.pptx
+++ b/ADA_SoSe2025_Waldbranderkennung.pptx
@@ -397,7 +397,7 @@
               <a:pPr>
                 <a:defRPr/>
               </a:pPr>
-              <a:t>12.06.2025</a:t>
+              <a:t>13.06.2025</a:t>
             </a:fld>
             <a:endParaRPr lang="de-DE"/>
           </a:p>
@@ -639,7 +639,7 @@
               <a:pPr>
                 <a:defRPr/>
               </a:pPr>
-              <a:t>12.06.2025</a:t>
+              <a:t>13.06.2025</a:t>
             </a:fld>
             <a:endParaRPr lang="de-DE"/>
           </a:p>
@@ -2086,7 +2086,7 @@
             </a:pPr>
             <a:fld id="{97C69557-540C-447C-8BEF-1BBC1255F022}" type="datetime1">
               <a:rPr lang="de-DE" smtClean="0"/>
-              <a:t>12.06.2025</a:t>
+              <a:t>13.06.2025</a:t>
             </a:fld>
             <a:endParaRPr lang="de-DE" dirty="0"/>
           </a:p>
@@ -2585,7 +2585,7 @@
             </a:pPr>
             <a:fld id="{AC577783-DE3D-4066-A708-26327062C6C4}" type="datetime1">
               <a:rPr lang="de-DE" smtClean="0"/>
-              <a:t>12.06.2025</a:t>
+              <a:t>13.06.2025</a:t>
             </a:fld>
             <a:endParaRPr lang="de-DE" dirty="0"/>
           </a:p>
@@ -2927,7 +2927,7 @@
             </a:pPr>
             <a:fld id="{09D76D4D-BB23-473E-876C-4E3EC0B5B16A}" type="datetime1">
               <a:rPr lang="de-DE" smtClean="0"/>
-              <a:t>12.06.2025</a:t>
+              <a:t>13.06.2025</a:t>
             </a:fld>
             <a:endParaRPr lang="de-DE" dirty="0"/>
           </a:p>
